--- a/lectures/lecture-01/Lecture01_Introduction_to_Interior_Design.pptx
+++ b/lectures/lecture-01/Lecture01_Introduction_to_Interior_Design.pptx
@@ -135,14 +135,14 @@
   <p:extLst>
     <p:ext uri="{521415D9-36F7-43E2-AB2F-B90AF26B5E84}">
       <p14:sectionLst xmlns:p14="http://schemas.microsoft.com/office/powerpoint/2010/main">
-        <p14:section name="Opening" id="{49e6ee82-f68a-6a75-46c9-8b1c8773077f}">
+        <p14:section name="Opening" id="{f9fb072b-e7e6-6dff-33a0-c46048c019e1}">
           <p14:sldIdLst>
             <p14:sldId id="256"/>
             <p14:sldId id="257"/>
             <p14:sldId id="258"/>
           </p14:sldIdLst>
         </p14:section>
-        <p14:section name="Design &amp; Interior Design" id="{fd98d23f-f2cc-6695-7beb-d10991ff5cfc}">
+        <p14:section name="Design &amp; Interior Design" id="{8f1a2fc1-d35a-26b7-dafa-4ed00dc10949}">
           <p14:sldIdLst>
             <p14:sldId id="259"/>
             <p14:sldId id="260"/>
@@ -150,7 +150,7 @@
             <p14:sldId id="262"/>
           </p14:sldIdLst>
         </p14:section>
-        <p14:section name="Space" id="{2f6c7cad-e6cf-5098-8fa9-1bc779609e58}">
+        <p14:section name="Space" id="{750b062c-d463-4e19-97c7-e4e6823a7599}">
           <p14:sldIdLst>
             <p14:sldId id="263"/>
             <p14:sldId id="264"/>
@@ -168,14 +168,14 @@
             <p14:sldId id="276"/>
           </p14:sldIdLst>
         </p14:section>
-        <p14:section name="Openings &amp; Human" id="{ed969209-a337-653e-620d-f8c40d454feb}">
+        <p14:section name="Openings &amp; Human" id="{6160a87d-20dc-9dfe-c3ba-dbf4d34d012e}">
           <p14:sldIdLst>
             <p14:sldId id="277"/>
             <p14:sldId id="278"/>
             <p14:sldId id="279"/>
           </p14:sldIdLst>
         </p14:section>
-        <p14:section name="Synthesis &amp; Exercise" id="{20ec065e-0298-d9c4-eba4-67adff730335}">
+        <p14:section name="Synthesis &amp; Exercise" id="{76164714-1d91-7198-39f1-5d395864d737}">
           <p14:sldIdLst>
             <p14:sldId id="280"/>
             <p14:sldId id="281"/>
@@ -3209,6 +3209,9 @@
                 <a:solidFill>
                   <a:schemeClr val="accent3"/>
                 </a:solidFill>
+                <a:latin typeface="Times New Roman" pitchFamily="34" charset="0"/>
+                <a:ea typeface="Times New Roman" pitchFamily="34" charset="-122"/>
+                <a:cs typeface="Times New Roman" pitchFamily="34" charset="-120"/>
               </a:rPr>
               <a:t>Introduction to Interior Design  ·  Lecture 01</a:t>
             </a:r>
@@ -3400,6 +3403,9 @@
                 <a:solidFill>
                   <a:schemeClr val="accent3"/>
                 </a:solidFill>
+                <a:latin typeface="Times New Roman" pitchFamily="34" charset="0"/>
+                <a:ea typeface="Times New Roman" pitchFamily="34" charset="-122"/>
+                <a:cs typeface="Times New Roman" pitchFamily="34" charset="-120"/>
               </a:rPr>
               <a:t>Introduction to Interior Design  ·  Lecture 01</a:t>
             </a:r>
@@ -4283,6 +4289,9 @@
                 <a:solidFill>
                   <a:srgbClr val="C2593A"/>
                 </a:solidFill>
+                <a:latin typeface="Times New Roman" pitchFamily="34" charset="0"/>
+                <a:ea typeface="Times New Roman" pitchFamily="34" charset="-122"/>
+                <a:cs typeface="Times New Roman" pitchFamily="34" charset="-120"/>
               </a:rPr>
               <a:t>المحاضرة الأولى</a:t>
             </a:r>
@@ -4321,6 +4330,9 @@
                 <a:solidFill>
                   <a:srgbClr val="FFFFFF"/>
                 </a:solidFill>
+                <a:latin typeface="Times New Roman" pitchFamily="34" charset="0"/>
+                <a:ea typeface="Times New Roman" pitchFamily="34" charset="-122"/>
+                <a:cs typeface="Times New Roman" pitchFamily="34" charset="-120"/>
               </a:rPr>
               <a:t>مقدمة في التصميم الداخلي</a:t>
             </a:r>
@@ -4357,6 +4369,9 @@
                 <a:solidFill>
                   <a:srgbClr val="B9C4C4"/>
                 </a:solidFill>
+                <a:latin typeface="Times New Roman" pitchFamily="34" charset="0"/>
+                <a:ea typeface="Times New Roman" pitchFamily="34" charset="-122"/>
+                <a:cs typeface="Times New Roman" pitchFamily="34" charset="-120"/>
               </a:rPr>
               <a:t>Introduction to Interior Design</a:t>
             </a:r>
@@ -4419,6 +4434,9 @@
                 <a:solidFill>
                   <a:srgbClr val="C2593A"/>
                 </a:solidFill>
+                <a:latin typeface="Times New Roman" pitchFamily="34" charset="0"/>
+                <a:ea typeface="Times New Roman" pitchFamily="34" charset="-122"/>
+                <a:cs typeface="Times New Roman" pitchFamily="34" charset="-120"/>
               </a:rPr>
               <a:t>المادة: </a:t>
             </a:r>
@@ -4433,6 +4451,9 @@
                 <a:solidFill>
                   <a:srgbClr val="FFFFFF"/>
                 </a:solidFill>
+                <a:latin typeface="Times New Roman" pitchFamily="34" charset="0"/>
+                <a:ea typeface="Times New Roman" pitchFamily="34" charset="-122"/>
+                <a:cs typeface="Times New Roman" pitchFamily="34" charset="-120"/>
               </a:rPr>
               <a:t>Introduction to Interior Design &amp; Fundamentals</a:t>
             </a:r>
@@ -4450,6 +4471,9 @@
                 <a:solidFill>
                   <a:srgbClr val="C2593A"/>
                 </a:solidFill>
+                <a:latin typeface="Times New Roman" pitchFamily="34" charset="0"/>
+                <a:ea typeface="Times New Roman" pitchFamily="34" charset="-122"/>
+                <a:cs typeface="Times New Roman" pitchFamily="34" charset="-120"/>
               </a:rPr>
               <a:t>المرسم: </a:t>
             </a:r>
@@ -4464,6 +4488,9 @@
                 <a:solidFill>
                   <a:srgbClr val="FFFFFF"/>
                 </a:solidFill>
+                <a:latin typeface="Times New Roman" pitchFamily="34" charset="0"/>
+                <a:ea typeface="Times New Roman" pitchFamily="34" charset="-122"/>
+                <a:cs typeface="Times New Roman" pitchFamily="34" charset="-120"/>
               </a:rPr>
               <a:t>Studio 3</a:t>
             </a:r>
@@ -4481,6 +4508,9 @@
                 <a:solidFill>
                   <a:srgbClr val="D9A441"/>
                 </a:solidFill>
+                <a:latin typeface="Times New Roman" pitchFamily="34" charset="0"/>
+                <a:ea typeface="Times New Roman" pitchFamily="34" charset="-122"/>
+                <a:cs typeface="Times New Roman" pitchFamily="34" charset="-120"/>
               </a:rPr>
               <a:t>Lecture 01</a:t>
             </a:r>
@@ -4517,6 +4547,9 @@
                 <a:solidFill>
                   <a:srgbClr val="8A9A9B"/>
                 </a:solidFill>
+                <a:latin typeface="Times New Roman" pitchFamily="34" charset="0"/>
+                <a:ea typeface="Times New Roman" pitchFamily="34" charset="-122"/>
+                <a:cs typeface="Times New Roman" pitchFamily="34" charset="-120"/>
               </a:rPr>
               <a:t>Theory reference: Ching, F.D.K. — Architecture: Form, Space, and Order</a:t>
             </a:r>
@@ -4580,6 +4613,9 @@
                 <a:solidFill>
                   <a:schemeClr val="accent1"/>
                 </a:solidFill>
+                <a:latin typeface="Times New Roman" pitchFamily="34" charset="0"/>
+                <a:ea typeface="Times New Roman" pitchFamily="34" charset="-122"/>
+                <a:cs typeface="Times New Roman" pitchFamily="34" charset="-120"/>
               </a:rPr>
               <a:t>07 — PRIMARY ELEMENTS OF FORM</a:t>
             </a:r>
@@ -4618,6 +4654,9 @@
                 <a:solidFill>
                   <a:schemeClr val="tx1"/>
                 </a:solidFill>
+                <a:latin typeface="Times New Roman" pitchFamily="34" charset="0"/>
+                <a:ea typeface="Times New Roman" pitchFamily="34" charset="-122"/>
+                <a:cs typeface="Times New Roman" pitchFamily="34" charset="-120"/>
               </a:rPr>
               <a:t>عناصر تشكيل الفراغ</a:t>
             </a:r>
@@ -4654,6 +4693,9 @@
                 <a:solidFill>
                   <a:srgbClr val="3A4146"/>
                 </a:solidFill>
+                <a:latin typeface="Times New Roman" pitchFamily="34" charset="0"/>
+                <a:ea typeface="Times New Roman" pitchFamily="34" charset="-122"/>
+                <a:cs typeface="Times New Roman" pitchFamily="34" charset="-120"/>
               </a:rPr>
               <a:t>يقدّم المرجع العناصر الأولية للشكل؛ كل عنصر ينتج من امتداد العنصر الذي قبله في بُعد جديد.</a:t>
             </a:r>
@@ -4739,6 +4781,9 @@
                 <a:solidFill>
                   <a:srgbClr val="1F2224"/>
                 </a:solidFill>
+                <a:latin typeface="Times New Roman" pitchFamily="34" charset="0"/>
+                <a:ea typeface="Times New Roman" pitchFamily="34" charset="-122"/>
+                <a:cs typeface="Times New Roman" pitchFamily="34" charset="-120"/>
               </a:rPr>
               <a:t>POINT</a:t>
             </a:r>
@@ -4775,6 +4820,9 @@
                 <a:solidFill>
                   <a:srgbClr val="C2593A"/>
                 </a:solidFill>
+                <a:latin typeface="Times New Roman" pitchFamily="34" charset="0"/>
+                <a:ea typeface="Times New Roman" pitchFamily="34" charset="-122"/>
+                <a:cs typeface="Times New Roman" pitchFamily="34" charset="-120"/>
               </a:rPr>
               <a:t>نقطة  ·  بُعد صفري</a:t>
             </a:r>
@@ -4811,6 +4859,9 @@
                 <a:solidFill>
                   <a:srgbClr val="3A4146"/>
                 </a:solidFill>
+                <a:latin typeface="Times New Roman" pitchFamily="34" charset="0"/>
+                <a:ea typeface="Times New Roman" pitchFamily="34" charset="-122"/>
+                <a:cs typeface="Times New Roman" pitchFamily="34" charset="-120"/>
               </a:rPr>
               <a:t>يحدد موقعًا في الفراغ — بلا طول أو عرض أو عمق.</a:t>
             </a:r>
@@ -4847,6 +4898,9 @@
                 <a:solidFill>
                   <a:srgbClr val="5B6770"/>
                 </a:solidFill>
+                <a:latin typeface="Times New Roman" pitchFamily="34" charset="0"/>
+                <a:ea typeface="Times New Roman" pitchFamily="34" charset="-122"/>
+                <a:cs typeface="Times New Roman" pitchFamily="34" charset="-120"/>
               </a:rPr>
               <a:t>Position</a:t>
             </a:r>
@@ -5000,6 +5054,9 @@
                 <a:solidFill>
                   <a:srgbClr val="1F2224"/>
                 </a:solidFill>
+                <a:latin typeface="Times New Roman" pitchFamily="34" charset="0"/>
+                <a:ea typeface="Times New Roman" pitchFamily="34" charset="-122"/>
+                <a:cs typeface="Times New Roman" pitchFamily="34" charset="-120"/>
               </a:rPr>
               <a:t>LINE</a:t>
             </a:r>
@@ -5036,6 +5093,9 @@
                 <a:solidFill>
                   <a:srgbClr val="C2593A"/>
                 </a:solidFill>
+                <a:latin typeface="Times New Roman" pitchFamily="34" charset="0"/>
+                <a:ea typeface="Times New Roman" pitchFamily="34" charset="-122"/>
+                <a:cs typeface="Times New Roman" pitchFamily="34" charset="-120"/>
               </a:rPr>
               <a:t>خط  ·  بُعد واحد</a:t>
             </a:r>
@@ -5072,6 +5132,9 @@
                 <a:solidFill>
                   <a:srgbClr val="3A4146"/>
                 </a:solidFill>
+                <a:latin typeface="Times New Roman" pitchFamily="34" charset="0"/>
+                <a:ea typeface="Times New Roman" pitchFamily="34" charset="-122"/>
+                <a:cs typeface="Times New Roman" pitchFamily="34" charset="-120"/>
               </a:rPr>
               <a:t>امتداد النقطة؛ له طول واتجاه وموقع.</a:t>
             </a:r>
@@ -5108,6 +5171,9 @@
                 <a:solidFill>
                   <a:srgbClr val="5B6770"/>
                 </a:solidFill>
+                <a:latin typeface="Times New Roman" pitchFamily="34" charset="0"/>
+                <a:ea typeface="Times New Roman" pitchFamily="34" charset="-122"/>
+                <a:cs typeface="Times New Roman" pitchFamily="34" charset="-120"/>
               </a:rPr>
               <a:t>Length · Direction</a:t>
             </a:r>
@@ -5246,6 +5312,9 @@
                 <a:solidFill>
                   <a:srgbClr val="1F2224"/>
                 </a:solidFill>
+                <a:latin typeface="Times New Roman" pitchFamily="34" charset="0"/>
+                <a:ea typeface="Times New Roman" pitchFamily="34" charset="-122"/>
+                <a:cs typeface="Times New Roman" pitchFamily="34" charset="-120"/>
               </a:rPr>
               <a:t>PLANE</a:t>
             </a:r>
@@ -5282,6 +5351,9 @@
                 <a:solidFill>
                   <a:srgbClr val="C2593A"/>
                 </a:solidFill>
+                <a:latin typeface="Times New Roman" pitchFamily="34" charset="0"/>
+                <a:ea typeface="Times New Roman" pitchFamily="34" charset="-122"/>
+                <a:cs typeface="Times New Roman" pitchFamily="34" charset="-120"/>
               </a:rPr>
               <a:t>مستوى  ·  بُعدان</a:t>
             </a:r>
@@ -5318,6 +5390,9 @@
                 <a:solidFill>
                   <a:srgbClr val="3A4146"/>
                 </a:solidFill>
+                <a:latin typeface="Times New Roman" pitchFamily="34" charset="0"/>
+                <a:ea typeface="Times New Roman" pitchFamily="34" charset="-122"/>
+                <a:cs typeface="Times New Roman" pitchFamily="34" charset="-120"/>
               </a:rPr>
               <a:t>امتداد الخط؛ له طول وعرض وشكل وسطح واتجاه.</a:t>
             </a:r>
@@ -5354,6 +5429,9 @@
                 <a:solidFill>
                   <a:srgbClr val="5B6770"/>
                 </a:solidFill>
+                <a:latin typeface="Times New Roman" pitchFamily="34" charset="0"/>
+                <a:ea typeface="Times New Roman" pitchFamily="34" charset="-122"/>
+                <a:cs typeface="Times New Roman" pitchFamily="34" charset="-120"/>
               </a:rPr>
               <a:t>Shape · Surface</a:t>
             </a:r>
@@ -5582,6 +5660,9 @@
                 <a:solidFill>
                   <a:srgbClr val="1F2224"/>
                 </a:solidFill>
+                <a:latin typeface="Times New Roman" pitchFamily="34" charset="0"/>
+                <a:ea typeface="Times New Roman" pitchFamily="34" charset="-122"/>
+                <a:cs typeface="Times New Roman" pitchFamily="34" charset="-120"/>
               </a:rPr>
               <a:t>VOLUME</a:t>
             </a:r>
@@ -5618,6 +5699,9 @@
                 <a:solidFill>
                   <a:srgbClr val="C2593A"/>
                 </a:solidFill>
+                <a:latin typeface="Times New Roman" pitchFamily="34" charset="0"/>
+                <a:ea typeface="Times New Roman" pitchFamily="34" charset="-122"/>
+                <a:cs typeface="Times New Roman" pitchFamily="34" charset="-120"/>
               </a:rPr>
               <a:t>حجم  ·  ثلاثة أبعاد</a:t>
             </a:r>
@@ -5654,6 +5738,9 @@
                 <a:solidFill>
                   <a:srgbClr val="3A4146"/>
                 </a:solidFill>
+                <a:latin typeface="Times New Roman" pitchFamily="34" charset="0"/>
+                <a:ea typeface="Times New Roman" pitchFamily="34" charset="-122"/>
+                <a:cs typeface="Times New Roman" pitchFamily="34" charset="-120"/>
               </a:rPr>
               <a:t>امتداد المستوى في البُعد الثالث؛ له طول وعرض وعمق.</a:t>
             </a:r>
@@ -5690,6 +5777,9 @@
                 <a:solidFill>
                   <a:srgbClr val="5B6770"/>
                 </a:solidFill>
+                <a:latin typeface="Times New Roman" pitchFamily="34" charset="0"/>
+                <a:ea typeface="Times New Roman" pitchFamily="34" charset="-122"/>
+                <a:cs typeface="Times New Roman" pitchFamily="34" charset="-120"/>
               </a:rPr>
               <a:t>Form &amp; Space</a:t>
             </a:r>
@@ -5798,6 +5888,9 @@
                 <a:solidFill>
                   <a:schemeClr val="accent1"/>
                 </a:solidFill>
+                <a:latin typeface="Times New Roman" pitchFamily="34" charset="0"/>
+                <a:ea typeface="Times New Roman" pitchFamily="34" charset="-122"/>
+                <a:cs typeface="Times New Roman" pitchFamily="34" charset="-120"/>
               </a:rPr>
               <a:t>07-A — PLANE &amp; VOLUME</a:t>
             </a:r>
@@ -5836,6 +5929,9 @@
                 <a:solidFill>
                   <a:schemeClr val="tx1"/>
                 </a:solidFill>
+                <a:latin typeface="Times New Roman" pitchFamily="34" charset="0"/>
+                <a:ea typeface="Times New Roman" pitchFamily="34" charset="-122"/>
+                <a:cs typeface="Times New Roman" pitchFamily="34" charset="-120"/>
               </a:rPr>
               <a:t>المستوى والحجم</a:t>
             </a:r>
@@ -6264,6 +6360,9 @@
                 <a:solidFill>
                   <a:srgbClr val="1F2224"/>
                 </a:solidFill>
+                <a:latin typeface="Times New Roman" pitchFamily="34" charset="0"/>
+                <a:ea typeface="Times New Roman" pitchFamily="34" charset="-122"/>
+                <a:cs typeface="Times New Roman" pitchFamily="34" charset="-120"/>
               </a:rPr>
               <a:t>Points / Vertices</a:t>
             </a:r>
@@ -6300,6 +6399,9 @@
                 <a:solidFill>
                   <a:srgbClr val="3A4146"/>
                 </a:solidFill>
+                <a:latin typeface="Times New Roman" pitchFamily="34" charset="0"/>
+                <a:ea typeface="Times New Roman" pitchFamily="34" charset="-122"/>
+                <a:cs typeface="Times New Roman" pitchFamily="34" charset="-120"/>
               </a:rPr>
               <a:t>النقاط — الرؤوس</a:t>
             </a:r>
@@ -6336,6 +6438,9 @@
                 <a:solidFill>
                   <a:srgbClr val="1F2224"/>
                 </a:solidFill>
+                <a:latin typeface="Times New Roman" pitchFamily="34" charset="0"/>
+                <a:ea typeface="Times New Roman" pitchFamily="34" charset="-122"/>
+                <a:cs typeface="Times New Roman" pitchFamily="34" charset="-120"/>
               </a:rPr>
               <a:t>Lines / Edges</a:t>
             </a:r>
@@ -6372,6 +6477,9 @@
                 <a:solidFill>
                   <a:srgbClr val="3A4146"/>
                 </a:solidFill>
+                <a:latin typeface="Times New Roman" pitchFamily="34" charset="0"/>
+                <a:ea typeface="Times New Roman" pitchFamily="34" charset="-122"/>
+                <a:cs typeface="Times New Roman" pitchFamily="34" charset="-120"/>
               </a:rPr>
               <a:t>الخطوط — الحواف (التقاء مستويين)</a:t>
             </a:r>
@@ -6408,6 +6516,9 @@
                 <a:solidFill>
                   <a:srgbClr val="1F2224"/>
                 </a:solidFill>
+                <a:latin typeface="Times New Roman" pitchFamily="34" charset="0"/>
+                <a:ea typeface="Times New Roman" pitchFamily="34" charset="-122"/>
+                <a:cs typeface="Times New Roman" pitchFamily="34" charset="-120"/>
               </a:rPr>
               <a:t>Planes / Surfaces</a:t>
             </a:r>
@@ -6444,6 +6555,9 @@
                 <a:solidFill>
                   <a:srgbClr val="3A4146"/>
                 </a:solidFill>
+                <a:latin typeface="Times New Roman" pitchFamily="34" charset="0"/>
+                <a:ea typeface="Times New Roman" pitchFamily="34" charset="-122"/>
+                <a:cs typeface="Times New Roman" pitchFamily="34" charset="-120"/>
               </a:rPr>
               <a:t>المستويات — الأسطح</a:t>
             </a:r>
@@ -6509,6 +6623,9 @@
                 <a:solidFill>
                   <a:srgbClr val="C2593A"/>
                 </a:solidFill>
+                <a:latin typeface="Times New Roman" pitchFamily="34" charset="0"/>
+                <a:ea typeface="Times New Roman" pitchFamily="34" charset="-122"/>
+                <a:cs typeface="Times New Roman" pitchFamily="34" charset="-120"/>
               </a:rPr>
               <a:t>PLANE</a:t>
             </a:r>
@@ -6549,6 +6666,9 @@
                 <a:solidFill>
                   <a:srgbClr val="1F2224"/>
                 </a:solidFill>
+                <a:latin typeface="Times New Roman" pitchFamily="34" charset="0"/>
+                <a:ea typeface="Times New Roman" pitchFamily="34" charset="-122"/>
+                <a:cs typeface="Times New Roman" pitchFamily="34" charset="-120"/>
               </a:rPr>
               <a:t>الشكل (Shape) هو الخاصية الأساسية التي تميّز المستوى.</a:t>
             </a:r>
@@ -6567,6 +6687,9 @@
                 <a:solidFill>
                   <a:srgbClr val="1F2224"/>
                 </a:solidFill>
+                <a:latin typeface="Times New Roman" pitchFamily="34" charset="0"/>
+                <a:ea typeface="Times New Roman" pitchFamily="34" charset="-122"/>
+                <a:cs typeface="Times New Roman" pitchFamily="34" charset="-120"/>
               </a:rPr>
               <a:t>خصائص مكمّلة: السطح، اللون، النمط، الملمس — تؤثر في وزنه البصري واستقراره.</a:t>
             </a:r>
@@ -6585,6 +6708,9 @@
                 <a:solidFill>
                   <a:srgbClr val="1F2224"/>
                 </a:solidFill>
+                <a:latin typeface="Times New Roman" pitchFamily="34" charset="0"/>
+                <a:ea typeface="Times New Roman" pitchFamily="34" charset="-122"/>
+                <a:cs typeface="Times New Roman" pitchFamily="34" charset="-120"/>
               </a:rPr>
               <a:t>يعمل المستوى على تحديد حدود الحجم.</a:t>
             </a:r>
@@ -6643,6 +6769,9 @@
                 <a:solidFill>
                   <a:srgbClr val="D9A441"/>
                 </a:solidFill>
+                <a:latin typeface="Times New Roman" pitchFamily="34" charset="0"/>
+                <a:ea typeface="Times New Roman" pitchFamily="34" charset="-122"/>
+                <a:cs typeface="Times New Roman" pitchFamily="34" charset="-120"/>
               </a:rPr>
               <a:t>VOLUME</a:t>
             </a:r>
@@ -6683,6 +6812,9 @@
                 <a:solidFill>
                   <a:srgbClr val="FFFFFF"/>
                 </a:solidFill>
+                <a:latin typeface="Times New Roman" pitchFamily="34" charset="0"/>
+                <a:ea typeface="Times New Roman" pitchFamily="34" charset="-122"/>
+                <a:cs typeface="Times New Roman" pitchFamily="34" charset="-120"/>
               </a:rPr>
               <a:t>الهيئة (Form) هي الخاصية الأساسية التي تميّز الحجم.</a:t>
             </a:r>
@@ -6701,6 +6833,9 @@
                 <a:solidFill>
                   <a:srgbClr val="FFFFFF"/>
                 </a:solidFill>
+                <a:latin typeface="Times New Roman" pitchFamily="34" charset="0"/>
+                <a:ea typeface="Times New Roman" pitchFamily="34" charset="-122"/>
+                <a:cs typeface="Times New Roman" pitchFamily="34" charset="-120"/>
               </a:rPr>
               <a:t>تتحدد بأشكال المستويات والعلاقات بينها.</a:t>
             </a:r>
@@ -6719,6 +6854,9 @@
                 <a:solidFill>
                   <a:srgbClr val="FFFFFF"/>
                 </a:solidFill>
+                <a:latin typeface="Times New Roman" pitchFamily="34" charset="0"/>
+                <a:ea typeface="Times New Roman" pitchFamily="34" charset="-122"/>
+                <a:cs typeface="Times New Roman" pitchFamily="34" charset="-120"/>
               </a:rPr>
               <a:t>الحجم إما كتلة صلبة (Solid) أو فراغ (Void) تحتويه المستويات — وهذا الفراغ هو ما نصممه.</a:t>
             </a:r>
@@ -6827,6 +6965,9 @@
                 <a:solidFill>
                   <a:schemeClr val="accent1"/>
                 </a:solidFill>
+                <a:latin typeface="Times New Roman" pitchFamily="34" charset="0"/>
+                <a:ea typeface="Times New Roman" pitchFamily="34" charset="-122"/>
+                <a:cs typeface="Times New Roman" pitchFamily="34" charset="-120"/>
               </a:rPr>
               <a:t>08 — FROM ELEMENTS TO INTERIOR SPACE</a:t>
             </a:r>
@@ -6865,6 +7006,9 @@
                 <a:solidFill>
                   <a:schemeClr val="tx1"/>
                 </a:solidFill>
+                <a:latin typeface="Times New Roman" pitchFamily="34" charset="0"/>
+                <a:ea typeface="Times New Roman" pitchFamily="34" charset="-122"/>
+                <a:cs typeface="Times New Roman" pitchFamily="34" charset="-120"/>
               </a:rPr>
               <a:t>من العناصر إلى الفراغ الداخلي</a:t>
             </a:r>
@@ -6901,6 +7045,9 @@
                 <a:solidFill>
                   <a:srgbClr val="3A4146"/>
                 </a:solidFill>
+                <a:latin typeface="Times New Roman" pitchFamily="34" charset="0"/>
+                <a:ea typeface="Times New Roman" pitchFamily="34" charset="-122"/>
+                <a:cs typeface="Times New Roman" pitchFamily="34" charset="-120"/>
               </a:rPr>
               <a:t>المستوى (Plane) هو العنصر الأهم في تشكيل الفراغ الداخلي، ويظهر في ثلاثة أنواع عامة:</a:t>
             </a:r>
@@ -7314,6 +7461,9 @@
                 <a:solidFill>
                   <a:srgbClr val="5B6770"/>
                 </a:solidFill>
+                <a:latin typeface="Times New Roman" pitchFamily="34" charset="0"/>
+                <a:ea typeface="Times New Roman" pitchFamily="34" charset="-122"/>
+                <a:cs typeface="Times New Roman" pitchFamily="34" charset="-120"/>
               </a:rPr>
               <a:t>Munich Olympic Stadium</a:t>
             </a:r>
@@ -7350,6 +7500,9 @@
                 <a:solidFill>
                   <a:srgbClr val="1F2224"/>
                 </a:solidFill>
+                <a:latin typeface="Times New Roman" pitchFamily="34" charset="0"/>
+                <a:ea typeface="Times New Roman" pitchFamily="34" charset="-122"/>
+                <a:cs typeface="Times New Roman" pitchFamily="34" charset="-120"/>
               </a:rPr>
               <a:t>Overhead Plane</a:t>
             </a:r>
@@ -7386,6 +7539,9 @@
                 <a:solidFill>
                   <a:srgbClr val="3A4146"/>
                 </a:solidFill>
+                <a:latin typeface="Times New Roman" pitchFamily="34" charset="0"/>
+                <a:ea typeface="Times New Roman" pitchFamily="34" charset="-122"/>
+                <a:cs typeface="Times New Roman" pitchFamily="34" charset="-120"/>
               </a:rPr>
               <a:t>السقف — سقف الفراغ أو سطح المبنى.</a:t>
             </a:r>
@@ -7519,6 +7675,9 @@
                 <a:solidFill>
                   <a:srgbClr val="5B6770"/>
                 </a:solidFill>
+                <a:latin typeface="Times New Roman" pitchFamily="34" charset="0"/>
+                <a:ea typeface="Times New Roman" pitchFamily="34" charset="-122"/>
+                <a:cs typeface="Times New Roman" pitchFamily="34" charset="-120"/>
               </a:rPr>
               <a:t>Modern interior</a:t>
             </a:r>
@@ -7555,6 +7714,9 @@
                 <a:solidFill>
                   <a:srgbClr val="1F2224"/>
                 </a:solidFill>
+                <a:latin typeface="Times New Roman" pitchFamily="34" charset="0"/>
+                <a:ea typeface="Times New Roman" pitchFamily="34" charset="-122"/>
+                <a:cs typeface="Times New Roman" pitchFamily="34" charset="-120"/>
               </a:rPr>
               <a:t>Wall Plane</a:t>
             </a:r>
@@ -7591,6 +7753,9 @@
                 <a:solidFill>
                   <a:srgbClr val="3A4146"/>
                 </a:solidFill>
+                <a:latin typeface="Times New Roman" pitchFamily="34" charset="0"/>
+                <a:ea typeface="Times New Roman" pitchFamily="34" charset="-122"/>
+                <a:cs typeface="Times New Roman" pitchFamily="34" charset="-120"/>
               </a:rPr>
               <a:t>الجدار — أساسي لاحتواء الفراغ، والأكثر حضورًا في مجال الرؤية.</a:t>
             </a:r>
@@ -7724,6 +7889,9 @@
                 <a:solidFill>
                   <a:srgbClr val="5B6770"/>
                 </a:solidFill>
+                <a:latin typeface="Times New Roman" pitchFamily="34" charset="0"/>
+                <a:ea typeface="Times New Roman" pitchFamily="34" charset="-122"/>
+                <a:cs typeface="Times New Roman" pitchFamily="34" charset="-120"/>
               </a:rPr>
               <a:t>Precast house</a:t>
             </a:r>
@@ -7760,6 +7928,9 @@
                 <a:solidFill>
                   <a:srgbClr val="1F2224"/>
                 </a:solidFill>
+                <a:latin typeface="Times New Roman" pitchFamily="34" charset="0"/>
+                <a:ea typeface="Times New Roman" pitchFamily="34" charset="-122"/>
+                <a:cs typeface="Times New Roman" pitchFamily="34" charset="-120"/>
               </a:rPr>
               <a:t>Base Plane</a:t>
             </a:r>
@@ -7796,6 +7967,9 @@
                 <a:solidFill>
                   <a:srgbClr val="3A4146"/>
                 </a:solidFill>
+                <a:latin typeface="Times New Roman" pitchFamily="34" charset="0"/>
+                <a:ea typeface="Times New Roman" pitchFamily="34" charset="-122"/>
+                <a:cs typeface="Times New Roman" pitchFamily="34" charset="-120"/>
               </a:rPr>
               <a:t>الأرضية — عليه يندمج المبنى أو يستقر أو يرتفع عنه.</a:t>
             </a:r>
@@ -7832,6 +8006,9 @@
                 <a:solidFill>
                   <a:srgbClr val="2F6B6A"/>
                 </a:solidFill>
+                <a:latin typeface="Times New Roman" pitchFamily="34" charset="0"/>
+                <a:ea typeface="Times New Roman" pitchFamily="34" charset="-122"/>
+                <a:cs typeface="Times New Roman" pitchFamily="34" charset="-120"/>
               </a:rPr>
               <a:t>هذه المستويات الثلاثة هي أهم العناصر التي تحدد الفراغ المعماري والداخلي.</a:t>
             </a:r>
@@ -7940,6 +8117,9 @@
                 <a:solidFill>
                   <a:schemeClr val="accent1"/>
                 </a:solidFill>
+                <a:latin typeface="Times New Roman" pitchFamily="34" charset="0"/>
+                <a:ea typeface="Times New Roman" pitchFamily="34" charset="-122"/>
+                <a:cs typeface="Times New Roman" pitchFamily="34" charset="-120"/>
               </a:rPr>
               <a:t>09 — BASE PLANE</a:t>
             </a:r>
@@ -7978,6 +8158,9 @@
                 <a:solidFill>
                   <a:schemeClr val="tx1"/>
                 </a:solidFill>
+                <a:latin typeface="Times New Roman" pitchFamily="34" charset="0"/>
+                <a:ea typeface="Times New Roman" pitchFamily="34" charset="-122"/>
+                <a:cs typeface="Times New Roman" pitchFamily="34" charset="-120"/>
               </a:rPr>
               <a:t>الأرضية — المستوى الأساسي</a:t>
             </a:r>
@@ -8014,6 +8197,9 @@
                 <a:solidFill>
                   <a:srgbClr val="3A4146"/>
                 </a:solidFill>
+                <a:latin typeface="Times New Roman" pitchFamily="34" charset="0"/>
+                <a:ea typeface="Times New Roman" pitchFamily="34" charset="-122"/>
+                <a:cs typeface="Times New Roman" pitchFamily="34" charset="-120"/>
               </a:rPr>
               <a:t>الأرضية هي أول مستوى يلامس جسم الإنسان وتحدد قاعدة الفراغ، لكنها لا يجب أن تكون مجرد سطح أفقي.</a:t>
             </a:r>
@@ -8217,6 +8403,9 @@
                 <a:solidFill>
                   <a:srgbClr val="5B6770"/>
                 </a:solidFill>
+                <a:latin typeface="Times New Roman" pitchFamily="34" charset="0"/>
+                <a:ea typeface="Times New Roman" pitchFamily="34" charset="-122"/>
+                <a:cs typeface="Times New Roman" pitchFamily="34" charset="-120"/>
               </a:rPr>
               <a:t>Continuous</a:t>
             </a:r>
@@ -8253,6 +8442,9 @@
                 <a:solidFill>
                   <a:srgbClr val="1F2224"/>
                 </a:solidFill>
+                <a:latin typeface="Times New Roman" pitchFamily="34" charset="0"/>
+                <a:ea typeface="Times New Roman" pitchFamily="34" charset="-122"/>
+                <a:cs typeface="Times New Roman" pitchFamily="34" charset="-120"/>
               </a:rPr>
               <a:t>أرضية مستمرة</a:t>
             </a:r>
@@ -8289,6 +8481,9 @@
                 <a:solidFill>
                   <a:srgbClr val="3A4146"/>
                 </a:solidFill>
+                <a:latin typeface="Times New Roman" pitchFamily="34" charset="0"/>
+                <a:ea typeface="Times New Roman" pitchFamily="34" charset="-122"/>
+                <a:cs typeface="Times New Roman" pitchFamily="34" charset="-120"/>
               </a:rPr>
               <a:t>إحساس بالاستمرارية والوحدة.</a:t>
             </a:r>
@@ -8630,6 +8825,9 @@
                 <a:solidFill>
                   <a:srgbClr val="5B6770"/>
                 </a:solidFill>
+                <a:latin typeface="Times New Roman" pitchFamily="34" charset="0"/>
+                <a:ea typeface="Times New Roman" pitchFamily="34" charset="-122"/>
+                <a:cs typeface="Times New Roman" pitchFamily="34" charset="-120"/>
               </a:rPr>
               <a:t>Elevated</a:t>
             </a:r>
@@ -8666,6 +8864,9 @@
                 <a:solidFill>
                   <a:srgbClr val="1F2224"/>
                 </a:solidFill>
+                <a:latin typeface="Times New Roman" pitchFamily="34" charset="0"/>
+                <a:ea typeface="Times New Roman" pitchFamily="34" charset="-122"/>
+                <a:cs typeface="Times New Roman" pitchFamily="34" charset="-120"/>
               </a:rPr>
               <a:t>أرضية مرتفعة</a:t>
             </a:r>
@@ -8702,6 +8903,9 @@
                 <a:solidFill>
                   <a:srgbClr val="3A4146"/>
                 </a:solidFill>
+                <a:latin typeface="Times New Roman" pitchFamily="34" charset="0"/>
+                <a:ea typeface="Times New Roman" pitchFamily="34" charset="-122"/>
+                <a:cs typeface="Times New Roman" pitchFamily="34" charset="-120"/>
               </a:rPr>
               <a:t>تحدد منطقة مختلفة وتمنحها أهمية.</a:t>
             </a:r>
@@ -9089,6 +9293,9 @@
                 <a:solidFill>
                   <a:srgbClr val="5B6770"/>
                 </a:solidFill>
+                <a:latin typeface="Times New Roman" pitchFamily="34" charset="0"/>
+                <a:ea typeface="Times New Roman" pitchFamily="34" charset="-122"/>
+                <a:cs typeface="Times New Roman" pitchFamily="34" charset="-120"/>
               </a:rPr>
               <a:t>Depressed</a:t>
             </a:r>
@@ -9125,6 +9332,9 @@
                 <a:solidFill>
                   <a:srgbClr val="1F2224"/>
                 </a:solidFill>
+                <a:latin typeface="Times New Roman" pitchFamily="34" charset="0"/>
+                <a:ea typeface="Times New Roman" pitchFamily="34" charset="-122"/>
+                <a:cs typeface="Times New Roman" pitchFamily="34" charset="-120"/>
               </a:rPr>
               <a:t>أرضية منخفضة</a:t>
             </a:r>
@@ -9161,6 +9371,9 @@
                 <a:solidFill>
                   <a:srgbClr val="3A4146"/>
                 </a:solidFill>
+                <a:latin typeface="Times New Roman" pitchFamily="34" charset="0"/>
+                <a:ea typeface="Times New Roman" pitchFamily="34" charset="-122"/>
+                <a:cs typeface="Times New Roman" pitchFamily="34" charset="-120"/>
               </a:rPr>
               <a:t>تصنع إحساسًا مختلفًا بالاحتواء.</a:t>
             </a:r>
@@ -9410,6 +9623,9 @@
                 <a:solidFill>
                   <a:srgbClr val="5B6770"/>
                 </a:solidFill>
+                <a:latin typeface="Times New Roman" pitchFamily="34" charset="0"/>
+                <a:ea typeface="Times New Roman" pitchFamily="34" charset="-122"/>
+                <a:cs typeface="Times New Roman" pitchFamily="34" charset="-120"/>
               </a:rPr>
               <a:t>Articulated</a:t>
             </a:r>
@@ -9446,6 +9662,9 @@
                 <a:solidFill>
                   <a:srgbClr val="1F2224"/>
                 </a:solidFill>
+                <a:latin typeface="Times New Roman" pitchFamily="34" charset="0"/>
+                <a:ea typeface="Times New Roman" pitchFamily="34" charset="-122"/>
+                <a:cs typeface="Times New Roman" pitchFamily="34" charset="-120"/>
               </a:rPr>
               <a:t>تغيير اللون أو الخامة</a:t>
             </a:r>
@@ -9482,6 +9701,9 @@
                 <a:solidFill>
                   <a:srgbClr val="3A4146"/>
                 </a:solidFill>
+                <a:latin typeface="Times New Roman" pitchFamily="34" charset="0"/>
+                <a:ea typeface="Times New Roman" pitchFamily="34" charset="-122"/>
+                <a:cs typeface="Times New Roman" pitchFamily="34" charset="-120"/>
               </a:rPr>
               <a:t>يجعل المنطقة أوضح كعنصر مستقل.</a:t>
             </a:r>
@@ -9538,6 +9760,9 @@
                 <a:solidFill>
                   <a:srgbClr val="D9A441"/>
                 </a:solidFill>
+                <a:latin typeface="Times New Roman" pitchFamily="34" charset="0"/>
+                <a:ea typeface="Times New Roman" pitchFamily="34" charset="-122"/>
+                <a:cs typeface="Times New Roman" pitchFamily="34" charset="-120"/>
               </a:rPr>
               <a:t>متى تتضح الأرضية؟</a:t>
             </a:r>
@@ -9574,6 +9799,9 @@
                 <a:solidFill>
                   <a:srgbClr val="FFFFFF"/>
                 </a:solidFill>
+                <a:latin typeface="Times New Roman" pitchFamily="34" charset="0"/>
+                <a:ea typeface="Times New Roman" pitchFamily="34" charset="-122"/>
+                <a:cs typeface="Times New Roman" pitchFamily="34" charset="-120"/>
               </a:rPr>
               <a:t>يتضح المستوى الأرضي عند: تغيّر محسوس في اللون أو الملمس · تحديد الحواف · معالجة السطح (سجاد، عشب، بلاط)</a:t>
             </a:r>
@@ -9682,6 +9910,9 @@
                 <a:solidFill>
                   <a:schemeClr val="accent1"/>
                 </a:solidFill>
+                <a:latin typeface="Times New Roman" pitchFamily="34" charset="0"/>
+                <a:ea typeface="Times New Roman" pitchFamily="34" charset="-122"/>
+                <a:cs typeface="Times New Roman" pitchFamily="34" charset="-120"/>
               </a:rPr>
               <a:t>09-A — ELEVATED BASE PLANE</a:t>
             </a:r>
@@ -9720,6 +9951,9 @@
                 <a:solidFill>
                   <a:schemeClr val="tx1"/>
                 </a:solidFill>
+                <a:latin typeface="Times New Roman" pitchFamily="34" charset="0"/>
+                <a:ea typeface="Times New Roman" pitchFamily="34" charset="-122"/>
+                <a:cs typeface="Times New Roman" pitchFamily="34" charset="-120"/>
               </a:rPr>
               <a:t>الأرضية المرتفعة</a:t>
             </a:r>
@@ -9760,6 +9994,9 @@
                 <a:solidFill>
                   <a:srgbClr val="1F2224"/>
                 </a:solidFill>
+                <a:latin typeface="Times New Roman" pitchFamily="34" charset="0"/>
+                <a:ea typeface="Times New Roman" pitchFamily="34" charset="-122"/>
+                <a:cs typeface="Times New Roman" pitchFamily="34" charset="-120"/>
               </a:rPr>
               <a:t>رفع جزء من الأرضية يصنع مجالًا (Domain) خاصًا داخل الفراغ الأكبر.</a:t>
             </a:r>
@@ -9778,6 +10015,9 @@
                 <a:solidFill>
                   <a:srgbClr val="1F2224"/>
                 </a:solidFill>
+                <a:latin typeface="Times New Roman" pitchFamily="34" charset="0"/>
+                <a:ea typeface="Times New Roman" pitchFamily="34" charset="-122"/>
+                <a:cs typeface="Times New Roman" pitchFamily="34" charset="-120"/>
               </a:rPr>
               <a:t>إذا استمرت خصائص السطح فوق الجزء المرتفع، يبدو جزءًا من المستوى المحيط.</a:t>
             </a:r>
@@ -9796,6 +10036,9 @@
                 <a:solidFill>
                   <a:srgbClr val="1F2224"/>
                 </a:solidFill>
+                <a:latin typeface="Times New Roman" pitchFamily="34" charset="0"/>
+                <a:ea typeface="Times New Roman" pitchFamily="34" charset="-122"/>
+                <a:cs typeface="Times New Roman" pitchFamily="34" charset="-120"/>
               </a:rPr>
               <a:t>إذا عولجت حافته بتغيير الشكل أو اللون أو الملمس، يصبح «هضبة» مستقلة عن محيطها.</a:t>
             </a:r>
@@ -10109,6 +10352,9 @@
                 <a:solidFill>
                   <a:srgbClr val="5B6770"/>
                 </a:solidFill>
+                <a:latin typeface="Times New Roman" pitchFamily="34" charset="0"/>
+                <a:ea typeface="Times New Roman" pitchFamily="34" charset="-122"/>
+                <a:cs typeface="Times New Roman" pitchFamily="34" charset="-120"/>
               </a:rPr>
               <a:t>0.4 m</a:t>
             </a:r>
@@ -10145,6 +10391,9 @@
                 <a:solidFill>
                   <a:srgbClr val="5B6770"/>
                 </a:solidFill>
+                <a:latin typeface="Times New Roman" pitchFamily="34" charset="0"/>
+                <a:ea typeface="Times New Roman" pitchFamily="34" charset="-122"/>
+                <a:cs typeface="Times New Roman" pitchFamily="34" charset="-120"/>
               </a:rPr>
               <a:t>Edge defined · continuity kept</a:t>
             </a:r>
@@ -10181,6 +10430,9 @@
                 <a:solidFill>
                   <a:srgbClr val="1F2224"/>
                 </a:solidFill>
+                <a:latin typeface="Times New Roman" pitchFamily="34" charset="0"/>
+                <a:ea typeface="Times New Roman" pitchFamily="34" charset="-122"/>
+                <a:cs typeface="Times New Roman" pitchFamily="34" charset="-120"/>
               </a:rPr>
               <a:t>الحافة واضحة؛ تبقى الاستمرارية الفراغية والبصرية، والوصول سهل.</a:t>
             </a:r>
@@ -10594,6 +10846,9 @@
                 <a:solidFill>
                   <a:srgbClr val="5B6770"/>
                 </a:solidFill>
+                <a:latin typeface="Times New Roman" pitchFamily="34" charset="0"/>
+                <a:ea typeface="Times New Roman" pitchFamily="34" charset="-122"/>
+                <a:cs typeface="Times New Roman" pitchFamily="34" charset="-120"/>
               </a:rPr>
               <a:t>1.1 m</a:t>
             </a:r>
@@ -10630,6 +10885,9 @@
                 <a:solidFill>
                   <a:srgbClr val="5B6770"/>
                 </a:solidFill>
+                <a:latin typeface="Times New Roman" pitchFamily="34" charset="0"/>
+                <a:ea typeface="Times New Roman" pitchFamily="34" charset="-122"/>
+                <a:cs typeface="Times New Roman" pitchFamily="34" charset="-120"/>
               </a:rPr>
               <a:t>Spatial broken · visual kept</a:t>
             </a:r>
@@ -10666,6 +10924,9 @@
                 <a:solidFill>
                   <a:srgbClr val="1F2224"/>
                 </a:solidFill>
+                <a:latin typeface="Times New Roman" pitchFamily="34" charset="0"/>
+                <a:ea typeface="Times New Roman" pitchFamily="34" charset="-122"/>
+                <a:cs typeface="Times New Roman" pitchFamily="34" charset="-120"/>
               </a:rPr>
               <a:t>تنقطع الاستمرارية الفراغية وتبقى البصرية؛ يحتاج الوصول إلى درج.</a:t>
             </a:r>
@@ -10979,6 +11240,9 @@
                 <a:solidFill>
                   <a:srgbClr val="5B6770"/>
                 </a:solidFill>
+                <a:latin typeface="Times New Roman" pitchFamily="34" charset="0"/>
+                <a:ea typeface="Times New Roman" pitchFamily="34" charset="-122"/>
+                <a:cs typeface="Times New Roman" pitchFamily="34" charset="-120"/>
               </a:rPr>
               <a:t>2.2 m</a:t>
             </a:r>
@@ -11015,6 +11279,9 @@
                 <a:solidFill>
                   <a:srgbClr val="5B6770"/>
                 </a:solidFill>
+                <a:latin typeface="Times New Roman" pitchFamily="34" charset="0"/>
+                <a:ea typeface="Times New Roman" pitchFamily="34" charset="-122"/>
+                <a:cs typeface="Times New Roman" pitchFamily="34" charset="-120"/>
               </a:rPr>
               <a:t>Spatial &amp; visual broken</a:t>
             </a:r>
@@ -11051,6 +11318,9 @@
                 <a:solidFill>
                   <a:srgbClr val="1F2224"/>
                 </a:solidFill>
+                <a:latin typeface="Times New Roman" pitchFamily="34" charset="0"/>
+                <a:ea typeface="Times New Roman" pitchFamily="34" charset="-122"/>
+                <a:cs typeface="Times New Roman" pitchFamily="34" charset="-120"/>
               </a:rPr>
               <a:t>تنقطع الاستمرارية البصرية والفراغية؛ ينعزل المستوى المرتفع عن الأرض.</a:t>
             </a:r>
@@ -11159,6 +11429,9 @@
                 <a:solidFill>
                   <a:schemeClr val="accent1"/>
                 </a:solidFill>
+                <a:latin typeface="Times New Roman" pitchFamily="34" charset="0"/>
+                <a:ea typeface="Times New Roman" pitchFamily="34" charset="-122"/>
+                <a:cs typeface="Times New Roman" pitchFamily="34" charset="-120"/>
               </a:rPr>
               <a:t>09-B — ELEVATED PLANE: EXAMPLES</a:t>
             </a:r>
@@ -11197,6 +11470,9 @@
                 <a:solidFill>
                   <a:schemeClr val="tx1"/>
                 </a:solidFill>
+                <a:latin typeface="Times New Roman" pitchFamily="34" charset="0"/>
+                <a:ea typeface="Times New Roman" pitchFamily="34" charset="-122"/>
+                <a:cs typeface="Times New Roman" pitchFamily="34" charset="-120"/>
               </a:rPr>
               <a:t>الأرضية المرتفعة: أمثلة</a:t>
             </a:r>
@@ -11233,6 +11509,9 @@
                 <a:solidFill>
                   <a:srgbClr val="3A4146"/>
                 </a:solidFill>
+                <a:latin typeface="Times New Roman" pitchFamily="34" charset="0"/>
+                <a:ea typeface="Times New Roman" pitchFamily="34" charset="-122"/>
+                <a:cs typeface="Times New Roman" pitchFamily="34" charset="-120"/>
               </a:rPr>
               <a:t>قد ينتج الارتفاع عن طبيعة الموقع أو يُنشأ عمدًا لرفع المبنى عن محيطه وتعزيز صورته، ويُستخدم لتمييز المباني المقدسة أو المهمة.</a:t>
             </a:r>
@@ -11293,6 +11572,9 @@
                 <a:solidFill>
                   <a:srgbClr val="1F2224"/>
                 </a:solidFill>
+                <a:latin typeface="Times New Roman" pitchFamily="34" charset="0"/>
+                <a:ea typeface="Times New Roman" pitchFamily="34" charset="-122"/>
+                <a:cs typeface="Times New Roman" pitchFamily="34" charset="-120"/>
               </a:rPr>
               <a:t>Acropolis, Athens</a:t>
             </a:r>
@@ -11329,6 +11611,9 @@
                 <a:solidFill>
                   <a:srgbClr val="3A4146"/>
                 </a:solidFill>
+                <a:latin typeface="Times New Roman" pitchFamily="34" charset="0"/>
+                <a:ea typeface="Times New Roman" pitchFamily="34" charset="-122"/>
+                <a:cs typeface="Times New Roman" pitchFamily="34" charset="-120"/>
               </a:rPr>
               <a:t>مرتفع طبيعي يميّز المعبد ويمنحه المكانة.</a:t>
             </a:r>
@@ -11389,6 +11674,9 @@
                 <a:solidFill>
                   <a:srgbClr val="1F2224"/>
                 </a:solidFill>
+                <a:latin typeface="Times New Roman" pitchFamily="34" charset="0"/>
+                <a:ea typeface="Times New Roman" pitchFamily="34" charset="-122"/>
+                <a:cs typeface="Times New Roman" pitchFamily="34" charset="-120"/>
               </a:rPr>
               <a:t>Villa Savoye, Paris — Le Corbusier</a:t>
             </a:r>
@@ -11425,6 +11713,9 @@
                 <a:solidFill>
                   <a:srgbClr val="3A4146"/>
                 </a:solidFill>
+                <a:latin typeface="Times New Roman" pitchFamily="34" charset="0"/>
+                <a:ea typeface="Times New Roman" pitchFamily="34" charset="-122"/>
+                <a:cs typeface="Times New Roman" pitchFamily="34" charset="-120"/>
               </a:rPr>
               <a:t>رفع المبنى على أعمدة عن الأرض.</a:t>
             </a:r>
@@ -11485,6 +11776,9 @@
                 <a:solidFill>
                   <a:srgbClr val="1F2224"/>
                 </a:solidFill>
+                <a:latin typeface="Times New Roman" pitchFamily="34" charset="0"/>
+                <a:ea typeface="Times New Roman" pitchFamily="34" charset="-122"/>
+                <a:cs typeface="Times New Roman" pitchFamily="34" charset="-120"/>
               </a:rPr>
               <a:t>CEPT University canteen, Ahmedabad</a:t>
             </a:r>
@@ -11521,6 +11815,9 @@
                 <a:solidFill>
                   <a:srgbClr val="3A4146"/>
                 </a:solidFill>
+                <a:latin typeface="Times New Roman" pitchFamily="34" charset="0"/>
+                <a:ea typeface="Times New Roman" pitchFamily="34" charset="-122"/>
+                <a:cs typeface="Times New Roman" pitchFamily="34" charset="-120"/>
               </a:rPr>
               <a:t>منصة منخفضة تحدد منطقة جلوس خارجية.</a:t>
             </a:r>
@@ -11581,6 +11878,9 @@
                 <a:solidFill>
                   <a:srgbClr val="1F2224"/>
                 </a:solidFill>
+                <a:latin typeface="Times New Roman" pitchFamily="34" charset="0"/>
+                <a:ea typeface="Times New Roman" pitchFamily="34" charset="-122"/>
+                <a:cs typeface="Times New Roman" pitchFamily="34" charset="-120"/>
               </a:rPr>
               <a:t>Elevated zone in an interior</a:t>
             </a:r>
@@ -11617,6 +11917,9 @@
                 <a:solidFill>
                   <a:srgbClr val="3A4146"/>
                 </a:solidFill>
+                <a:latin typeface="Times New Roman" pitchFamily="34" charset="0"/>
+                <a:ea typeface="Times New Roman" pitchFamily="34" charset="-122"/>
+                <a:cs typeface="Times New Roman" pitchFamily="34" charset="-120"/>
               </a:rPr>
               <a:t>أرضية مرتفعة تحدد منطقة عمل داخل الفراغ.</a:t>
             </a:r>
@@ -11653,6 +11956,9 @@
                 <a:solidFill>
                   <a:srgbClr val="8A9A9B"/>
                 </a:solidFill>
+                <a:latin typeface="Times New Roman" pitchFamily="34" charset="0"/>
+                <a:ea typeface="Times New Roman" pitchFamily="34" charset="-122"/>
+                <a:cs typeface="Times New Roman" pitchFamily="34" charset="-120"/>
               </a:rPr>
               <a:t>Images: Theory of Architecture — course reference</a:t>
             </a:r>
@@ -11761,6 +12067,9 @@
                 <a:solidFill>
                   <a:schemeClr val="accent1"/>
                 </a:solidFill>
+                <a:latin typeface="Times New Roman" pitchFamily="34" charset="0"/>
+                <a:ea typeface="Times New Roman" pitchFamily="34" charset="-122"/>
+                <a:cs typeface="Times New Roman" pitchFamily="34" charset="-120"/>
               </a:rPr>
               <a:t>09-C — DEPRESSED BASE PLANE</a:t>
             </a:r>
@@ -11799,6 +12108,9 @@
                 <a:solidFill>
                   <a:schemeClr val="tx1"/>
                 </a:solidFill>
+                <a:latin typeface="Times New Roman" pitchFamily="34" charset="0"/>
+                <a:ea typeface="Times New Roman" pitchFamily="34" charset="-122"/>
+                <a:cs typeface="Times New Roman" pitchFamily="34" charset="-120"/>
               </a:rPr>
               <a:t>الأرضية المنخفضة</a:t>
             </a:r>
@@ -11835,6 +12147,9 @@
                 <a:solidFill>
                   <a:srgbClr val="3A4146"/>
                 </a:solidFill>
+                <a:latin typeface="Times New Roman" pitchFamily="34" charset="0"/>
+                <a:ea typeface="Times New Roman" pitchFamily="34" charset="-122"/>
+                <a:cs typeface="Times New Roman" pitchFamily="34" charset="-120"/>
               </a:rPr>
               <a:t>الأسطح الرأسية للانخفاض هي التي تحدد حدوده، ويمكن تعزيزه بتباين الشكل أو الهندسة أو الاتجاه عن المحيط.</a:t>
             </a:r>
@@ -12125,6 +12440,9 @@
                 <a:solidFill>
                   <a:srgbClr val="5B6770"/>
                 </a:solidFill>
+                <a:latin typeface="Times New Roman" pitchFamily="34" charset="0"/>
+                <a:ea typeface="Times New Roman" pitchFamily="34" charset="-122"/>
+                <a:cs typeface="Times New Roman" pitchFamily="34" charset="-120"/>
               </a:rPr>
               <a:t>Remains an integral part</a:t>
             </a:r>
@@ -12161,6 +12479,9 @@
                 <a:solidFill>
                   <a:srgbClr val="1F2224"/>
                 </a:solidFill>
+                <a:latin typeface="Times New Roman" pitchFamily="34" charset="0"/>
+                <a:ea typeface="Times New Roman" pitchFamily="34" charset="-122"/>
+                <a:cs typeface="Times New Roman" pitchFamily="34" charset="-120"/>
               </a:rPr>
               <a:t>يبقى جزءًا من الفراغ المحيط</a:t>
             </a:r>
@@ -12451,6 +12772,9 @@
                 <a:solidFill>
                   <a:srgbClr val="5B6770"/>
                 </a:solidFill>
+                <a:latin typeface="Times New Roman" pitchFamily="34" charset="0"/>
+                <a:ea typeface="Times New Roman" pitchFamily="34" charset="-122"/>
+                <a:cs typeface="Times New Roman" pitchFamily="34" charset="-120"/>
               </a:rPr>
               <a:t>The space is distinct</a:t>
             </a:r>
@@ -12487,6 +12811,9 @@
                 <a:solidFill>
                   <a:srgbClr val="1F2224"/>
                 </a:solidFill>
+                <a:latin typeface="Times New Roman" pitchFamily="34" charset="0"/>
+                <a:ea typeface="Times New Roman" pitchFamily="34" charset="-122"/>
+                <a:cs typeface="Times New Roman" pitchFamily="34" charset="-120"/>
               </a:rPr>
               <a:t>يصبح فراغًا مميزًا</a:t>
             </a:r>
@@ -12800,6 +13127,9 @@
                 <a:solidFill>
                   <a:srgbClr val="5B6770"/>
                 </a:solidFill>
+                <a:latin typeface="Times New Roman" pitchFamily="34" charset="0"/>
+                <a:ea typeface="Times New Roman" pitchFamily="34" charset="-122"/>
+                <a:cs typeface="Times New Roman" pitchFamily="34" charset="-120"/>
               </a:rPr>
               <a:t>Separates</a:t>
             </a:r>
@@ -12836,6 +13166,9 @@
                 <a:solidFill>
                   <a:srgbClr val="1F2224"/>
                 </a:solidFill>
+                <a:latin typeface="Times New Roman" pitchFamily="34" charset="0"/>
+                <a:ea typeface="Times New Roman" pitchFamily="34" charset="-122"/>
+                <a:cs typeface="Times New Roman" pitchFamily="34" charset="-120"/>
               </a:rPr>
               <a:t>ينفصل عن الفراغ المحيط</a:t>
             </a:r>
@@ -12896,6 +13229,9 @@
                 <a:solidFill>
                   <a:srgbClr val="1F2224"/>
                 </a:solidFill>
+                <a:latin typeface="Times New Roman" pitchFamily="34" charset="0"/>
+                <a:ea typeface="Times New Roman" pitchFamily="34" charset="-122"/>
+                <a:cs typeface="Times New Roman" pitchFamily="34" charset="-120"/>
               </a:rPr>
               <a:t>Outdoor amphitheatre</a:t>
             </a:r>
@@ -12932,6 +13268,9 @@
                 <a:solidFill>
                   <a:srgbClr val="3A4146"/>
                 </a:solidFill>
+                <a:latin typeface="Times New Roman" pitchFamily="34" charset="0"/>
+                <a:ea typeface="Times New Roman" pitchFamily="34" charset="-122"/>
+                <a:cs typeface="Times New Roman" pitchFamily="34" charset="-120"/>
               </a:rPr>
               <a:t>انخفاض في طبوغرافيا الموقع يصبح مسرحًا مفتوحًا.</a:t>
             </a:r>
@@ -12992,6 +13331,9 @@
                 <a:solidFill>
                   <a:srgbClr val="1F2224"/>
                 </a:solidFill>
+                <a:latin typeface="Times New Roman" pitchFamily="34" charset="0"/>
+                <a:ea typeface="Times New Roman" pitchFamily="34" charset="-122"/>
+                <a:cs typeface="Times New Roman" pitchFamily="34" charset="-120"/>
               </a:rPr>
               <a:t>Classical theatre</a:t>
             </a:r>
@@ -13028,6 +13370,9 @@
                 <a:solidFill>
                   <a:srgbClr val="3A4146"/>
                 </a:solidFill>
+                <a:latin typeface="Times New Roman" pitchFamily="34" charset="0"/>
+                <a:ea typeface="Times New Roman" pitchFamily="34" charset="-122"/>
+                <a:cs typeface="Times New Roman" pitchFamily="34" charset="-120"/>
               </a:rPr>
               <a:t>يحسّن خطوط الرؤية والإحساس بالاحتواء والجودة الصوتية.</a:t>
             </a:r>
@@ -13088,6 +13433,9 @@
                 <a:solidFill>
                   <a:srgbClr val="1F2224"/>
                 </a:solidFill>
+                <a:latin typeface="Times New Roman" pitchFamily="34" charset="0"/>
+                <a:ea typeface="Times New Roman" pitchFamily="34" charset="-122"/>
+                <a:cs typeface="Times New Roman" pitchFamily="34" charset="-120"/>
               </a:rPr>
               <a:t>Steps up — extrovert</a:t>
             </a:r>
@@ -13124,6 +13472,9 @@
                 <a:solidFill>
                   <a:srgbClr val="3A4146"/>
                 </a:solidFill>
+                <a:latin typeface="Times New Roman" pitchFamily="34" charset="0"/>
+                <a:ea typeface="Times New Roman" pitchFamily="34" charset="-122"/>
+                <a:cs typeface="Times New Roman" pitchFamily="34" charset="-120"/>
               </a:rPr>
               <a:t>الصعود انفتاحي (Extrovert)؛ أما النزول فانطوائي (Introvert).</a:t>
             </a:r>
@@ -13160,6 +13511,9 @@
                 <a:solidFill>
                   <a:srgbClr val="8A9A9B"/>
                 </a:solidFill>
+                <a:latin typeface="Times New Roman" pitchFamily="34" charset="0"/>
+                <a:ea typeface="Times New Roman" pitchFamily="34" charset="-122"/>
+                <a:cs typeface="Times New Roman" pitchFamily="34" charset="-120"/>
               </a:rPr>
               <a:t>Images: Theory of Architecture — course reference</a:t>
             </a:r>
@@ -13268,6 +13622,9 @@
                 <a:solidFill>
                   <a:schemeClr val="accent1"/>
                 </a:solidFill>
+                <a:latin typeface="Times New Roman" pitchFamily="34" charset="0"/>
+                <a:ea typeface="Times New Roman" pitchFamily="34" charset="-122"/>
+                <a:cs typeface="Times New Roman" pitchFamily="34" charset="-120"/>
               </a:rPr>
               <a:t>10 — WALL PLANE</a:t>
             </a:r>
@@ -13306,6 +13663,9 @@
                 <a:solidFill>
                   <a:schemeClr val="tx1"/>
                 </a:solidFill>
+                <a:latin typeface="Times New Roman" pitchFamily="34" charset="0"/>
+                <a:ea typeface="Times New Roman" pitchFamily="34" charset="-122"/>
+                <a:cs typeface="Times New Roman" pitchFamily="34" charset="-120"/>
               </a:rPr>
               <a:t>الجدار — المستوى الرأسي</a:t>
             </a:r>
@@ -13476,6 +13836,9 @@
                 <a:solidFill>
                   <a:srgbClr val="C2593A"/>
                 </a:solidFill>
+                <a:latin typeface="Times New Roman" pitchFamily="34" charset="0"/>
+                <a:ea typeface="Times New Roman" pitchFamily="34" charset="-122"/>
+                <a:cs typeface="Times New Roman" pitchFamily="34" charset="-120"/>
               </a:rPr>
               <a:t>Eye level</a:t>
             </a:r>
@@ -13490,6 +13853,9 @@
                 <a:solidFill>
                   <a:srgbClr val="C2593A"/>
                 </a:solidFill>
+                <a:latin typeface="Times New Roman" pitchFamily="34" charset="0"/>
+                <a:ea typeface="Times New Roman" pitchFamily="34" charset="-122"/>
+                <a:cs typeface="Times New Roman" pitchFamily="34" charset="-120"/>
               </a:rPr>
               <a:t>≈ 1.55 m</a:t>
             </a:r>
@@ -13551,6 +13917,9 @@
                 <a:solidFill>
                   <a:srgbClr val="1F2224"/>
                 </a:solidFill>
+                <a:latin typeface="Times New Roman" pitchFamily="34" charset="0"/>
+                <a:ea typeface="Times New Roman" pitchFamily="34" charset="-122"/>
+                <a:cs typeface="Times New Roman" pitchFamily="34" charset="-120"/>
               </a:rPr>
               <a:t>0.6 m</a:t>
             </a:r>
@@ -13587,6 +13956,9 @@
                 <a:solidFill>
                   <a:srgbClr val="C2593A"/>
                 </a:solidFill>
+                <a:latin typeface="Times New Roman" pitchFamily="34" charset="0"/>
+                <a:ea typeface="Times New Roman" pitchFamily="34" charset="-122"/>
+                <a:cs typeface="Times New Roman" pitchFamily="34" charset="-120"/>
               </a:rPr>
               <a:t>1</a:t>
             </a:r>
@@ -13648,6 +14020,9 @@
                 <a:solidFill>
                   <a:srgbClr val="1F2224"/>
                 </a:solidFill>
+                <a:latin typeface="Times New Roman" pitchFamily="34" charset="0"/>
+                <a:ea typeface="Times New Roman" pitchFamily="34" charset="-122"/>
+                <a:cs typeface="Times New Roman" pitchFamily="34" charset="-120"/>
               </a:rPr>
               <a:t>1.0 m</a:t>
             </a:r>
@@ -13684,6 +14059,9 @@
                 <a:solidFill>
                   <a:srgbClr val="C2593A"/>
                 </a:solidFill>
+                <a:latin typeface="Times New Roman" pitchFamily="34" charset="0"/>
+                <a:ea typeface="Times New Roman" pitchFamily="34" charset="-122"/>
+                <a:cs typeface="Times New Roman" pitchFamily="34" charset="-120"/>
               </a:rPr>
               <a:t>2</a:t>
             </a:r>
@@ -13745,6 +14123,9 @@
                 <a:solidFill>
                   <a:srgbClr val="1F2224"/>
                 </a:solidFill>
+                <a:latin typeface="Times New Roman" pitchFamily="34" charset="0"/>
+                <a:ea typeface="Times New Roman" pitchFamily="34" charset="-122"/>
+                <a:cs typeface="Times New Roman" pitchFamily="34" charset="-120"/>
               </a:rPr>
               <a:t>1.6 m</a:t>
             </a:r>
@@ -13781,6 +14162,9 @@
                 <a:solidFill>
                   <a:srgbClr val="C2593A"/>
                 </a:solidFill>
+                <a:latin typeface="Times New Roman" pitchFamily="34" charset="0"/>
+                <a:ea typeface="Times New Roman" pitchFamily="34" charset="-122"/>
+                <a:cs typeface="Times New Roman" pitchFamily="34" charset="-120"/>
               </a:rPr>
               <a:t>3</a:t>
             </a:r>
@@ -13842,6 +14226,9 @@
                 <a:solidFill>
                   <a:srgbClr val="1F2224"/>
                 </a:solidFill>
+                <a:latin typeface="Times New Roman" pitchFamily="34" charset="0"/>
+                <a:ea typeface="Times New Roman" pitchFamily="34" charset="-122"/>
+                <a:cs typeface="Times New Roman" pitchFamily="34" charset="-120"/>
               </a:rPr>
               <a:t>2.1 m+</a:t>
             </a:r>
@@ -13878,6 +14265,9 @@
                 <a:solidFill>
                   <a:srgbClr val="C2593A"/>
                 </a:solidFill>
+                <a:latin typeface="Times New Roman" pitchFamily="34" charset="0"/>
+                <a:ea typeface="Times New Roman" pitchFamily="34" charset="-122"/>
+                <a:cs typeface="Times New Roman" pitchFamily="34" charset="-120"/>
               </a:rPr>
               <a:t>4</a:t>
             </a:r>
@@ -13914,6 +14304,9 @@
                 <a:solidFill>
                   <a:srgbClr val="C2593A"/>
                 </a:solidFill>
+                <a:latin typeface="Times New Roman" pitchFamily="34" charset="0"/>
+                <a:ea typeface="Times New Roman" pitchFamily="34" charset="-122"/>
+                <a:cs typeface="Times New Roman" pitchFamily="34" charset="-120"/>
               </a:rPr>
               <a:t>أثر ارتفاع الجدار بالنسبة لمستوى العين:</a:t>
             </a:r>
@@ -13970,6 +14363,9 @@
                 <a:solidFill>
                   <a:srgbClr val="FFFFFF"/>
                 </a:solidFill>
+                <a:latin typeface="Times New Roman" pitchFamily="34" charset="0"/>
+                <a:ea typeface="Times New Roman" pitchFamily="34" charset="-122"/>
+                <a:cs typeface="Times New Roman" pitchFamily="34" charset="-120"/>
               </a:rPr>
               <a:t>1</a:t>
             </a:r>
@@ -14006,6 +14402,9 @@
                 <a:solidFill>
                   <a:srgbClr val="1F2224"/>
                 </a:solidFill>
+                <a:latin typeface="Times New Roman" pitchFamily="34" charset="0"/>
+                <a:ea typeface="Times New Roman" pitchFamily="34" charset="-122"/>
+                <a:cs typeface="Times New Roman" pitchFamily="34" charset="-120"/>
               </a:rPr>
               <a:t>عند مستوى الركبة: يحدد حافة المجال دون إحساس بالاحتواء.</a:t>
             </a:r>
@@ -14062,6 +14461,9 @@
                 <a:solidFill>
                   <a:srgbClr val="FFFFFF"/>
                 </a:solidFill>
+                <a:latin typeface="Times New Roman" pitchFamily="34" charset="0"/>
+                <a:ea typeface="Times New Roman" pitchFamily="34" charset="-122"/>
+                <a:cs typeface="Times New Roman" pitchFamily="34" charset="-120"/>
               </a:rPr>
               <a:t>2</a:t>
             </a:r>
@@ -14098,6 +14500,9 @@
                 <a:solidFill>
                   <a:srgbClr val="1F2224"/>
                 </a:solidFill>
+                <a:latin typeface="Times New Roman" pitchFamily="34" charset="0"/>
+                <a:ea typeface="Times New Roman" pitchFamily="34" charset="-122"/>
+                <a:cs typeface="Times New Roman" pitchFamily="34" charset="-120"/>
               </a:rPr>
               <a:t>عند مستوى الخصر: يبدأ الاحتواء مع بقاء الاستمرارية البصرية.</a:t>
             </a:r>
@@ -14154,6 +14559,9 @@
                 <a:solidFill>
                   <a:srgbClr val="FFFFFF"/>
                 </a:solidFill>
+                <a:latin typeface="Times New Roman" pitchFamily="34" charset="0"/>
+                <a:ea typeface="Times New Roman" pitchFamily="34" charset="-122"/>
+                <a:cs typeface="Times New Roman" pitchFamily="34" charset="-120"/>
               </a:rPr>
               <a:t>3</a:t>
             </a:r>
@@ -14190,6 +14598,9 @@
                 <a:solidFill>
                   <a:srgbClr val="1F2224"/>
                 </a:solidFill>
+                <a:latin typeface="Times New Roman" pitchFamily="34" charset="0"/>
+                <a:ea typeface="Times New Roman" pitchFamily="34" charset="-122"/>
+                <a:cs typeface="Times New Roman" pitchFamily="34" charset="-120"/>
               </a:rPr>
               <a:t>قرب مستوى العين: يبدأ في فصل فراغ عن آخر.</a:t>
             </a:r>
@@ -14246,6 +14657,9 @@
                 <a:solidFill>
                   <a:srgbClr val="FFFFFF"/>
                 </a:solidFill>
+                <a:latin typeface="Times New Roman" pitchFamily="34" charset="0"/>
+                <a:ea typeface="Times New Roman" pitchFamily="34" charset="-122"/>
+                <a:cs typeface="Times New Roman" pitchFamily="34" charset="-120"/>
               </a:rPr>
               <a:t>4</a:t>
             </a:r>
@@ -14282,6 +14696,9 @@
                 <a:solidFill>
                   <a:srgbClr val="1F2224"/>
                 </a:solidFill>
+                <a:latin typeface="Times New Roman" pitchFamily="34" charset="0"/>
+                <a:ea typeface="Times New Roman" pitchFamily="34" charset="-122"/>
+                <a:cs typeface="Times New Roman" pitchFamily="34" charset="-120"/>
               </a:rPr>
               <a:t>أعلى من قامة الإنسان: يقطع الاستمرارية البصرية ويحتوي الفراغ بقوة.</a:t>
             </a:r>
@@ -14347,6 +14764,9 @@
                 <a:solidFill>
                   <a:srgbClr val="2F6B6A"/>
                 </a:solidFill>
+                <a:latin typeface="Times New Roman" pitchFamily="34" charset="0"/>
+                <a:ea typeface="Times New Roman" pitchFamily="34" charset="-122"/>
+                <a:cs typeface="Times New Roman" pitchFamily="34" charset="-120"/>
               </a:rPr>
               <a:t>يمكن للجدار أن:</a:t>
             </a:r>
@@ -14384,6 +14804,9 @@
                 <a:solidFill>
                   <a:srgbClr val="1F2224"/>
                 </a:solidFill>
+                <a:latin typeface="Times New Roman" pitchFamily="34" charset="0"/>
+                <a:ea typeface="Times New Roman" pitchFamily="34" charset="-122"/>
+                <a:cs typeface="Times New Roman" pitchFamily="34" charset="-120"/>
               </a:rPr>
               <a:t>يحدد حدود الفراغ</a:t>
             </a:r>
@@ -14421,6 +14844,9 @@
                 <a:solidFill>
                   <a:srgbClr val="1F2224"/>
                 </a:solidFill>
+                <a:latin typeface="Times New Roman" pitchFamily="34" charset="0"/>
+                <a:ea typeface="Times New Roman" pitchFamily="34" charset="-122"/>
+                <a:cs typeface="Times New Roman" pitchFamily="34" charset="-120"/>
               </a:rPr>
               <a:t>يفصل بين نشاطين</a:t>
             </a:r>
@@ -14458,6 +14884,9 @@
                 <a:solidFill>
                   <a:srgbClr val="1F2224"/>
                 </a:solidFill>
+                <a:latin typeface="Times New Roman" pitchFamily="34" charset="0"/>
+                <a:ea typeface="Times New Roman" pitchFamily="34" charset="-122"/>
+                <a:cs typeface="Times New Roman" pitchFamily="34" charset="-120"/>
               </a:rPr>
               <a:t>يوجّه الحركة</a:t>
             </a:r>
@@ -14495,6 +14924,9 @@
                 <a:solidFill>
                   <a:srgbClr val="1F2224"/>
                 </a:solidFill>
+                <a:latin typeface="Times New Roman" pitchFamily="34" charset="0"/>
+                <a:ea typeface="Times New Roman" pitchFamily="34" charset="-122"/>
+                <a:cs typeface="Times New Roman" pitchFamily="34" charset="-120"/>
               </a:rPr>
               <a:t>يصنع الخصوصية</a:t>
             </a:r>
@@ -14532,6 +14964,9 @@
                 <a:solidFill>
                   <a:srgbClr val="1F2224"/>
                 </a:solidFill>
+                <a:latin typeface="Times New Roman" pitchFamily="34" charset="0"/>
+                <a:ea typeface="Times New Roman" pitchFamily="34" charset="-122"/>
+                <a:cs typeface="Times New Roman" pitchFamily="34" charset="-120"/>
               </a:rPr>
               <a:t>يخلق علاقة بصرية</a:t>
             </a:r>
@@ -14569,6 +15004,9 @@
                 <a:solidFill>
                   <a:srgbClr val="1F2224"/>
                 </a:solidFill>
+                <a:latin typeface="Times New Roman" pitchFamily="34" charset="0"/>
+                <a:ea typeface="Times New Roman" pitchFamily="34" charset="-122"/>
+                <a:cs typeface="Times New Roman" pitchFamily="34" charset="-120"/>
               </a:rPr>
               <a:t>يحدد اتجاه الحركة</a:t>
             </a:r>
@@ -14677,6 +15115,9 @@
                 <a:solidFill>
                   <a:schemeClr val="accent1"/>
                 </a:solidFill>
+                <a:latin typeface="Times New Roman" pitchFamily="34" charset="0"/>
+                <a:ea typeface="Times New Roman" pitchFamily="34" charset="-122"/>
+                <a:cs typeface="Times New Roman" pitchFamily="34" charset="-120"/>
               </a:rPr>
               <a:t>10-A — VERTICAL ELEMENTS DEFINING SPACE</a:t>
             </a:r>
@@ -14715,6 +15156,9 @@
                 <a:solidFill>
                   <a:schemeClr val="tx1"/>
                 </a:solidFill>
+                <a:latin typeface="Times New Roman" pitchFamily="34" charset="0"/>
+                <a:ea typeface="Times New Roman" pitchFamily="34" charset="-122"/>
+                <a:cs typeface="Times New Roman" pitchFamily="34" charset="-120"/>
               </a:rPr>
               <a:t>تشكيلات المستويات الرأسية</a:t>
             </a:r>
@@ -14887,6 +15331,9 @@
                 <a:solidFill>
                   <a:srgbClr val="5B6770"/>
                 </a:solidFill>
+                <a:latin typeface="Times New Roman" pitchFamily="34" charset="0"/>
+                <a:ea typeface="Times New Roman" pitchFamily="34" charset="-122"/>
+                <a:cs typeface="Times New Roman" pitchFamily="34" charset="-120"/>
               </a:rPr>
               <a:t>Vertical linear elements</a:t>
             </a:r>
@@ -14923,6 +15370,9 @@
                 <a:solidFill>
                   <a:srgbClr val="1F2224"/>
                 </a:solidFill>
+                <a:latin typeface="Times New Roman" pitchFamily="34" charset="0"/>
+                <a:ea typeface="Times New Roman" pitchFamily="34" charset="-122"/>
+                <a:cs typeface="Times New Roman" pitchFamily="34" charset="-120"/>
               </a:rPr>
               <a:t>عناصر خطية رأسية</a:t>
             </a:r>
@@ -14959,6 +15409,9 @@
                 <a:solidFill>
                   <a:srgbClr val="3A4146"/>
                 </a:solidFill>
+                <a:latin typeface="Times New Roman" pitchFamily="34" charset="0"/>
+                <a:ea typeface="Times New Roman" pitchFamily="34" charset="-122"/>
+                <a:cs typeface="Times New Roman" pitchFamily="34" charset="-120"/>
               </a:rPr>
               <a:t>تحدد حواف حجم الفراغ.</a:t>
             </a:r>
@@ -15071,6 +15524,9 @@
                 <a:solidFill>
                   <a:srgbClr val="5B6770"/>
                 </a:solidFill>
+                <a:latin typeface="Times New Roman" pitchFamily="34" charset="0"/>
+                <a:ea typeface="Times New Roman" pitchFamily="34" charset="-122"/>
+                <a:cs typeface="Times New Roman" pitchFamily="34" charset="-120"/>
               </a:rPr>
               <a:t>Single vertical plane</a:t>
             </a:r>
@@ -15107,6 +15563,9 @@
                 <a:solidFill>
                   <a:srgbClr val="1F2224"/>
                 </a:solidFill>
+                <a:latin typeface="Times New Roman" pitchFamily="34" charset="0"/>
+                <a:ea typeface="Times New Roman" pitchFamily="34" charset="-122"/>
+                <a:cs typeface="Times New Roman" pitchFamily="34" charset="-120"/>
               </a:rPr>
               <a:t>مستوى رأسي منفرد</a:t>
             </a:r>
@@ -15143,6 +15602,9 @@
                 <a:solidFill>
                   <a:srgbClr val="3A4146"/>
                 </a:solidFill>
+                <a:latin typeface="Times New Roman" pitchFamily="34" charset="0"/>
+                <a:ea typeface="Times New Roman" pitchFamily="34" charset="-122"/>
+                <a:cs typeface="Times New Roman" pitchFamily="34" charset="-120"/>
               </a:rPr>
               <a:t>يُبرز الفراغ الذي يواجهه.</a:t>
             </a:r>
@@ -15275,6 +15737,9 @@
                 <a:solidFill>
                   <a:srgbClr val="5B6770"/>
                 </a:solidFill>
+                <a:latin typeface="Times New Roman" pitchFamily="34" charset="0"/>
+                <a:ea typeface="Times New Roman" pitchFamily="34" charset="-122"/>
+                <a:cs typeface="Times New Roman" pitchFamily="34" charset="-120"/>
               </a:rPr>
               <a:t>L-shaped plane</a:t>
             </a:r>
@@ -15311,6 +15776,9 @@
                 <a:solidFill>
                   <a:srgbClr val="1F2224"/>
                 </a:solidFill>
+                <a:latin typeface="Times New Roman" pitchFamily="34" charset="0"/>
+                <a:ea typeface="Times New Roman" pitchFamily="34" charset="-122"/>
+                <a:cs typeface="Times New Roman" pitchFamily="34" charset="-120"/>
               </a:rPr>
               <a:t>مستوى على شكل L</a:t>
             </a:r>
@@ -15347,6 +15815,9 @@
                 <a:solidFill>
                   <a:srgbClr val="3A4146"/>
                 </a:solidFill>
+                <a:latin typeface="Times New Roman" pitchFamily="34" charset="0"/>
+                <a:ea typeface="Times New Roman" pitchFamily="34" charset="-122"/>
+                <a:cs typeface="Times New Roman" pitchFamily="34" charset="-120"/>
               </a:rPr>
               <a:t>يولّد فراغًا من الزاوية نحو الخارج قطريًا.</a:t>
             </a:r>
@@ -15479,6 +15950,9 @@
                 <a:solidFill>
                   <a:srgbClr val="5B6770"/>
                 </a:solidFill>
+                <a:latin typeface="Times New Roman" pitchFamily="34" charset="0"/>
+                <a:ea typeface="Times New Roman" pitchFamily="34" charset="-122"/>
+                <a:cs typeface="Times New Roman" pitchFamily="34" charset="-120"/>
               </a:rPr>
               <a:t>Parallel planes</a:t>
             </a:r>
@@ -15515,6 +15989,9 @@
                 <a:solidFill>
                   <a:srgbClr val="1F2224"/>
                 </a:solidFill>
+                <a:latin typeface="Times New Roman" pitchFamily="34" charset="0"/>
+                <a:ea typeface="Times New Roman" pitchFamily="34" charset="-122"/>
+                <a:cs typeface="Times New Roman" pitchFamily="34" charset="-120"/>
               </a:rPr>
               <a:t>مستويان متوازيان</a:t>
             </a:r>
@@ -15551,6 +16028,9 @@
                 <a:solidFill>
                   <a:srgbClr val="3A4146"/>
                 </a:solidFill>
+                <a:latin typeface="Times New Roman" pitchFamily="34" charset="0"/>
+                <a:ea typeface="Times New Roman" pitchFamily="34" charset="-122"/>
+                <a:cs typeface="Times New Roman" pitchFamily="34" charset="-120"/>
               </a:rPr>
               <a:t>فراغ محوري موجّه نحو الطرفين المفتوحين.</a:t>
             </a:r>
@@ -15703,6 +16183,9 @@
                 <a:solidFill>
                   <a:srgbClr val="5B6770"/>
                 </a:solidFill>
+                <a:latin typeface="Times New Roman" pitchFamily="34" charset="0"/>
+                <a:ea typeface="Times New Roman" pitchFamily="34" charset="-122"/>
+                <a:cs typeface="Times New Roman" pitchFamily="34" charset="-120"/>
               </a:rPr>
               <a:t>U-shaped plane</a:t>
             </a:r>
@@ -15739,6 +16222,9 @@
                 <a:solidFill>
                   <a:srgbClr val="1F2224"/>
                 </a:solidFill>
+                <a:latin typeface="Times New Roman" pitchFamily="34" charset="0"/>
+                <a:ea typeface="Times New Roman" pitchFamily="34" charset="-122"/>
+                <a:cs typeface="Times New Roman" pitchFamily="34" charset="-120"/>
               </a:rPr>
               <a:t>مستوى على شكل U</a:t>
             </a:r>
@@ -15775,6 +16261,9 @@
                 <a:solidFill>
                   <a:srgbClr val="3A4146"/>
                 </a:solidFill>
+                <a:latin typeface="Times New Roman" pitchFamily="34" charset="0"/>
+                <a:ea typeface="Times New Roman" pitchFamily="34" charset="-122"/>
+                <a:cs typeface="Times New Roman" pitchFamily="34" charset="-120"/>
               </a:rPr>
               <a:t>فراغ موجّه نحو الطرف المفتوح.</a:t>
             </a:r>
@@ -15947,6 +16436,9 @@
                 <a:solidFill>
                   <a:srgbClr val="5B6770"/>
                 </a:solidFill>
+                <a:latin typeface="Times New Roman" pitchFamily="34" charset="0"/>
+                <a:ea typeface="Times New Roman" pitchFamily="34" charset="-122"/>
+                <a:cs typeface="Times New Roman" pitchFamily="34" charset="-120"/>
               </a:rPr>
               <a:t>Closure — four planes</a:t>
             </a:r>
@@ -15983,6 +16475,9 @@
                 <a:solidFill>
                   <a:srgbClr val="1F2224"/>
                 </a:solidFill>
+                <a:latin typeface="Times New Roman" pitchFamily="34" charset="0"/>
+                <a:ea typeface="Times New Roman" pitchFamily="34" charset="-122"/>
+                <a:cs typeface="Times New Roman" pitchFamily="34" charset="-120"/>
               </a:rPr>
               <a:t>الإغلاق الكامل</a:t>
             </a:r>
@@ -16019,6 +16514,9 @@
                 <a:solidFill>
                   <a:srgbClr val="3A4146"/>
                 </a:solidFill>
+                <a:latin typeface="Times New Roman" pitchFamily="34" charset="0"/>
+                <a:ea typeface="Times New Roman" pitchFamily="34" charset="-122"/>
+                <a:cs typeface="Times New Roman" pitchFamily="34" charset="-120"/>
               </a:rPr>
               <a:t>فراغ منطوٍ تحدده المستويات من كل الجهات.</a:t>
             </a:r>
@@ -16079,6 +16577,9 @@
                 <a:solidFill>
                   <a:srgbClr val="5B6770"/>
                 </a:solidFill>
+                <a:latin typeface="Times New Roman" pitchFamily="34" charset="0"/>
+                <a:ea typeface="Times New Roman" pitchFamily="34" charset="-122"/>
+                <a:cs typeface="Times New Roman" pitchFamily="34" charset="-120"/>
               </a:rPr>
               <a:t>Single plane</a:t>
             </a:r>
@@ -16139,6 +16640,9 @@
                 <a:solidFill>
                   <a:srgbClr val="5B6770"/>
                 </a:solidFill>
+                <a:latin typeface="Times New Roman" pitchFamily="34" charset="0"/>
+                <a:ea typeface="Times New Roman" pitchFamily="34" charset="-122"/>
+                <a:cs typeface="Times New Roman" pitchFamily="34" charset="-120"/>
               </a:rPr>
               <a:t>L-shaped plane</a:t>
             </a:r>
@@ -16199,6 +16703,9 @@
                 <a:solidFill>
                   <a:srgbClr val="5B6770"/>
                 </a:solidFill>
+                <a:latin typeface="Times New Roman" pitchFamily="34" charset="0"/>
+                <a:ea typeface="Times New Roman" pitchFamily="34" charset="-122"/>
+                <a:cs typeface="Times New Roman" pitchFamily="34" charset="-120"/>
               </a:rPr>
               <a:t>Parallel planes</a:t>
             </a:r>
@@ -16307,6 +16814,9 @@
                 <a:solidFill>
                   <a:schemeClr val="accent1"/>
                 </a:solidFill>
+                <a:latin typeface="Times New Roman" pitchFamily="34" charset="0"/>
+                <a:ea typeface="Times New Roman" pitchFamily="34" charset="-122"/>
+                <a:cs typeface="Times New Roman" pitchFamily="34" charset="-120"/>
               </a:rPr>
               <a:t>11 — CEILING / OVERHEAD PLANE</a:t>
             </a:r>
@@ -16345,6 +16855,9 @@
                 <a:solidFill>
                   <a:schemeClr val="tx1"/>
                 </a:solidFill>
+                <a:latin typeface="Times New Roman" pitchFamily="34" charset="0"/>
+                <a:ea typeface="Times New Roman" pitchFamily="34" charset="-122"/>
+                <a:cs typeface="Times New Roman" pitchFamily="34" charset="-120"/>
               </a:rPr>
               <a:t>السقف — المستوى العلوي</a:t>
             </a:r>
@@ -16760,6 +17273,9 @@
                 <a:solidFill>
                   <a:srgbClr val="5B6770"/>
                 </a:solidFill>
+                <a:latin typeface="Times New Roman" pitchFamily="34" charset="0"/>
+                <a:ea typeface="Times New Roman" pitchFamily="34" charset="-122"/>
+                <a:cs typeface="Times New Roman" pitchFamily="34" charset="-120"/>
               </a:rPr>
               <a:t>3.2 m</a:t>
             </a:r>
@@ -16796,6 +17312,9 @@
                 <a:solidFill>
                   <a:srgbClr val="C2593A"/>
                 </a:solidFill>
+                <a:latin typeface="Times New Roman" pitchFamily="34" charset="0"/>
+                <a:ea typeface="Times New Roman" pitchFamily="34" charset="-122"/>
+                <a:cs typeface="Times New Roman" pitchFamily="34" charset="-120"/>
               </a:rPr>
               <a:t>2.5 m</a:t>
             </a:r>
@@ -16832,6 +17351,9 @@
                 <a:solidFill>
                   <a:srgbClr val="5B6770"/>
                 </a:solidFill>
+                <a:latin typeface="Times New Roman" pitchFamily="34" charset="0"/>
+                <a:ea typeface="Times New Roman" pitchFamily="34" charset="-122"/>
+                <a:cs typeface="Times New Roman" pitchFamily="34" charset="-120"/>
               </a:rPr>
               <a:t>سقف مرتفع: اتساع ورسمية</a:t>
             </a:r>
@@ -16868,6 +17390,9 @@
                 <a:solidFill>
                   <a:srgbClr val="C2593A"/>
                 </a:solidFill>
+                <a:latin typeface="Times New Roman" pitchFamily="34" charset="0"/>
+                <a:ea typeface="Times New Roman" pitchFamily="34" charset="-122"/>
+                <a:cs typeface="Times New Roman" pitchFamily="34" charset="-120"/>
               </a:rPr>
               <a:t>سقف منخفض: احتواء وتحديد</a:t>
             </a:r>
@@ -16904,6 +17429,9 @@
                 <a:solidFill>
                   <a:srgbClr val="3A4146"/>
                 </a:solidFill>
+                <a:latin typeface="Times New Roman" pitchFamily="34" charset="0"/>
+                <a:ea typeface="Times New Roman" pitchFamily="34" charset="-122"/>
+                <a:cs typeface="Times New Roman" pitchFamily="34" charset="-120"/>
               </a:rPr>
               <a:t>هنا تظهر أهمية التصميم الداخلي بوضوح؛ فالسقف يستطيع أن:</a:t>
             </a:r>
@@ -16984,6 +17512,9 @@
                 <a:solidFill>
                   <a:srgbClr val="1F2224"/>
                 </a:solidFill>
+                <a:latin typeface="Times New Roman" pitchFamily="34" charset="0"/>
+                <a:ea typeface="Times New Roman" pitchFamily="34" charset="-122"/>
+                <a:cs typeface="Times New Roman" pitchFamily="34" charset="-120"/>
               </a:rPr>
               <a:t>يحدد منطقة معينة</a:t>
             </a:r>
@@ -17064,6 +17595,9 @@
                 <a:solidFill>
                   <a:srgbClr val="1F2224"/>
                 </a:solidFill>
+                <a:latin typeface="Times New Roman" pitchFamily="34" charset="0"/>
+                <a:ea typeface="Times New Roman" pitchFamily="34" charset="-122"/>
+                <a:cs typeface="Times New Roman" pitchFamily="34" charset="-120"/>
               </a:rPr>
               <a:t>يغير الإحساس بالارتفاع</a:t>
             </a:r>
@@ -17144,6 +17678,9 @@
                 <a:solidFill>
                   <a:srgbClr val="1F2224"/>
                 </a:solidFill>
+                <a:latin typeface="Times New Roman" pitchFamily="34" charset="0"/>
+                <a:ea typeface="Times New Roman" pitchFamily="34" charset="-122"/>
+                <a:cs typeface="Times New Roman" pitchFamily="34" charset="-120"/>
               </a:rPr>
               <a:t>يؤثر على الضوء</a:t>
             </a:r>
@@ -17224,6 +17761,9 @@
                 <a:solidFill>
                   <a:srgbClr val="1F2224"/>
                 </a:solidFill>
+                <a:latin typeface="Times New Roman" pitchFamily="34" charset="0"/>
+                <a:ea typeface="Times New Roman" pitchFamily="34" charset="-122"/>
+                <a:cs typeface="Times New Roman" pitchFamily="34" charset="-120"/>
               </a:rPr>
               <a:t>يؤثر على الصوت</a:t>
             </a:r>
@@ -17304,6 +17844,9 @@
                 <a:solidFill>
                   <a:srgbClr val="1F2224"/>
                 </a:solidFill>
+                <a:latin typeface="Times New Roman" pitchFamily="34" charset="0"/>
+                <a:ea typeface="Times New Roman" pitchFamily="34" charset="-122"/>
+                <a:cs typeface="Times New Roman" pitchFamily="34" charset="-120"/>
               </a:rPr>
               <a:t>يوجه الانتباه</a:t>
             </a:r>
@@ -17384,6 +17927,9 @@
                 <a:solidFill>
                   <a:srgbClr val="1F2224"/>
                 </a:solidFill>
+                <a:latin typeface="Times New Roman" pitchFamily="34" charset="0"/>
+                <a:ea typeface="Times New Roman" pitchFamily="34" charset="-122"/>
+                <a:cs typeface="Times New Roman" pitchFamily="34" charset="-120"/>
               </a:rPr>
               <a:t>يفرق بين مناطق مختلفة داخل الفراغ</a:t>
             </a:r>
@@ -17492,6 +18038,9 @@
                 <a:solidFill>
                   <a:schemeClr val="accent1"/>
                 </a:solidFill>
+                <a:latin typeface="Times New Roman" pitchFamily="34" charset="0"/>
+                <a:ea typeface="Times New Roman" pitchFamily="34" charset="-122"/>
+                <a:cs typeface="Times New Roman" pitchFamily="34" charset="-120"/>
               </a:rPr>
               <a:t>LECTURE OBJECTIVES</a:t>
             </a:r>
@@ -17530,6 +18079,9 @@
                 <a:solidFill>
                   <a:schemeClr val="tx1"/>
                 </a:solidFill>
+                <a:latin typeface="Times New Roman" pitchFamily="34" charset="0"/>
+                <a:ea typeface="Times New Roman" pitchFamily="34" charset="-122"/>
+                <a:cs typeface="Times New Roman" pitchFamily="34" charset="-120"/>
               </a:rPr>
               <a:t>ماذا نريد من هذه المحاضرة؟</a:t>
             </a:r>
@@ -17566,6 +18118,9 @@
                 <a:solidFill>
                   <a:srgbClr val="3A4146"/>
                 </a:solidFill>
+                <a:latin typeface="Times New Roman" pitchFamily="34" charset="0"/>
+                <a:ea typeface="Times New Roman" pitchFamily="34" charset="-122"/>
+                <a:cs typeface="Times New Roman" pitchFamily="34" charset="-120"/>
               </a:rPr>
               <a:t>في أول محاضرة لا ندخل في الألوان والخامات والأثاث؛ بل نضع الأساس الفكري للمادة.</a:t>
             </a:r>
@@ -17675,6 +18230,9 @@
                 <a:solidFill>
                   <a:srgbClr val="B9C4C4"/>
                 </a:solidFill>
+                <a:latin typeface="Times New Roman" pitchFamily="34" charset="0"/>
+                <a:ea typeface="Times New Roman" pitchFamily="34" charset="-122"/>
+                <a:cs typeface="Times New Roman" pitchFamily="34" charset="-120"/>
               </a:rPr>
               <a:t>01</a:t>
             </a:r>
@@ -17711,6 +18269,9 @@
                 <a:solidFill>
                   <a:srgbClr val="1F2224"/>
                 </a:solidFill>
+                <a:latin typeface="Times New Roman" pitchFamily="34" charset="0"/>
+                <a:ea typeface="Times New Roman" pitchFamily="34" charset="-122"/>
+                <a:cs typeface="Times New Roman" pitchFamily="34" charset="-120"/>
               </a:rPr>
               <a:t>تعريف التصميم</a:t>
             </a:r>
@@ -17747,6 +18308,9 @@
                 <a:solidFill>
                   <a:srgbClr val="3A4146"/>
                 </a:solidFill>
+                <a:latin typeface="Times New Roman" pitchFamily="34" charset="0"/>
+                <a:ea typeface="Times New Roman" pitchFamily="34" charset="-122"/>
+                <a:cs typeface="Times New Roman" pitchFamily="34" charset="-120"/>
               </a:rPr>
               <a:t>فهم التصميم كعملية اتخاذ قرارات منظمة وليس رسمًا لشكل جميل.</a:t>
             </a:r>
@@ -17856,6 +18420,9 @@
                 <a:solidFill>
                   <a:srgbClr val="B9C4C4"/>
                 </a:solidFill>
+                <a:latin typeface="Times New Roman" pitchFamily="34" charset="0"/>
+                <a:ea typeface="Times New Roman" pitchFamily="34" charset="-122"/>
+                <a:cs typeface="Times New Roman" pitchFamily="34" charset="-120"/>
               </a:rPr>
               <a:t>02</a:t>
             </a:r>
@@ -17892,6 +18459,9 @@
                 <a:solidFill>
                   <a:srgbClr val="1F2224"/>
                 </a:solidFill>
+                <a:latin typeface="Times New Roman" pitchFamily="34" charset="0"/>
+                <a:ea typeface="Times New Roman" pitchFamily="34" charset="-122"/>
+                <a:cs typeface="Times New Roman" pitchFamily="34" charset="-120"/>
               </a:rPr>
               <a:t>التمييز عن الديكور</a:t>
             </a:r>
@@ -17928,6 +18498,9 @@
                 <a:solidFill>
                   <a:srgbClr val="3A4146"/>
                 </a:solidFill>
+                <a:latin typeface="Times New Roman" pitchFamily="34" charset="0"/>
+                <a:ea typeface="Times New Roman" pitchFamily="34" charset="-122"/>
+                <a:cs typeface="Times New Roman" pitchFamily="34" charset="-120"/>
               </a:rPr>
               <a:t>التفريق بين Interior Design و Interior Decoration.</a:t>
             </a:r>
@@ -18037,6 +18610,9 @@
                 <a:solidFill>
                   <a:srgbClr val="B9C4C4"/>
                 </a:solidFill>
+                <a:latin typeface="Times New Roman" pitchFamily="34" charset="0"/>
+                <a:ea typeface="Times New Roman" pitchFamily="34" charset="-122"/>
+                <a:cs typeface="Times New Roman" pitchFamily="34" charset="-120"/>
               </a:rPr>
               <a:t>03</a:t>
             </a:r>
@@ -18073,6 +18649,9 @@
                 <a:solidFill>
                   <a:srgbClr val="1F2224"/>
                 </a:solidFill>
+                <a:latin typeface="Times New Roman" pitchFamily="34" charset="0"/>
+                <a:ea typeface="Times New Roman" pitchFamily="34" charset="-122"/>
+                <a:cs typeface="Times New Roman" pitchFamily="34" charset="-120"/>
               </a:rPr>
               <a:t>فهم الفراغ</a:t>
             </a:r>
@@ -18109,6 +18688,9 @@
                 <a:solidFill>
                   <a:srgbClr val="3A4146"/>
                 </a:solidFill>
+                <a:latin typeface="Times New Roman" pitchFamily="34" charset="0"/>
+                <a:ea typeface="Times New Roman" pitchFamily="34" charset="-122"/>
+                <a:cs typeface="Times New Roman" pitchFamily="34" charset="-120"/>
               </a:rPr>
               <a:t>إدراك أن الفراغ هو موضوع التصميم، وأنه يتحدد بما يحدث داخله.</a:t>
             </a:r>
@@ -18218,6 +18800,9 @@
                 <a:solidFill>
                   <a:srgbClr val="B9C4C4"/>
                 </a:solidFill>
+                <a:latin typeface="Times New Roman" pitchFamily="34" charset="0"/>
+                <a:ea typeface="Times New Roman" pitchFamily="34" charset="-122"/>
+                <a:cs typeface="Times New Roman" pitchFamily="34" charset="-120"/>
               </a:rPr>
               <a:t>04</a:t>
             </a:r>
@@ -18254,6 +18839,9 @@
                 <a:solidFill>
                   <a:srgbClr val="1F2224"/>
                 </a:solidFill>
+                <a:latin typeface="Times New Roman" pitchFamily="34" charset="0"/>
+                <a:ea typeface="Times New Roman" pitchFamily="34" charset="-122"/>
+                <a:cs typeface="Times New Roman" pitchFamily="34" charset="-120"/>
               </a:rPr>
               <a:t>عناصر تشكيل الفراغ</a:t>
             </a:r>
@@ -18290,6 +18878,9 @@
                 <a:solidFill>
                   <a:srgbClr val="3A4146"/>
                 </a:solidFill>
+                <a:latin typeface="Times New Roman" pitchFamily="34" charset="0"/>
+                <a:ea typeface="Times New Roman" pitchFamily="34" charset="-122"/>
+                <a:cs typeface="Times New Roman" pitchFamily="34" charset="-120"/>
               </a:rPr>
               <a:t>التعرف على Point · Line · Plane · Volume ومستويات الفراغ الثلاثة.</a:t>
             </a:r>
@@ -18399,6 +18990,9 @@
                 <a:solidFill>
                   <a:srgbClr val="B9C4C4"/>
                 </a:solidFill>
+                <a:latin typeface="Times New Roman" pitchFamily="34" charset="0"/>
+                <a:ea typeface="Times New Roman" pitchFamily="34" charset="-122"/>
+                <a:cs typeface="Times New Roman" pitchFamily="34" charset="-120"/>
               </a:rPr>
               <a:t>05</a:t>
             </a:r>
@@ -18435,6 +19029,9 @@
                 <a:solidFill>
                   <a:srgbClr val="1F2224"/>
                 </a:solidFill>
+                <a:latin typeface="Times New Roman" pitchFamily="34" charset="0"/>
+                <a:ea typeface="Times New Roman" pitchFamily="34" charset="-122"/>
+                <a:cs typeface="Times New Roman" pitchFamily="34" charset="-120"/>
               </a:rPr>
               <a:t>الإنسان أولًا</a:t>
             </a:r>
@@ -18471,6 +19068,9 @@
                 <a:solidFill>
                   <a:srgbClr val="3A4146"/>
                 </a:solidFill>
+                <a:latin typeface="Times New Roman" pitchFamily="34" charset="0"/>
+                <a:ea typeface="Times New Roman" pitchFamily="34" charset="-122"/>
+                <a:cs typeface="Times New Roman" pitchFamily="34" charset="-120"/>
               </a:rPr>
               <a:t>ربط قرارات التصميم بالإنسان والحركة والمقياس والوظيفة.</a:t>
             </a:r>
@@ -18580,6 +19180,9 @@
                 <a:solidFill>
                   <a:srgbClr val="B9C4C4"/>
                 </a:solidFill>
+                <a:latin typeface="Times New Roman" pitchFamily="34" charset="0"/>
+                <a:ea typeface="Times New Roman" pitchFamily="34" charset="-122"/>
+                <a:cs typeface="Times New Roman" pitchFamily="34" charset="-120"/>
               </a:rPr>
               <a:t>06</a:t>
             </a:r>
@@ -18616,6 +19219,9 @@
                 <a:solidFill>
                   <a:srgbClr val="1F2224"/>
                 </a:solidFill>
+                <a:latin typeface="Times New Roman" pitchFamily="34" charset="0"/>
+                <a:ea typeface="Times New Roman" pitchFamily="34" charset="-122"/>
+                <a:cs typeface="Times New Roman" pitchFamily="34" charset="-120"/>
               </a:rPr>
               <a:t>قراءة فراغ</a:t>
             </a:r>
@@ -18652,6 +19258,9 @@
                 <a:solidFill>
                   <a:srgbClr val="3A4146"/>
                 </a:solidFill>
+                <a:latin typeface="Times New Roman" pitchFamily="34" charset="0"/>
+                <a:ea typeface="Times New Roman" pitchFamily="34" charset="-122"/>
+                <a:cs typeface="Times New Roman" pitchFamily="34" charset="-120"/>
               </a:rPr>
               <a:t>تطبيق التحليل على فراغ حقيقي من خلال Exercise 01.</a:t>
             </a:r>
@@ -18760,6 +19369,9 @@
                 <a:solidFill>
                   <a:schemeClr val="accent1"/>
                 </a:solidFill>
+                <a:latin typeface="Times New Roman" pitchFamily="34" charset="0"/>
+                <a:ea typeface="Times New Roman" pitchFamily="34" charset="-122"/>
+                <a:cs typeface="Times New Roman" pitchFamily="34" charset="-120"/>
               </a:rPr>
               <a:t>11-A — OVERHEAD PLANE: PRINCIPLES</a:t>
             </a:r>
@@ -18798,6 +19410,9 @@
                 <a:solidFill>
                   <a:schemeClr val="tx1"/>
                 </a:solidFill>
+                <a:latin typeface="Times New Roman" pitchFamily="34" charset="0"/>
+                <a:ea typeface="Times New Roman" pitchFamily="34" charset="-122"/>
+                <a:cs typeface="Times New Roman" pitchFamily="34" charset="-120"/>
               </a:rPr>
               <a:t>المستوى العلوي: مبادئ وأمثلة</a:t>
             </a:r>
@@ -18878,6 +19493,9 @@
                 <a:solidFill>
                   <a:srgbClr val="1F2224"/>
                 </a:solidFill>
+                <a:latin typeface="Times New Roman" pitchFamily="34" charset="0"/>
+                <a:ea typeface="Times New Roman" pitchFamily="34" charset="-122"/>
+                <a:cs typeface="Times New Roman" pitchFamily="34" charset="-120"/>
               </a:rPr>
               <a:t>يشبه مظلة الشجرة؛ يمنح إحساسًا بالاحتواء.</a:t>
             </a:r>
@@ -18958,6 +19576,9 @@
                 <a:solidFill>
                   <a:srgbClr val="1F2224"/>
                 </a:solidFill>
+                <a:latin typeface="Times New Roman" pitchFamily="34" charset="0"/>
+                <a:ea typeface="Times New Roman" pitchFamily="34" charset="-122"/>
+                <a:cs typeface="Times New Roman" pitchFamily="34" charset="-120"/>
               </a:rPr>
               <a:t>يحدد مجالًا فراغيًا بينه وبين الأرضية.</a:t>
             </a:r>
@@ -19038,6 +19659,9 @@
                 <a:solidFill>
                   <a:srgbClr val="1F2224"/>
                 </a:solidFill>
+                <a:latin typeface="Times New Roman" pitchFamily="34" charset="0"/>
+                <a:ea typeface="Times New Roman" pitchFamily="34" charset="-122"/>
+                <a:cs typeface="Times New Roman" pitchFamily="34" charset="-120"/>
               </a:rPr>
               <a:t>حوافه ترسم حدود هذا المجال.</a:t>
             </a:r>
@@ -19118,6 +19742,9 @@
                 <a:solidFill>
                   <a:srgbClr val="1F2224"/>
                 </a:solidFill>
+                <a:latin typeface="Times New Roman" pitchFamily="34" charset="0"/>
+                <a:ea typeface="Times New Roman" pitchFamily="34" charset="-122"/>
+                <a:cs typeface="Times New Roman" pitchFamily="34" charset="-120"/>
               </a:rPr>
               <a:t>العناصر الرأسية وحواف السقف والأرضيات المرتفعة والمنخفضة تعزز حدود الحجم.</a:t>
             </a:r>
@@ -19198,6 +19825,9 @@
                 <a:solidFill>
                   <a:srgbClr val="1F2224"/>
                 </a:solidFill>
+                <a:latin typeface="Times New Roman" pitchFamily="34" charset="0"/>
+                <a:ea typeface="Times New Roman" pitchFamily="34" charset="-122"/>
+                <a:cs typeface="Times New Roman" pitchFamily="34" charset="-120"/>
               </a:rPr>
               <a:t>سقف المبنى يوفر الحماية ويحدد هيئته العامة، ويعكس المواد والنظام الإنشائي.</a:t>
             </a:r>
@@ -19258,6 +19888,9 @@
                 <a:solidFill>
                   <a:srgbClr val="5B6770"/>
                 </a:solidFill>
+                <a:latin typeface="Times New Roman" pitchFamily="34" charset="0"/>
+                <a:ea typeface="Times New Roman" pitchFamily="34" charset="-122"/>
+                <a:cs typeface="Times New Roman" pitchFamily="34" charset="-120"/>
               </a:rPr>
               <a:t>Valencia Opera House, Spain</a:t>
             </a:r>
@@ -19318,6 +19951,9 @@
                 <a:solidFill>
                   <a:srgbClr val="5B6770"/>
                 </a:solidFill>
+                <a:latin typeface="Times New Roman" pitchFamily="34" charset="0"/>
+                <a:ea typeface="Times New Roman" pitchFamily="34" charset="-122"/>
+                <a:cs typeface="Times New Roman" pitchFamily="34" charset="-120"/>
               </a:rPr>
               <a:t>Salamanca House, New Zealand</a:t>
             </a:r>
@@ -19378,6 +20014,9 @@
                 <a:solidFill>
                   <a:srgbClr val="5B6770"/>
                 </a:solidFill>
+                <a:latin typeface="Times New Roman" pitchFamily="34" charset="0"/>
+                <a:ea typeface="Times New Roman" pitchFamily="34" charset="-122"/>
+                <a:cs typeface="Times New Roman" pitchFamily="34" charset="-120"/>
               </a:rPr>
               <a:t>Munich Olympic Stadium</a:t>
             </a:r>
@@ -19486,6 +20125,9 @@
                 <a:solidFill>
                   <a:schemeClr val="accent1"/>
                 </a:solidFill>
+                <a:latin typeface="Times New Roman" pitchFamily="34" charset="0"/>
+                <a:ea typeface="Times New Roman" pitchFamily="34" charset="-122"/>
+                <a:cs typeface="Times New Roman" pitchFamily="34" charset="-120"/>
               </a:rPr>
               <a:t>12 — FLOOR + WALL + CEILING</a:t>
             </a:r>
@@ -19524,6 +20166,9 @@
                 <a:solidFill>
                   <a:schemeClr val="tx1"/>
                 </a:solidFill>
+                <a:latin typeface="Times New Roman" pitchFamily="34" charset="0"/>
+                <a:ea typeface="Times New Roman" pitchFamily="34" charset="-122"/>
+                <a:cs typeface="Times New Roman" pitchFamily="34" charset="-120"/>
               </a:rPr>
               <a:t>من العلاقة بين المستويات يتكوّن الفراغ</a:t>
             </a:r>
@@ -19582,6 +20227,9 @@
                 <a:solidFill>
                   <a:srgbClr val="FFFFFF"/>
                 </a:solidFill>
+                <a:latin typeface="Times New Roman" pitchFamily="34" charset="0"/>
+                <a:ea typeface="Times New Roman" pitchFamily="34" charset="-122"/>
+                <a:cs typeface="Times New Roman" pitchFamily="34" charset="-120"/>
               </a:rPr>
               <a:t>BASE</a:t>
             </a:r>
@@ -19618,6 +20266,9 @@
                 <a:solidFill>
                   <a:srgbClr val="FFFFFF"/>
                 </a:solidFill>
+                <a:latin typeface="Times New Roman" pitchFamily="34" charset="0"/>
+                <a:ea typeface="Times New Roman" pitchFamily="34" charset="-122"/>
+                <a:cs typeface="Times New Roman" pitchFamily="34" charset="-120"/>
               </a:rPr>
               <a:t>الأرضية</a:t>
             </a:r>
@@ -19654,6 +20305,9 @@
                 <a:solidFill>
                   <a:srgbClr val="8A9A9B"/>
                 </a:solidFill>
+                <a:latin typeface="Times New Roman" pitchFamily="34" charset="0"/>
+                <a:ea typeface="Times New Roman" pitchFamily="34" charset="-122"/>
+                <a:cs typeface="Times New Roman" pitchFamily="34" charset="-120"/>
               </a:rPr>
               <a:t>+</a:t>
             </a:r>
@@ -19712,6 +20366,9 @@
                 <a:solidFill>
                   <a:srgbClr val="FFFFFF"/>
                 </a:solidFill>
+                <a:latin typeface="Times New Roman" pitchFamily="34" charset="0"/>
+                <a:ea typeface="Times New Roman" pitchFamily="34" charset="-122"/>
+                <a:cs typeface="Times New Roman" pitchFamily="34" charset="-120"/>
               </a:rPr>
               <a:t>VERTICAL</a:t>
             </a:r>
@@ -19748,6 +20405,9 @@
                 <a:solidFill>
                   <a:srgbClr val="FFFFFF"/>
                 </a:solidFill>
+                <a:latin typeface="Times New Roman" pitchFamily="34" charset="0"/>
+                <a:ea typeface="Times New Roman" pitchFamily="34" charset="-122"/>
+                <a:cs typeface="Times New Roman" pitchFamily="34" charset="-120"/>
               </a:rPr>
               <a:t>الجدران</a:t>
             </a:r>
@@ -19784,6 +20444,9 @@
                 <a:solidFill>
                   <a:srgbClr val="8A9A9B"/>
                 </a:solidFill>
+                <a:latin typeface="Times New Roman" pitchFamily="34" charset="0"/>
+                <a:ea typeface="Times New Roman" pitchFamily="34" charset="-122"/>
+                <a:cs typeface="Times New Roman" pitchFamily="34" charset="-120"/>
               </a:rPr>
               <a:t>+</a:t>
             </a:r>
@@ -19842,6 +20505,9 @@
                 <a:solidFill>
                   <a:srgbClr val="FFFFFF"/>
                 </a:solidFill>
+                <a:latin typeface="Times New Roman" pitchFamily="34" charset="0"/>
+                <a:ea typeface="Times New Roman" pitchFamily="34" charset="-122"/>
+                <a:cs typeface="Times New Roman" pitchFamily="34" charset="-120"/>
               </a:rPr>
               <a:t>OVERHEAD</a:t>
             </a:r>
@@ -19878,6 +20544,9 @@
                 <a:solidFill>
                   <a:srgbClr val="FFFFFF"/>
                 </a:solidFill>
+                <a:latin typeface="Times New Roman" pitchFamily="34" charset="0"/>
+                <a:ea typeface="Times New Roman" pitchFamily="34" charset="-122"/>
+                <a:cs typeface="Times New Roman" pitchFamily="34" charset="-120"/>
               </a:rPr>
               <a:t>السقف</a:t>
             </a:r>
@@ -19914,6 +20583,9 @@
                 <a:solidFill>
                   <a:srgbClr val="8A9A9B"/>
                 </a:solidFill>
+                <a:latin typeface="Times New Roman" pitchFamily="34" charset="0"/>
+                <a:ea typeface="Times New Roman" pitchFamily="34" charset="-122"/>
+                <a:cs typeface="Times New Roman" pitchFamily="34" charset="-120"/>
               </a:rPr>
               <a:t>=</a:t>
             </a:r>
@@ -19972,6 +20644,9 @@
                 <a:solidFill>
                   <a:srgbClr val="FFFFFF"/>
                 </a:solidFill>
+                <a:latin typeface="Times New Roman" pitchFamily="34" charset="0"/>
+                <a:ea typeface="Times New Roman" pitchFamily="34" charset="-122"/>
+                <a:cs typeface="Times New Roman" pitchFamily="34" charset="-120"/>
               </a:rPr>
               <a:t>SPACE</a:t>
             </a:r>
@@ -20008,6 +20683,9 @@
                 <a:solidFill>
                   <a:srgbClr val="D9A441"/>
                 </a:solidFill>
+                <a:latin typeface="Times New Roman" pitchFamily="34" charset="0"/>
+                <a:ea typeface="Times New Roman" pitchFamily="34" charset="-122"/>
+                <a:cs typeface="Times New Roman" pitchFamily="34" charset="-120"/>
               </a:rPr>
               <a:t>الفراغ</a:t>
             </a:r>
@@ -20393,6 +21071,9 @@
                 <a:solidFill>
                   <a:srgbClr val="3A4146"/>
                 </a:solidFill>
+                <a:latin typeface="Times New Roman" pitchFamily="34" charset="0"/>
+                <a:ea typeface="Times New Roman" pitchFamily="34" charset="-122"/>
+                <a:cs typeface="Times New Roman" pitchFamily="34" charset="-120"/>
               </a:rPr>
               <a:t>المصمم الداخلي لا يتعامل مع هذه العناصر كأشياء منفصلة؛</a:t>
             </a:r>
@@ -20429,6 +21110,9 @@
                 <a:solidFill>
                   <a:srgbClr val="1F2224"/>
                 </a:solidFill>
+                <a:latin typeface="Times New Roman" pitchFamily="34" charset="0"/>
+                <a:ea typeface="Times New Roman" pitchFamily="34" charset="-122"/>
+                <a:cs typeface="Times New Roman" pitchFamily="34" charset="-120"/>
               </a:rPr>
               <a:t>بل يتعامل مع العلاقة بينها لصناعة تجربة فراغية متكاملة.</a:t>
             </a:r>
@@ -20537,6 +21221,9 @@
                 <a:solidFill>
                   <a:schemeClr val="accent1"/>
                 </a:solidFill>
+                <a:latin typeface="Times New Roman" pitchFamily="34" charset="0"/>
+                <a:ea typeface="Times New Roman" pitchFamily="34" charset="-122"/>
+                <a:cs typeface="Times New Roman" pitchFamily="34" charset="-120"/>
               </a:rPr>
               <a:t>13 — OPENINGS</a:t>
             </a:r>
@@ -20575,6 +21262,9 @@
                 <a:solidFill>
                   <a:schemeClr val="tx1"/>
                 </a:solidFill>
+                <a:latin typeface="Times New Roman" pitchFamily="34" charset="0"/>
+                <a:ea typeface="Times New Roman" pitchFamily="34" charset="-122"/>
+                <a:cs typeface="Times New Roman" pitchFamily="34" charset="-120"/>
               </a:rPr>
               <a:t>الفتحات</a:t>
             </a:r>
@@ -20611,6 +21301,9 @@
                 <a:solidFill>
                   <a:srgbClr val="3A4146"/>
                 </a:solidFill>
+                <a:latin typeface="Times New Roman" pitchFamily="34" charset="0"/>
+                <a:ea typeface="Times New Roman" pitchFamily="34" charset="-122"/>
+                <a:cs typeface="Times New Roman" pitchFamily="34" charset="-120"/>
               </a:rPr>
               <a:t>بعد أن حددنا الفراغ بالجدران نحتاج إلى فتحات: الأبواب · النوافذ · الفتحات. وموقع الفتحة في المستوى يغيّر طبيعة الفراغ:</a:t>
             </a:r>
@@ -20726,6 +21419,9 @@
                 <a:solidFill>
                   <a:srgbClr val="5B6770"/>
                 </a:solidFill>
+                <a:latin typeface="Times New Roman" pitchFamily="34" charset="0"/>
+                <a:ea typeface="Times New Roman" pitchFamily="34" charset="-122"/>
+                <a:cs typeface="Times New Roman" pitchFamily="34" charset="-120"/>
               </a:rPr>
               <a:t>Within Plane</a:t>
             </a:r>
@@ -20762,6 +21458,9 @@
                 <a:solidFill>
                   <a:srgbClr val="1F2224"/>
                 </a:solidFill>
+                <a:latin typeface="Times New Roman" pitchFamily="34" charset="0"/>
+                <a:ea typeface="Times New Roman" pitchFamily="34" charset="-122"/>
+                <a:cs typeface="Times New Roman" pitchFamily="34" charset="-120"/>
               </a:rPr>
               <a:t>داخل المستوى</a:t>
             </a:r>
@@ -20798,6 +21497,9 @@
                 <a:solidFill>
                   <a:srgbClr val="3A4146"/>
                 </a:solidFill>
+                <a:latin typeface="Times New Roman" pitchFamily="34" charset="0"/>
+                <a:ea typeface="Times New Roman" pitchFamily="34" charset="-122"/>
+                <a:cs typeface="Times New Roman" pitchFamily="34" charset="-120"/>
               </a:rPr>
               <a:t>تبدو الفتحة محاطة بالجدار وتحافظ على وضوحه.</a:t>
             </a:r>
@@ -20913,6 +21615,9 @@
                 <a:solidFill>
                   <a:srgbClr val="5B6770"/>
                 </a:solidFill>
+                <a:latin typeface="Times New Roman" pitchFamily="34" charset="0"/>
+                <a:ea typeface="Times New Roman" pitchFamily="34" charset="-122"/>
+                <a:cs typeface="Times New Roman" pitchFamily="34" charset="-120"/>
               </a:rPr>
               <a:t>At Corner</a:t>
             </a:r>
@@ -20949,6 +21654,9 @@
                 <a:solidFill>
                   <a:srgbClr val="1F2224"/>
                 </a:solidFill>
+                <a:latin typeface="Times New Roman" pitchFamily="34" charset="0"/>
+                <a:ea typeface="Times New Roman" pitchFamily="34" charset="-122"/>
+                <a:cs typeface="Times New Roman" pitchFamily="34" charset="-120"/>
               </a:rPr>
               <a:t>عند الزاوية</a:t>
             </a:r>
@@ -20985,6 +21693,9 @@
                 <a:solidFill>
                   <a:srgbClr val="3A4146"/>
                 </a:solidFill>
+                <a:latin typeface="Times New Roman" pitchFamily="34" charset="0"/>
+                <a:ea typeface="Times New Roman" pitchFamily="34" charset="-122"/>
+                <a:cs typeface="Times New Roman" pitchFamily="34" charset="-120"/>
               </a:rPr>
               <a:t>تُضعف حدود الزاوية وتوجّه الفراغ نحو الخارج.</a:t>
             </a:r>
@@ -21100,6 +21811,9 @@
                 <a:solidFill>
                   <a:srgbClr val="5B6770"/>
                 </a:solidFill>
+                <a:latin typeface="Times New Roman" pitchFamily="34" charset="0"/>
+                <a:ea typeface="Times New Roman" pitchFamily="34" charset="-122"/>
+                <a:cs typeface="Times New Roman" pitchFamily="34" charset="-120"/>
               </a:rPr>
               <a:t>Between Planes</a:t>
             </a:r>
@@ -21136,6 +21850,9 @@
                 <a:solidFill>
                   <a:srgbClr val="1F2224"/>
                 </a:solidFill>
+                <a:latin typeface="Times New Roman" pitchFamily="34" charset="0"/>
+                <a:ea typeface="Times New Roman" pitchFamily="34" charset="-122"/>
+                <a:cs typeface="Times New Roman" pitchFamily="34" charset="-120"/>
               </a:rPr>
               <a:t>بين المستويات</a:t>
             </a:r>
@@ -21172,6 +21889,9 @@
                 <a:solidFill>
                   <a:srgbClr val="3A4146"/>
                 </a:solidFill>
+                <a:latin typeface="Times New Roman" pitchFamily="34" charset="0"/>
+                <a:ea typeface="Times New Roman" pitchFamily="34" charset="-122"/>
+                <a:cs typeface="Times New Roman" pitchFamily="34" charset="-120"/>
               </a:rPr>
               <a:t>تفصل المستويات بصريًا وتُبرز استقلالها.</a:t>
             </a:r>
@@ -21228,6 +21948,9 @@
                 <a:solidFill>
                   <a:srgbClr val="FFFFFF"/>
                 </a:solidFill>
+                <a:latin typeface="Times New Roman" pitchFamily="34" charset="0"/>
+                <a:ea typeface="Times New Roman" pitchFamily="34" charset="-122"/>
+                <a:cs typeface="Times New Roman" pitchFamily="34" charset="-120"/>
               </a:rPr>
               <a:t>النافذة ليست مجرد عنصر في الجدار؛ هي أداة للتحكم في:</a:t>
             </a:r>
@@ -21308,6 +22031,9 @@
                 <a:solidFill>
                   <a:srgbClr val="FFFFFF"/>
                 </a:solidFill>
+                <a:latin typeface="Times New Roman" pitchFamily="34" charset="0"/>
+                <a:ea typeface="Times New Roman" pitchFamily="34" charset="-122"/>
+                <a:cs typeface="Times New Roman" pitchFamily="34" charset="-120"/>
               </a:rPr>
               <a:t>Light</a:t>
             </a:r>
@@ -21344,6 +22070,9 @@
                 <a:solidFill>
                   <a:srgbClr val="B9C4C4"/>
                 </a:solidFill>
+                <a:latin typeface="Times New Roman" pitchFamily="34" charset="0"/>
+                <a:ea typeface="Times New Roman" pitchFamily="34" charset="-122"/>
+                <a:cs typeface="Times New Roman" pitchFamily="34" charset="-120"/>
               </a:rPr>
               <a:t>الضوء</a:t>
             </a:r>
@@ -21424,6 +22153,9 @@
                 <a:solidFill>
                   <a:srgbClr val="FFFFFF"/>
                 </a:solidFill>
+                <a:latin typeface="Times New Roman" pitchFamily="34" charset="0"/>
+                <a:ea typeface="Times New Roman" pitchFamily="34" charset="-122"/>
+                <a:cs typeface="Times New Roman" pitchFamily="34" charset="-120"/>
               </a:rPr>
               <a:t>View</a:t>
             </a:r>
@@ -21460,6 +22192,9 @@
                 <a:solidFill>
                   <a:srgbClr val="B9C4C4"/>
                 </a:solidFill>
+                <a:latin typeface="Times New Roman" pitchFamily="34" charset="0"/>
+                <a:ea typeface="Times New Roman" pitchFamily="34" charset="-122"/>
+                <a:cs typeface="Times New Roman" pitchFamily="34" charset="-120"/>
               </a:rPr>
               <a:t>الرؤية</a:t>
             </a:r>
@@ -21540,6 +22275,9 @@
                 <a:solidFill>
                   <a:srgbClr val="FFFFFF"/>
                 </a:solidFill>
+                <a:latin typeface="Times New Roman" pitchFamily="34" charset="0"/>
+                <a:ea typeface="Times New Roman" pitchFamily="34" charset="-122"/>
+                <a:cs typeface="Times New Roman" pitchFamily="34" charset="-120"/>
               </a:rPr>
               <a:t>Ventilation</a:t>
             </a:r>
@@ -21576,6 +22314,9 @@
                 <a:solidFill>
                   <a:srgbClr val="B9C4C4"/>
                 </a:solidFill>
+                <a:latin typeface="Times New Roman" pitchFamily="34" charset="0"/>
+                <a:ea typeface="Times New Roman" pitchFamily="34" charset="-122"/>
+                <a:cs typeface="Times New Roman" pitchFamily="34" charset="-120"/>
               </a:rPr>
               <a:t>التهوية</a:t>
             </a:r>
@@ -21656,6 +22397,9 @@
                 <a:solidFill>
                   <a:srgbClr val="FFFFFF"/>
                 </a:solidFill>
+                <a:latin typeface="Times New Roman" pitchFamily="34" charset="0"/>
+                <a:ea typeface="Times New Roman" pitchFamily="34" charset="-122"/>
+                <a:cs typeface="Times New Roman" pitchFamily="34" charset="-120"/>
               </a:rPr>
               <a:t>Connection</a:t>
             </a:r>
@@ -21692,6 +22436,9 @@
                 <a:solidFill>
                   <a:srgbClr val="B9C4C4"/>
                 </a:solidFill>
+                <a:latin typeface="Times New Roman" pitchFamily="34" charset="0"/>
+                <a:ea typeface="Times New Roman" pitchFamily="34" charset="-122"/>
+                <a:cs typeface="Times New Roman" pitchFamily="34" charset="-120"/>
               </a:rPr>
               <a:t>الاتصال</a:t>
             </a:r>
@@ -21728,6 +22475,9 @@
                 <a:solidFill>
                   <a:srgbClr val="2F6B6A"/>
                 </a:solidFill>
+                <a:latin typeface="Times New Roman" pitchFamily="34" charset="0"/>
+                <a:ea typeface="Times New Roman" pitchFamily="34" charset="-122"/>
+                <a:cs typeface="Times New Roman" pitchFamily="34" charset="-120"/>
               </a:rPr>
               <a:t>تحدد الفتحات أنماط الحركة، وتخلق علاقات بصرية بين الفراغات، وتؤثر على الاستمرارية البصرية والفراغية.</a:t>
             </a:r>
@@ -21836,6 +22586,9 @@
                 <a:solidFill>
                   <a:schemeClr val="accent1"/>
                 </a:solidFill>
+                <a:latin typeface="Times New Roman" pitchFamily="34" charset="0"/>
+                <a:ea typeface="Times New Roman" pitchFamily="34" charset="-122"/>
+                <a:cs typeface="Times New Roman" pitchFamily="34" charset="-120"/>
               </a:rPr>
               <a:t>14 — HUMAN &amp; SPACE</a:t>
             </a:r>
@@ -21874,6 +22627,9 @@
                 <a:solidFill>
                   <a:schemeClr val="tx1"/>
                 </a:solidFill>
+                <a:latin typeface="Times New Roman" pitchFamily="34" charset="0"/>
+                <a:ea typeface="Times New Roman" pitchFamily="34" charset="-122"/>
+                <a:cs typeface="Times New Roman" pitchFamily="34" charset="-120"/>
               </a:rPr>
               <a:t>الإنسان والفراغ</a:t>
             </a:r>
@@ -21910,6 +22666,9 @@
                 <a:solidFill>
                   <a:srgbClr val="C2593A"/>
                 </a:solidFill>
+                <a:latin typeface="Times New Roman" pitchFamily="34" charset="0"/>
+                <a:ea typeface="Times New Roman" pitchFamily="34" charset="-122"/>
+                <a:cs typeface="Times New Roman" pitchFamily="34" charset="-120"/>
               </a:rPr>
               <a:t>لا نصمم الفراغ ليكون جميلًا في صورة؛ نحن نصممه لكي يُستخدم.</a:t>
             </a:r>
@@ -22019,6 +22778,9 @@
                 <a:solidFill>
                   <a:srgbClr val="1F2224"/>
                 </a:solidFill>
+                <a:latin typeface="Times New Roman" pitchFamily="34" charset="0"/>
+                <a:ea typeface="Times New Roman" pitchFamily="34" charset="-122"/>
+                <a:cs typeface="Times New Roman" pitchFamily="34" charset="-120"/>
               </a:rPr>
               <a:t>Human Scale</a:t>
             </a:r>
@@ -22055,6 +22817,9 @@
                 <a:solidFill>
                   <a:srgbClr val="C2593A"/>
                 </a:solidFill>
+                <a:latin typeface="Times New Roman" pitchFamily="34" charset="0"/>
+                <a:ea typeface="Times New Roman" pitchFamily="34" charset="-122"/>
+                <a:cs typeface="Times New Roman" pitchFamily="34" charset="-120"/>
               </a:rPr>
               <a:t>مقياس الإنسان</a:t>
             </a:r>
@@ -22164,6 +22929,9 @@
                 <a:solidFill>
                   <a:srgbClr val="1F2224"/>
                 </a:solidFill>
+                <a:latin typeface="Times New Roman" pitchFamily="34" charset="0"/>
+                <a:ea typeface="Times New Roman" pitchFamily="34" charset="-122"/>
+                <a:cs typeface="Times New Roman" pitchFamily="34" charset="-120"/>
               </a:rPr>
               <a:t>Movement</a:t>
             </a:r>
@@ -22200,6 +22968,9 @@
                 <a:solidFill>
                   <a:srgbClr val="C2593A"/>
                 </a:solidFill>
+                <a:latin typeface="Times New Roman" pitchFamily="34" charset="0"/>
+                <a:ea typeface="Times New Roman" pitchFamily="34" charset="-122"/>
+                <a:cs typeface="Times New Roman" pitchFamily="34" charset="-120"/>
               </a:rPr>
               <a:t>الحركة</a:t>
             </a:r>
@@ -22309,6 +23080,9 @@
                 <a:solidFill>
                   <a:srgbClr val="1F2224"/>
                 </a:solidFill>
+                <a:latin typeface="Times New Roman" pitchFamily="34" charset="0"/>
+                <a:ea typeface="Times New Roman" pitchFamily="34" charset="-122"/>
+                <a:cs typeface="Times New Roman" pitchFamily="34" charset="-120"/>
               </a:rPr>
               <a:t>Comfort</a:t>
             </a:r>
@@ -22345,6 +23119,9 @@
                 <a:solidFill>
                   <a:srgbClr val="C2593A"/>
                 </a:solidFill>
+                <a:latin typeface="Times New Roman" pitchFamily="34" charset="0"/>
+                <a:ea typeface="Times New Roman" pitchFamily="34" charset="-122"/>
+                <a:cs typeface="Times New Roman" pitchFamily="34" charset="-120"/>
               </a:rPr>
               <a:t>الراحة</a:t>
             </a:r>
@@ -22454,6 +23231,9 @@
                 <a:solidFill>
                   <a:srgbClr val="1F2224"/>
                 </a:solidFill>
+                <a:latin typeface="Times New Roman" pitchFamily="34" charset="0"/>
+                <a:ea typeface="Times New Roman" pitchFamily="34" charset="-122"/>
+                <a:cs typeface="Times New Roman" pitchFamily="34" charset="-120"/>
               </a:rPr>
               <a:t>Function</a:t>
             </a:r>
@@ -22490,6 +23270,9 @@
                 <a:solidFill>
                   <a:srgbClr val="C2593A"/>
                 </a:solidFill>
+                <a:latin typeface="Times New Roman" pitchFamily="34" charset="0"/>
+                <a:ea typeface="Times New Roman" pitchFamily="34" charset="-122"/>
+                <a:cs typeface="Times New Roman" pitchFamily="34" charset="-120"/>
               </a:rPr>
               <a:t>الوظيفة</a:t>
             </a:r>
@@ -22599,6 +23382,9 @@
                 <a:solidFill>
                   <a:srgbClr val="1F2224"/>
                 </a:solidFill>
+                <a:latin typeface="Times New Roman" pitchFamily="34" charset="0"/>
+                <a:ea typeface="Times New Roman" pitchFamily="34" charset="-122"/>
+                <a:cs typeface="Times New Roman" pitchFamily="34" charset="-120"/>
               </a:rPr>
               <a:t>Privacy</a:t>
             </a:r>
@@ -22635,6 +23421,9 @@
                 <a:solidFill>
                   <a:srgbClr val="C2593A"/>
                 </a:solidFill>
+                <a:latin typeface="Times New Roman" pitchFamily="34" charset="0"/>
+                <a:ea typeface="Times New Roman" pitchFamily="34" charset="-122"/>
+                <a:cs typeface="Times New Roman" pitchFamily="34" charset="-120"/>
               </a:rPr>
               <a:t>الخصوصية</a:t>
             </a:r>
@@ -22691,6 +23480,9 @@
                 <a:solidFill>
                   <a:srgbClr val="D9A441"/>
                 </a:solidFill>
+                <a:latin typeface="Times New Roman" pitchFamily="34" charset="0"/>
+                <a:ea typeface="Times New Roman" pitchFamily="34" charset="-122"/>
+                <a:cs typeface="Times New Roman" pitchFamily="34" charset="-120"/>
               </a:rPr>
               <a:t>أرقام مرجعية تقريبية لمقياس الإنسان (للاستخدام في المرسم):</a:t>
             </a:r>
@@ -22727,6 +23519,9 @@
                 <a:solidFill>
                   <a:srgbClr val="FFFFFF"/>
                 </a:solidFill>
+                <a:latin typeface="Times New Roman" pitchFamily="34" charset="0"/>
+                <a:ea typeface="Times New Roman" pitchFamily="34" charset="-122"/>
+                <a:cs typeface="Times New Roman" pitchFamily="34" charset="-120"/>
               </a:rPr>
               <a:t>90 cm</a:t>
             </a:r>
@@ -22763,6 +23558,9 @@
                 <a:solidFill>
                   <a:srgbClr val="B9C4C4"/>
                 </a:solidFill>
+                <a:latin typeface="Times New Roman" pitchFamily="34" charset="0"/>
+                <a:ea typeface="Times New Roman" pitchFamily="34" charset="-122"/>
+                <a:cs typeface="Times New Roman" pitchFamily="34" charset="-120"/>
               </a:rPr>
               <a:t>عرض ممر لشخص واحد</a:t>
             </a:r>
@@ -22799,6 +23597,9 @@
                 <a:solidFill>
                   <a:srgbClr val="FFFFFF"/>
                 </a:solidFill>
+                <a:latin typeface="Times New Roman" pitchFamily="34" charset="0"/>
+                <a:ea typeface="Times New Roman" pitchFamily="34" charset="-122"/>
+                <a:cs typeface="Times New Roman" pitchFamily="34" charset="-120"/>
               </a:rPr>
               <a:t>120–150 cm</a:t>
             </a:r>
@@ -22835,6 +23636,9 @@
                 <a:solidFill>
                   <a:srgbClr val="B9C4C4"/>
                 </a:solidFill>
+                <a:latin typeface="Times New Roman" pitchFamily="34" charset="0"/>
+                <a:ea typeface="Times New Roman" pitchFamily="34" charset="-122"/>
+                <a:cs typeface="Times New Roman" pitchFamily="34" charset="-120"/>
               </a:rPr>
               <a:t>ممر لشخصين متقابلين</a:t>
             </a:r>
@@ -22871,6 +23675,9 @@
                 <a:solidFill>
                   <a:srgbClr val="FFFFFF"/>
                 </a:solidFill>
+                <a:latin typeface="Times New Roman" pitchFamily="34" charset="0"/>
+                <a:ea typeface="Times New Roman" pitchFamily="34" charset="-122"/>
+                <a:cs typeface="Times New Roman" pitchFamily="34" charset="-120"/>
               </a:rPr>
               <a:t>≈ 155 cm</a:t>
             </a:r>
@@ -22907,6 +23714,9 @@
                 <a:solidFill>
                   <a:srgbClr val="B9C4C4"/>
                 </a:solidFill>
+                <a:latin typeface="Times New Roman" pitchFamily="34" charset="0"/>
+                <a:ea typeface="Times New Roman" pitchFamily="34" charset="-122"/>
+                <a:cs typeface="Times New Roman" pitchFamily="34" charset="-120"/>
               </a:rPr>
               <a:t>مستوى العين (وقوفًا)</a:t>
             </a:r>
@@ -22943,6 +23753,9 @@
                 <a:solidFill>
                   <a:srgbClr val="FFFFFF"/>
                 </a:solidFill>
+                <a:latin typeface="Times New Roman" pitchFamily="34" charset="0"/>
+                <a:ea typeface="Times New Roman" pitchFamily="34" charset="-122"/>
+                <a:cs typeface="Times New Roman" pitchFamily="34" charset="-120"/>
               </a:rPr>
               <a:t>40–45 cm</a:t>
             </a:r>
@@ -22979,6 +23792,9 @@
                 <a:solidFill>
                   <a:srgbClr val="B9C4C4"/>
                 </a:solidFill>
+                <a:latin typeface="Times New Roman" pitchFamily="34" charset="0"/>
+                <a:ea typeface="Times New Roman" pitchFamily="34" charset="-122"/>
+                <a:cs typeface="Times New Roman" pitchFamily="34" charset="-120"/>
               </a:rPr>
               <a:t>ارتفاع مقعد الجلوس</a:t>
             </a:r>
@@ -23015,6 +23831,9 @@
                 <a:solidFill>
                   <a:srgbClr val="FFFFFF"/>
                 </a:solidFill>
+                <a:latin typeface="Times New Roman" pitchFamily="34" charset="0"/>
+                <a:ea typeface="Times New Roman" pitchFamily="34" charset="-122"/>
+                <a:cs typeface="Times New Roman" pitchFamily="34" charset="-120"/>
               </a:rPr>
               <a:t>≈ 75 cm</a:t>
             </a:r>
@@ -23051,6 +23870,9 @@
                 <a:solidFill>
                   <a:srgbClr val="B9C4C4"/>
                 </a:solidFill>
+                <a:latin typeface="Times New Roman" pitchFamily="34" charset="0"/>
+                <a:ea typeface="Times New Roman" pitchFamily="34" charset="-122"/>
+                <a:cs typeface="Times New Roman" pitchFamily="34" charset="-120"/>
               </a:rPr>
               <a:t>ارتفاع طاولة الطعام/المكتب</a:t>
             </a:r>
@@ -23159,6 +23981,9 @@
                 <a:solidFill>
                   <a:schemeClr val="accent1"/>
                 </a:solidFill>
+                <a:latin typeface="Times New Roman" pitchFamily="34" charset="0"/>
+                <a:ea typeface="Times New Roman" pitchFamily="34" charset="-122"/>
+                <a:cs typeface="Times New Roman" pitchFamily="34" charset="-120"/>
               </a:rPr>
               <a:t>15 — A SIMPLE EXAMPLE: LIVING ROOM</a:t>
             </a:r>
@@ -23197,6 +24022,9 @@
                 <a:solidFill>
                   <a:schemeClr val="tx1"/>
                 </a:solidFill>
+                <a:latin typeface="Times New Roman" pitchFamily="34" charset="0"/>
+                <a:ea typeface="Times New Roman" pitchFamily="34" charset="-122"/>
+                <a:cs typeface="Times New Roman" pitchFamily="34" charset="-120"/>
               </a:rPr>
               <a:t>مثال: أين أضع الكنبة؟</a:t>
             </a:r>
@@ -23562,6 +24390,9 @@
                 <a:solidFill>
                   <a:srgbClr val="FFFFFF"/>
                 </a:solidFill>
+                <a:latin typeface="Times New Roman" pitchFamily="34" charset="0"/>
+                <a:ea typeface="Times New Roman" pitchFamily="34" charset="-122"/>
+                <a:cs typeface="Times New Roman" pitchFamily="34" charset="-120"/>
               </a:rPr>
               <a:t>1</a:t>
             </a:r>
@@ -23618,6 +24449,9 @@
                 <a:solidFill>
                   <a:srgbClr val="FFFFFF"/>
                 </a:solidFill>
+                <a:latin typeface="Times New Roman" pitchFamily="34" charset="0"/>
+                <a:ea typeface="Times New Roman" pitchFamily="34" charset="-122"/>
+                <a:cs typeface="Times New Roman" pitchFamily="34" charset="-120"/>
               </a:rPr>
               <a:t>3</a:t>
             </a:r>
@@ -23674,6 +24508,9 @@
                 <a:solidFill>
                   <a:srgbClr val="FFFFFF"/>
                 </a:solidFill>
+                <a:latin typeface="Times New Roman" pitchFamily="34" charset="0"/>
+                <a:ea typeface="Times New Roman" pitchFamily="34" charset="-122"/>
+                <a:cs typeface="Times New Roman" pitchFamily="34" charset="-120"/>
               </a:rPr>
               <a:t>4</a:t>
             </a:r>
@@ -23730,6 +24567,9 @@
                 <a:solidFill>
                   <a:srgbClr val="FFFFFF"/>
                 </a:solidFill>
+                <a:latin typeface="Times New Roman" pitchFamily="34" charset="0"/>
+                <a:ea typeface="Times New Roman" pitchFamily="34" charset="-122"/>
+                <a:cs typeface="Times New Roman" pitchFamily="34" charset="-120"/>
               </a:rPr>
               <a:t>7</a:t>
             </a:r>
@@ -23766,6 +24606,9 @@
                 <a:solidFill>
                   <a:srgbClr val="5B6770"/>
                 </a:solidFill>
+                <a:latin typeface="Times New Roman" pitchFamily="34" charset="0"/>
+                <a:ea typeface="Times New Roman" pitchFamily="34" charset="-122"/>
+                <a:cs typeface="Times New Roman" pitchFamily="34" charset="-120"/>
               </a:rPr>
               <a:t>Living Room — Plan (schematic)</a:t>
             </a:r>
@@ -23802,6 +24645,9 @@
                 <a:solidFill>
                   <a:srgbClr val="1F2224"/>
                 </a:solidFill>
+                <a:latin typeface="Times New Roman" pitchFamily="34" charset="0"/>
+                <a:ea typeface="Times New Roman" pitchFamily="34" charset="-122"/>
+                <a:cs typeface="Times New Roman" pitchFamily="34" charset="-120"/>
               </a:rPr>
               <a:t>هل أضع الكنبة هنا لأنها أجمل؟ </a:t>
             </a:r>
@@ -23813,6 +24659,9 @@
                 <a:solidFill>
                   <a:srgbClr val="C2593A"/>
                 </a:solidFill>
+                <a:latin typeface="Times New Roman" pitchFamily="34" charset="0"/>
+                <a:ea typeface="Times New Roman" pitchFamily="34" charset="-122"/>
+                <a:cs typeface="Times New Roman" pitchFamily="34" charset="-120"/>
               </a:rPr>
               <a:t>لا</a:t>
             </a:r>
@@ -23849,6 +24698,9 @@
                 <a:solidFill>
                   <a:srgbClr val="3A4146"/>
                 </a:solidFill>
+                <a:latin typeface="Times New Roman" pitchFamily="34" charset="0"/>
+                <a:ea typeface="Times New Roman" pitchFamily="34" charset="-122"/>
+                <a:cs typeface="Times New Roman" pitchFamily="34" charset="-120"/>
               </a:rPr>
               <a:t>أسأل أولًا:</a:t>
             </a:r>
@@ -23905,6 +24757,9 @@
                 <a:solidFill>
                   <a:srgbClr val="FFFFFF"/>
                 </a:solidFill>
+                <a:latin typeface="Times New Roman" pitchFamily="34" charset="0"/>
+                <a:ea typeface="Times New Roman" pitchFamily="34" charset="-122"/>
+                <a:cs typeface="Times New Roman" pitchFamily="34" charset="-120"/>
               </a:rPr>
               <a:t>1</a:t>
             </a:r>
@@ -23941,6 +24796,9 @@
                 <a:solidFill>
                   <a:srgbClr val="1F2224"/>
                 </a:solidFill>
+                <a:latin typeface="Times New Roman" pitchFamily="34" charset="0"/>
+                <a:ea typeface="Times New Roman" pitchFamily="34" charset="-122"/>
+                <a:cs typeface="Times New Roman" pitchFamily="34" charset="-120"/>
               </a:rPr>
               <a:t>أين المدخل؟</a:t>
             </a:r>
@@ -23997,6 +24855,9 @@
                 <a:solidFill>
                   <a:srgbClr val="FFFFFF"/>
                 </a:solidFill>
+                <a:latin typeface="Times New Roman" pitchFamily="34" charset="0"/>
+                <a:ea typeface="Times New Roman" pitchFamily="34" charset="-122"/>
+                <a:cs typeface="Times New Roman" pitchFamily="34" charset="-120"/>
               </a:rPr>
               <a:t>2</a:t>
             </a:r>
@@ -24033,6 +24894,9 @@
                 <a:solidFill>
                   <a:srgbClr val="1F2224"/>
                 </a:solidFill>
+                <a:latin typeface="Times New Roman" pitchFamily="34" charset="0"/>
+                <a:ea typeface="Times New Roman" pitchFamily="34" charset="-122"/>
+                <a:cs typeface="Times New Roman" pitchFamily="34" charset="-120"/>
               </a:rPr>
               <a:t>كيف يدخل المستخدم؟</a:t>
             </a:r>
@@ -24089,6 +24953,9 @@
                 <a:solidFill>
                   <a:srgbClr val="FFFFFF"/>
                 </a:solidFill>
+                <a:latin typeface="Times New Roman" pitchFamily="34" charset="0"/>
+                <a:ea typeface="Times New Roman" pitchFamily="34" charset="-122"/>
+                <a:cs typeface="Times New Roman" pitchFamily="34" charset="-120"/>
               </a:rPr>
               <a:t>3</a:t>
             </a:r>
@@ -24125,6 +24992,9 @@
                 <a:solidFill>
                   <a:srgbClr val="1F2224"/>
                 </a:solidFill>
+                <a:latin typeface="Times New Roman" pitchFamily="34" charset="0"/>
+                <a:ea typeface="Times New Roman" pitchFamily="34" charset="-122"/>
+                <a:cs typeface="Times New Roman" pitchFamily="34" charset="-120"/>
               </a:rPr>
               <a:t>أين مسار الحركة؟</a:t>
             </a:r>
@@ -24181,6 +25051,9 @@
                 <a:solidFill>
                   <a:srgbClr val="FFFFFF"/>
                 </a:solidFill>
+                <a:latin typeface="Times New Roman" pitchFamily="34" charset="0"/>
+                <a:ea typeface="Times New Roman" pitchFamily="34" charset="-122"/>
+                <a:cs typeface="Times New Roman" pitchFamily="34" charset="-120"/>
               </a:rPr>
               <a:t>4</a:t>
             </a:r>
@@ -24217,6 +25090,9 @@
                 <a:solidFill>
                   <a:srgbClr val="1F2224"/>
                 </a:solidFill>
+                <a:latin typeface="Times New Roman" pitchFamily="34" charset="0"/>
+                <a:ea typeface="Times New Roman" pitchFamily="34" charset="-122"/>
+                <a:cs typeface="Times New Roman" pitchFamily="34" charset="-120"/>
               </a:rPr>
               <a:t>أين التلفزيون؟ أين نقطة التركيز؟</a:t>
             </a:r>
@@ -24273,6 +25149,9 @@
                 <a:solidFill>
                   <a:srgbClr val="FFFFFF"/>
                 </a:solidFill>
+                <a:latin typeface="Times New Roman" pitchFamily="34" charset="0"/>
+                <a:ea typeface="Times New Roman" pitchFamily="34" charset="-122"/>
+                <a:cs typeface="Times New Roman" pitchFamily="34" charset="-120"/>
               </a:rPr>
               <a:t>5</a:t>
             </a:r>
@@ -24309,6 +25188,9 @@
                 <a:solidFill>
                   <a:srgbClr val="1F2224"/>
                 </a:solidFill>
+                <a:latin typeface="Times New Roman" pitchFamily="34" charset="0"/>
+                <a:ea typeface="Times New Roman" pitchFamily="34" charset="-122"/>
+                <a:cs typeface="Times New Roman" pitchFamily="34" charset="-120"/>
               </a:rPr>
               <a:t>هل هناك مساحة كافية للحركة؟</a:t>
             </a:r>
@@ -24365,6 +25247,9 @@
                 <a:solidFill>
                   <a:srgbClr val="FFFFFF"/>
                 </a:solidFill>
+                <a:latin typeface="Times New Roman" pitchFamily="34" charset="0"/>
+                <a:ea typeface="Times New Roman" pitchFamily="34" charset="-122"/>
+                <a:cs typeface="Times New Roman" pitchFamily="34" charset="-120"/>
               </a:rPr>
               <a:t>6</a:t>
             </a:r>
@@ -24401,6 +25286,9 @@
                 <a:solidFill>
                   <a:srgbClr val="1F2224"/>
                 </a:solidFill>
+                <a:latin typeface="Times New Roman" pitchFamily="34" charset="0"/>
+                <a:ea typeface="Times New Roman" pitchFamily="34" charset="-122"/>
+                <a:cs typeface="Times New Roman" pitchFamily="34" charset="-120"/>
               </a:rPr>
               <a:t>هل الأثاث مناسب للمقياس؟</a:t>
             </a:r>
@@ -24457,6 +25345,9 @@
                 <a:solidFill>
                   <a:srgbClr val="FFFFFF"/>
                 </a:solidFill>
+                <a:latin typeface="Times New Roman" pitchFamily="34" charset="0"/>
+                <a:ea typeface="Times New Roman" pitchFamily="34" charset="-122"/>
+                <a:cs typeface="Times New Roman" pitchFamily="34" charset="-120"/>
               </a:rPr>
               <a:t>7</a:t>
             </a:r>
@@ -24493,6 +25384,9 @@
                 <a:solidFill>
                   <a:srgbClr val="1F2224"/>
                 </a:solidFill>
+                <a:latin typeface="Times New Roman" pitchFamily="34" charset="0"/>
+                <a:ea typeface="Times New Roman" pitchFamily="34" charset="-122"/>
+                <a:cs typeface="Times New Roman" pitchFamily="34" charset="-120"/>
               </a:rPr>
               <a:t>هل هناك علاقة جيدة مع النافذة؟</a:t>
             </a:r>
@@ -24549,6 +25443,9 @@
                 <a:solidFill>
                   <a:srgbClr val="2F6B6A"/>
                 </a:solidFill>
+                <a:latin typeface="Times New Roman" pitchFamily="34" charset="0"/>
+                <a:ea typeface="Times New Roman" pitchFamily="34" charset="-122"/>
+                <a:cs typeface="Times New Roman" pitchFamily="34" charset="-120"/>
               </a:rPr>
               <a:t>ثم يأتي الشكل والجمال.</a:t>
             </a:r>
@@ -24655,6 +25552,9 @@
                 <a:solidFill>
                   <a:srgbClr val="C2593A"/>
                 </a:solidFill>
+                <a:latin typeface="Times New Roman" pitchFamily="34" charset="0"/>
+                <a:ea typeface="Times New Roman" pitchFamily="34" charset="-122"/>
+                <a:cs typeface="Times New Roman" pitchFamily="34" charset="-120"/>
               </a:rPr>
               <a:t>16 — THE FUNDAMENTAL IDEA</a:t>
             </a:r>
@@ -24691,6 +25591,9 @@
                 <a:solidFill>
                   <a:srgbClr val="FFFFFF"/>
                 </a:solidFill>
+                <a:latin typeface="Times New Roman" pitchFamily="34" charset="0"/>
+                <a:ea typeface="Times New Roman" pitchFamily="34" charset="-122"/>
+                <a:cs typeface="Times New Roman" pitchFamily="34" charset="-120"/>
               </a:rPr>
               <a:t>العقلية التي نبدأ بها المادة</a:t>
             </a:r>
@@ -24747,6 +25650,9 @@
                 <a:solidFill>
                   <a:srgbClr val="1F2224"/>
                 </a:solidFill>
+                <a:latin typeface="Times New Roman" pitchFamily="34" charset="0"/>
+                <a:ea typeface="Times New Roman" pitchFamily="34" charset="-122"/>
+                <a:cs typeface="Times New Roman" pitchFamily="34" charset="-120"/>
               </a:rPr>
               <a:t>1</a:t>
             </a:r>
@@ -24783,6 +25689,9 @@
                 <a:solidFill>
                   <a:srgbClr val="C2593A"/>
                 </a:solidFill>
+                <a:latin typeface="Times New Roman" pitchFamily="34" charset="0"/>
+                <a:ea typeface="Times New Roman" pitchFamily="34" charset="-122"/>
+                <a:cs typeface="Times New Roman" pitchFamily="34" charset="-120"/>
               </a:rPr>
               <a:t>FUNCTION</a:t>
             </a:r>
@@ -24819,6 +25728,9 @@
                 <a:solidFill>
                   <a:srgbClr val="FFFFFF"/>
                 </a:solidFill>
+                <a:latin typeface="Times New Roman" pitchFamily="34" charset="0"/>
+                <a:ea typeface="Times New Roman" pitchFamily="34" charset="-122"/>
+                <a:cs typeface="Times New Roman" pitchFamily="34" charset="-120"/>
               </a:rPr>
               <a:t>ماذا يحدث؟</a:t>
             </a:r>
@@ -24899,6 +25811,9 @@
                 <a:solidFill>
                   <a:srgbClr val="1F2224"/>
                 </a:solidFill>
+                <a:latin typeface="Times New Roman" pitchFamily="34" charset="0"/>
+                <a:ea typeface="Times New Roman" pitchFamily="34" charset="-122"/>
+                <a:cs typeface="Times New Roman" pitchFamily="34" charset="-120"/>
               </a:rPr>
               <a:t>2</a:t>
             </a:r>
@@ -24935,6 +25850,9 @@
                 <a:solidFill>
                   <a:srgbClr val="2F6B6A"/>
                 </a:solidFill>
+                <a:latin typeface="Times New Roman" pitchFamily="34" charset="0"/>
+                <a:ea typeface="Times New Roman" pitchFamily="34" charset="-122"/>
+                <a:cs typeface="Times New Roman" pitchFamily="34" charset="-120"/>
               </a:rPr>
               <a:t>SPACE</a:t>
             </a:r>
@@ -24971,6 +25889,9 @@
                 <a:solidFill>
                   <a:srgbClr val="FFFFFF"/>
                 </a:solidFill>
+                <a:latin typeface="Times New Roman" pitchFamily="34" charset="0"/>
+                <a:ea typeface="Times New Roman" pitchFamily="34" charset="-122"/>
+                <a:cs typeface="Times New Roman" pitchFamily="34" charset="-120"/>
               </a:rPr>
               <a:t>كيف ننظم الفراغ؟</a:t>
             </a:r>
@@ -25051,6 +25972,9 @@
                 <a:solidFill>
                   <a:srgbClr val="1F2224"/>
                 </a:solidFill>
+                <a:latin typeface="Times New Roman" pitchFamily="34" charset="0"/>
+                <a:ea typeface="Times New Roman" pitchFamily="34" charset="-122"/>
+                <a:cs typeface="Times New Roman" pitchFamily="34" charset="-120"/>
               </a:rPr>
               <a:t>3</a:t>
             </a:r>
@@ -25087,6 +26011,9 @@
                 <a:solidFill>
                   <a:srgbClr val="D9A441"/>
                 </a:solidFill>
+                <a:latin typeface="Times New Roman" pitchFamily="34" charset="0"/>
+                <a:ea typeface="Times New Roman" pitchFamily="34" charset="-122"/>
+                <a:cs typeface="Times New Roman" pitchFamily="34" charset="-120"/>
               </a:rPr>
               <a:t>EXPERIENCE</a:t>
             </a:r>
@@ -25123,6 +26050,9 @@
                 <a:solidFill>
                   <a:srgbClr val="FFFFFF"/>
                 </a:solidFill>
+                <a:latin typeface="Times New Roman" pitchFamily="34" charset="0"/>
+                <a:ea typeface="Times New Roman" pitchFamily="34" charset="-122"/>
+                <a:cs typeface="Times New Roman" pitchFamily="34" charset="-120"/>
               </a:rPr>
               <a:t>كيف سيشعر ويتحرك المستخدم؟</a:t>
             </a:r>
@@ -25203,6 +26133,9 @@
                 <a:solidFill>
                   <a:srgbClr val="1F2224"/>
                 </a:solidFill>
+                <a:latin typeface="Times New Roman" pitchFamily="34" charset="0"/>
+                <a:ea typeface="Times New Roman" pitchFamily="34" charset="-122"/>
+                <a:cs typeface="Times New Roman" pitchFamily="34" charset="-120"/>
               </a:rPr>
               <a:t>4</a:t>
             </a:r>
@@ -25239,6 +26172,9 @@
                 <a:solidFill>
                   <a:srgbClr val="B9C4C4"/>
                 </a:solidFill>
+                <a:latin typeface="Times New Roman" pitchFamily="34" charset="0"/>
+                <a:ea typeface="Times New Roman" pitchFamily="34" charset="-122"/>
+                <a:cs typeface="Times New Roman" pitchFamily="34" charset="-120"/>
               </a:rPr>
               <a:t>FORM</a:t>
             </a:r>
@@ -25275,6 +26211,9 @@
                 <a:solidFill>
                   <a:srgbClr val="FFFFFF"/>
                 </a:solidFill>
+                <a:latin typeface="Times New Roman" pitchFamily="34" charset="0"/>
+                <a:ea typeface="Times New Roman" pitchFamily="34" charset="-122"/>
+                <a:cs typeface="Times New Roman" pitchFamily="34" charset="-120"/>
               </a:rPr>
               <a:t>كيف سيظهر الفراغ؟</a:t>
             </a:r>
@@ -25334,6 +26273,9 @@
                 <a:solidFill>
                   <a:srgbClr val="FFFFFF"/>
                 </a:solidFill>
+                <a:latin typeface="Times New Roman" pitchFamily="34" charset="0"/>
+                <a:ea typeface="Times New Roman" pitchFamily="34" charset="-122"/>
+                <a:cs typeface="Times New Roman" pitchFamily="34" charset="-120"/>
               </a:rPr>
               <a:t>الشكل نتيجة، وليس نقطة البداية.</a:t>
             </a:r>
@@ -25370,6 +26312,9 @@
                 <a:solidFill>
                   <a:srgbClr val="8A9A9B"/>
                 </a:solidFill>
+                <a:latin typeface="Times New Roman" pitchFamily="34" charset="0"/>
+                <a:ea typeface="Times New Roman" pitchFamily="34" charset="-122"/>
+                <a:cs typeface="Times New Roman" pitchFamily="34" charset="-120"/>
               </a:rPr>
               <a:t>Form follows the function, the space and the experience.</a:t>
             </a:r>
@@ -25478,6 +26423,9 @@
                 <a:solidFill>
                   <a:schemeClr val="accent1"/>
                 </a:solidFill>
+                <a:latin typeface="Times New Roman" pitchFamily="34" charset="0"/>
+                <a:ea typeface="Times New Roman" pitchFamily="34" charset="-122"/>
+                <a:cs typeface="Times New Roman" pitchFamily="34" charset="-120"/>
               </a:rPr>
               <a:t>17 — EXERCISE 01: READ A SPACE</a:t>
             </a:r>
@@ -25516,6 +26464,9 @@
                 <a:solidFill>
                   <a:schemeClr val="tx1"/>
                 </a:solidFill>
+                <a:latin typeface="Times New Roman" pitchFamily="34" charset="0"/>
+                <a:ea typeface="Times New Roman" pitchFamily="34" charset="-122"/>
+                <a:cs typeface="Times New Roman" pitchFamily="34" charset="-120"/>
               </a:rPr>
               <a:t>تمرين المحاضرة الأولى: اقرأ فراغًا</a:t>
             </a:r>
@@ -25552,6 +26503,9 @@
                 <a:solidFill>
                   <a:srgbClr val="3A4146"/>
                 </a:solidFill>
+                <a:latin typeface="Times New Roman" pitchFamily="34" charset="0"/>
+                <a:ea typeface="Times New Roman" pitchFamily="34" charset="-122"/>
+                <a:cs typeface="Times New Roman" pitchFamily="34" charset="-120"/>
               </a:rPr>
               <a:t>كل طالب يختار غرفة واحدة ويعمل تحليلًا بسيطًا لها:</a:t>
             </a:r>
@@ -25615,6 +26569,9 @@
                 <a:solidFill>
                   <a:srgbClr val="2F6B6A"/>
                 </a:solidFill>
+                <a:latin typeface="Times New Roman" pitchFamily="34" charset="0"/>
+                <a:ea typeface="Times New Roman" pitchFamily="34" charset="-122"/>
+                <a:cs typeface="Times New Roman" pitchFamily="34" charset="-120"/>
               </a:rPr>
               <a:t>Bedroom</a:t>
             </a:r>
@@ -25678,6 +26635,9 @@
                 <a:solidFill>
                   <a:srgbClr val="2F6B6A"/>
                 </a:solidFill>
+                <a:latin typeface="Times New Roman" pitchFamily="34" charset="0"/>
+                <a:ea typeface="Times New Roman" pitchFamily="34" charset="-122"/>
+                <a:cs typeface="Times New Roman" pitchFamily="34" charset="-120"/>
               </a:rPr>
               <a:t>Living Room</a:t>
             </a:r>
@@ -25741,6 +26701,9 @@
                 <a:solidFill>
                   <a:srgbClr val="2F6B6A"/>
                 </a:solidFill>
+                <a:latin typeface="Times New Roman" pitchFamily="34" charset="0"/>
+                <a:ea typeface="Times New Roman" pitchFamily="34" charset="-122"/>
+                <a:cs typeface="Times New Roman" pitchFamily="34" charset="-120"/>
               </a:rPr>
               <a:t>Classroom</a:t>
             </a:r>
@@ -25804,6 +26767,9 @@
                 <a:solidFill>
                   <a:srgbClr val="2F6B6A"/>
                 </a:solidFill>
+                <a:latin typeface="Times New Roman" pitchFamily="34" charset="0"/>
+                <a:ea typeface="Times New Roman" pitchFamily="34" charset="-122"/>
+                <a:cs typeface="Times New Roman" pitchFamily="34" charset="-120"/>
               </a:rPr>
               <a:t>Office</a:t>
             </a:r>
@@ -25869,6 +26835,9 @@
                 <a:solidFill>
                   <a:srgbClr val="C2593A"/>
                 </a:solidFill>
+                <a:latin typeface="Times New Roman" pitchFamily="34" charset="0"/>
+                <a:ea typeface="Times New Roman" pitchFamily="34" charset="-122"/>
+                <a:cs typeface="Times New Roman" pitchFamily="34" charset="-120"/>
               </a:rPr>
               <a:t>01</a:t>
             </a:r>
@@ -25905,6 +26874,9 @@
                 <a:solidFill>
                   <a:srgbClr val="1F2224"/>
                 </a:solidFill>
+                <a:latin typeface="Times New Roman" pitchFamily="34" charset="0"/>
+                <a:ea typeface="Times New Roman" pitchFamily="34" charset="-122"/>
+                <a:cs typeface="Times New Roman" pitchFamily="34" charset="-120"/>
               </a:rPr>
               <a:t>Base Plane</a:t>
             </a:r>
@@ -25941,6 +26913,9 @@
                 <a:solidFill>
                   <a:srgbClr val="3A4146"/>
                 </a:solidFill>
+                <a:latin typeface="Times New Roman" pitchFamily="34" charset="0"/>
+                <a:ea typeface="Times New Roman" pitchFamily="34" charset="-122"/>
+                <a:cs typeface="Times New Roman" pitchFamily="34" charset="-120"/>
               </a:rPr>
               <a:t>حدّد الأرضية</a:t>
             </a:r>
@@ -26006,6 +26981,9 @@
                 <a:solidFill>
                   <a:srgbClr val="C2593A"/>
                 </a:solidFill>
+                <a:latin typeface="Times New Roman" pitchFamily="34" charset="0"/>
+                <a:ea typeface="Times New Roman" pitchFamily="34" charset="-122"/>
+                <a:cs typeface="Times New Roman" pitchFamily="34" charset="-120"/>
               </a:rPr>
               <a:t>02</a:t>
             </a:r>
@@ -26042,6 +27020,9 @@
                 <a:solidFill>
                   <a:srgbClr val="1F2224"/>
                 </a:solidFill>
+                <a:latin typeface="Times New Roman" pitchFamily="34" charset="0"/>
+                <a:ea typeface="Times New Roman" pitchFamily="34" charset="-122"/>
+                <a:cs typeface="Times New Roman" pitchFamily="34" charset="-120"/>
               </a:rPr>
               <a:t>Vertical Planes</a:t>
             </a:r>
@@ -26078,6 +27059,9 @@
                 <a:solidFill>
                   <a:srgbClr val="3A4146"/>
                 </a:solidFill>
+                <a:latin typeface="Times New Roman" pitchFamily="34" charset="0"/>
+                <a:ea typeface="Times New Roman" pitchFamily="34" charset="-122"/>
+                <a:cs typeface="Times New Roman" pitchFamily="34" charset="-120"/>
               </a:rPr>
               <a:t>حدّد الجدران</a:t>
             </a:r>
@@ -26143,6 +27127,9 @@
                 <a:solidFill>
                   <a:srgbClr val="C2593A"/>
                 </a:solidFill>
+                <a:latin typeface="Times New Roman" pitchFamily="34" charset="0"/>
+                <a:ea typeface="Times New Roman" pitchFamily="34" charset="-122"/>
+                <a:cs typeface="Times New Roman" pitchFamily="34" charset="-120"/>
               </a:rPr>
               <a:t>03</a:t>
             </a:r>
@@ -26179,6 +27166,9 @@
                 <a:solidFill>
                   <a:srgbClr val="1F2224"/>
                 </a:solidFill>
+                <a:latin typeface="Times New Roman" pitchFamily="34" charset="0"/>
+                <a:ea typeface="Times New Roman" pitchFamily="34" charset="-122"/>
+                <a:cs typeface="Times New Roman" pitchFamily="34" charset="-120"/>
               </a:rPr>
               <a:t>Overhead Plane</a:t>
             </a:r>
@@ -26215,6 +27205,9 @@
                 <a:solidFill>
                   <a:srgbClr val="3A4146"/>
                 </a:solidFill>
+                <a:latin typeface="Times New Roman" pitchFamily="34" charset="0"/>
+                <a:ea typeface="Times New Roman" pitchFamily="34" charset="-122"/>
+                <a:cs typeface="Times New Roman" pitchFamily="34" charset="-120"/>
               </a:rPr>
               <a:t>حدّد السقف</a:t>
             </a:r>
@@ -26280,6 +27273,9 @@
                 <a:solidFill>
                   <a:srgbClr val="C2593A"/>
                 </a:solidFill>
+                <a:latin typeface="Times New Roman" pitchFamily="34" charset="0"/>
+                <a:ea typeface="Times New Roman" pitchFamily="34" charset="-122"/>
+                <a:cs typeface="Times New Roman" pitchFamily="34" charset="-120"/>
               </a:rPr>
               <a:t>04</a:t>
             </a:r>
@@ -26316,6 +27312,9 @@
                 <a:solidFill>
                   <a:srgbClr val="1F2224"/>
                 </a:solidFill>
+                <a:latin typeface="Times New Roman" pitchFamily="34" charset="0"/>
+                <a:ea typeface="Times New Roman" pitchFamily="34" charset="-122"/>
+                <a:cs typeface="Times New Roman" pitchFamily="34" charset="-120"/>
               </a:rPr>
               <a:t>Openings</a:t>
             </a:r>
@@ -26352,6 +27351,9 @@
                 <a:solidFill>
                   <a:srgbClr val="3A4146"/>
                 </a:solidFill>
+                <a:latin typeface="Times New Roman" pitchFamily="34" charset="0"/>
+                <a:ea typeface="Times New Roman" pitchFamily="34" charset="-122"/>
+                <a:cs typeface="Times New Roman" pitchFamily="34" charset="-120"/>
               </a:rPr>
               <a:t>حدّد الفتحات</a:t>
             </a:r>
@@ -26417,6 +27419,9 @@
                 <a:solidFill>
                   <a:srgbClr val="C2593A"/>
                 </a:solidFill>
+                <a:latin typeface="Times New Roman" pitchFamily="34" charset="0"/>
+                <a:ea typeface="Times New Roman" pitchFamily="34" charset="-122"/>
+                <a:cs typeface="Times New Roman" pitchFamily="34" charset="-120"/>
               </a:rPr>
               <a:t>05</a:t>
             </a:r>
@@ -26453,6 +27458,9 @@
                 <a:solidFill>
                   <a:srgbClr val="1F2224"/>
                 </a:solidFill>
+                <a:latin typeface="Times New Roman" pitchFamily="34" charset="0"/>
+                <a:ea typeface="Times New Roman" pitchFamily="34" charset="-122"/>
+                <a:cs typeface="Times New Roman" pitchFamily="34" charset="-120"/>
               </a:rPr>
               <a:t>Circulation</a:t>
             </a:r>
@@ -26489,6 +27497,9 @@
                 <a:solidFill>
                   <a:srgbClr val="3A4146"/>
                 </a:solidFill>
+                <a:latin typeface="Times New Roman" pitchFamily="34" charset="0"/>
+                <a:ea typeface="Times New Roman" pitchFamily="34" charset="-122"/>
+                <a:cs typeface="Times New Roman" pitchFamily="34" charset="-120"/>
               </a:rPr>
               <a:t>حدّد مسار الحركة</a:t>
             </a:r>
@@ -26554,6 +27565,9 @@
                 <a:solidFill>
                   <a:srgbClr val="C2593A"/>
                 </a:solidFill>
+                <a:latin typeface="Times New Roman" pitchFamily="34" charset="0"/>
+                <a:ea typeface="Times New Roman" pitchFamily="34" charset="-122"/>
+                <a:cs typeface="Times New Roman" pitchFamily="34" charset="-120"/>
               </a:rPr>
               <a:t>06</a:t>
             </a:r>
@@ -26590,6 +27604,9 @@
                 <a:solidFill>
                   <a:srgbClr val="1F2224"/>
                 </a:solidFill>
+                <a:latin typeface="Times New Roman" pitchFamily="34" charset="0"/>
+                <a:ea typeface="Times New Roman" pitchFamily="34" charset="-122"/>
+                <a:cs typeface="Times New Roman" pitchFamily="34" charset="-120"/>
               </a:rPr>
               <a:t>Function</a:t>
             </a:r>
@@ -26626,6 +27643,9 @@
                 <a:solidFill>
                   <a:srgbClr val="3A4146"/>
                 </a:solidFill>
+                <a:latin typeface="Times New Roman" pitchFamily="34" charset="0"/>
+                <a:ea typeface="Times New Roman" pitchFamily="34" charset="-122"/>
+                <a:cs typeface="Times New Roman" pitchFamily="34" charset="-120"/>
               </a:rPr>
               <a:t>حدّد الوظيفة</a:t>
             </a:r>
@@ -26682,6 +27702,9 @@
                 <a:solidFill>
                   <a:srgbClr val="B9C4C4"/>
                 </a:solidFill>
+                <a:latin typeface="Times New Roman" pitchFamily="34" charset="0"/>
+                <a:ea typeface="Times New Roman" pitchFamily="34" charset="-122"/>
+                <a:cs typeface="Times New Roman" pitchFamily="34" charset="-120"/>
               </a:rPr>
               <a:t>ثم يكتب سؤالًا واحدًا:</a:t>
             </a:r>
@@ -26718,6 +27741,9 @@
                 <a:solidFill>
                   <a:srgbClr val="FFFFFF"/>
                 </a:solidFill>
+                <a:latin typeface="Times New Roman" pitchFamily="34" charset="0"/>
+                <a:ea typeface="Times New Roman" pitchFamily="34" charset="-122"/>
+                <a:cs typeface="Times New Roman" pitchFamily="34" charset="-120"/>
               </a:rPr>
               <a:t>What makes this space work?</a:t>
             </a:r>
@@ -26754,6 +27780,9 @@
                 <a:solidFill>
                   <a:srgbClr val="D9A441"/>
                 </a:solidFill>
+                <a:latin typeface="Times New Roman" pitchFamily="34" charset="0"/>
+                <a:ea typeface="Times New Roman" pitchFamily="34" charset="-122"/>
+                <a:cs typeface="Times New Roman" pitchFamily="34" charset="-120"/>
               </a:rPr>
               <a:t>ما الذي يجعل هذا الفراغ يعمل؟</a:t>
             </a:r>
@@ -26819,6 +27848,9 @@
                 <a:solidFill>
                   <a:srgbClr val="C2593A"/>
                 </a:solidFill>
+                <a:latin typeface="Times New Roman" pitchFamily="34" charset="0"/>
+                <a:ea typeface="Times New Roman" pitchFamily="34" charset="-122"/>
+                <a:cs typeface="Times New Roman" pitchFamily="34" charset="-120"/>
               </a:rPr>
               <a:t>المُخرَج المقترح</a:t>
             </a:r>
@@ -26859,6 +27891,9 @@
                 <a:solidFill>
                   <a:srgbClr val="1F2224"/>
                 </a:solidFill>
+                <a:latin typeface="Times New Roman" pitchFamily="34" charset="0"/>
+                <a:ea typeface="Times New Roman" pitchFamily="34" charset="-122"/>
+                <a:cs typeface="Times New Roman" pitchFamily="34" charset="-120"/>
               </a:rPr>
               <a:t>لوحة A3 واحدة</a:t>
             </a:r>
@@ -26877,6 +27912,9 @@
                 <a:solidFill>
                   <a:srgbClr val="1F2224"/>
                 </a:solidFill>
+                <a:latin typeface="Times New Roman" pitchFamily="34" charset="0"/>
+                <a:ea typeface="Times New Roman" pitchFamily="34" charset="-122"/>
+                <a:cs typeface="Times New Roman" pitchFamily="34" charset="-120"/>
               </a:rPr>
               <a:t>مخطط يدوي مع صورة أو اسكتش</a:t>
             </a:r>
@@ -26895,6 +27933,9 @@
                 <a:solidFill>
                   <a:srgbClr val="1F2224"/>
                 </a:solidFill>
+                <a:latin typeface="Times New Roman" pitchFamily="34" charset="0"/>
+                <a:ea typeface="Times New Roman" pitchFamily="34" charset="-122"/>
+                <a:cs typeface="Times New Roman" pitchFamily="34" charset="-120"/>
               </a:rPr>
               <a:t>ترميز لوني للمستويات والفتحات والحركة</a:t>
             </a:r>
@@ -26913,6 +27954,9 @@
                 <a:solidFill>
                   <a:srgbClr val="1F2224"/>
                 </a:solidFill>
+                <a:latin typeface="Times New Roman" pitchFamily="34" charset="0"/>
+                <a:ea typeface="Times New Roman" pitchFamily="34" charset="-122"/>
+                <a:cs typeface="Times New Roman" pitchFamily="34" charset="-120"/>
               </a:rPr>
               <a:t>فقرة قصيرة تجيب عن السؤال</a:t>
             </a:r>
@@ -27021,6 +28065,9 @@
                 <a:solidFill>
                   <a:schemeClr val="accent1"/>
                 </a:solidFill>
+                <a:latin typeface="Times New Roman" pitchFamily="34" charset="0"/>
+                <a:ea typeface="Times New Roman" pitchFamily="34" charset="-122"/>
+                <a:cs typeface="Times New Roman" pitchFamily="34" charset="-120"/>
               </a:rPr>
               <a:t>KEY TAKEAWAYS</a:t>
             </a:r>
@@ -27059,6 +28106,9 @@
                 <a:solidFill>
                   <a:schemeClr val="tx1"/>
                 </a:solidFill>
+                <a:latin typeface="Times New Roman" pitchFamily="34" charset="0"/>
+                <a:ea typeface="Times New Roman" pitchFamily="34" charset="-122"/>
+                <a:cs typeface="Times New Roman" pitchFamily="34" charset="-120"/>
               </a:rPr>
               <a:t>خلاصة المحاضرة</a:t>
             </a:r>
@@ -27168,6 +28218,9 @@
                 <a:solidFill>
                   <a:srgbClr val="1F2224"/>
                 </a:solidFill>
+                <a:latin typeface="Times New Roman" pitchFamily="34" charset="0"/>
+                <a:ea typeface="Times New Roman" pitchFamily="34" charset="-122"/>
+                <a:cs typeface="Times New Roman" pitchFamily="34" charset="-120"/>
               </a:rPr>
               <a:t>التصميم عملية اتخاذ قرارات منظمة، وليس رسم شكل جميل.</a:t>
             </a:r>
@@ -27277,6 +28330,9 @@
                 <a:solidFill>
                   <a:srgbClr val="1F2224"/>
                 </a:solidFill>
+                <a:latin typeface="Times New Roman" pitchFamily="34" charset="0"/>
+                <a:ea typeface="Times New Roman" pitchFamily="34" charset="-122"/>
+                <a:cs typeface="Times New Roman" pitchFamily="34" charset="-120"/>
               </a:rPr>
               <a:t>التصميم الداخلي = إنسان + وظيفة + فراغ + تجربة</a:t>
             </a:r>
@@ -27386,6 +28442,9 @@
                 <a:solidFill>
                   <a:srgbClr val="1F2224"/>
                 </a:solidFill>
+                <a:latin typeface="Times New Roman" pitchFamily="34" charset="0"/>
+                <a:ea typeface="Times New Roman" pitchFamily="34" charset="-122"/>
+                <a:cs typeface="Times New Roman" pitchFamily="34" charset="-120"/>
               </a:rPr>
               <a:t>الديكور يغيّر المظهر؛ التصميم الداخلي يشكّل الفراغ والتجربة.</a:t>
             </a:r>
@@ -27495,6 +28554,9 @@
                 <a:solidFill>
                   <a:srgbClr val="1F2224"/>
                 </a:solidFill>
+                <a:latin typeface="Times New Roman" pitchFamily="34" charset="0"/>
+                <a:ea typeface="Times New Roman" pitchFamily="34" charset="-122"/>
+                <a:cs typeface="Times New Roman" pitchFamily="34" charset="-120"/>
               </a:rPr>
               <a:t>نحن نصمم الفراغ، والفراغ يتحدد بما يحدث داخله.</a:t>
             </a:r>
@@ -27604,6 +28666,9 @@
                 <a:solidFill>
                   <a:srgbClr val="1F2224"/>
                 </a:solidFill>
+                <a:latin typeface="Times New Roman" pitchFamily="34" charset="0"/>
+                <a:ea typeface="Times New Roman" pitchFamily="34" charset="-122"/>
+                <a:cs typeface="Times New Roman" pitchFamily="34" charset="-120"/>
               </a:rPr>
               <a:t>الأرضية والجدار والسقف والفتحات أدوات لتشكيل الفراغ.</a:t>
             </a:r>
@@ -27713,6 +28778,9 @@
                 <a:solidFill>
                   <a:srgbClr val="1F2224"/>
                 </a:solidFill>
+                <a:latin typeface="Times New Roman" pitchFamily="34" charset="0"/>
+                <a:ea typeface="Times New Roman" pitchFamily="34" charset="-122"/>
+                <a:cs typeface="Times New Roman" pitchFamily="34" charset="-120"/>
               </a:rPr>
               <a:t>الوظيفة ← الفراغ ← التجربة ← الشكل</a:t>
             </a:r>
@@ -27843,6 +28911,9 @@
                 <a:solidFill>
                   <a:srgbClr val="FFFFFF"/>
                 </a:solidFill>
+                <a:latin typeface="Times New Roman" pitchFamily="34" charset="0"/>
+                <a:ea typeface="Times New Roman" pitchFamily="34" charset="-122"/>
+                <a:cs typeface="Times New Roman" pitchFamily="34" charset="-120"/>
               </a:rPr>
               <a:t>«قبل أن نتعلم كيف نجمّل الفراغ، يجب أن نتعلم كيف نفهمه.»</a:t>
             </a:r>
@@ -27879,6 +28950,9 @@
                 <a:solidFill>
                   <a:srgbClr val="8A9A9B"/>
                 </a:solidFill>
+                <a:latin typeface="Times New Roman" pitchFamily="34" charset="0"/>
+                <a:ea typeface="Times New Roman" pitchFamily="34" charset="-122"/>
+                <a:cs typeface="Times New Roman" pitchFamily="34" charset="-120"/>
               </a:rPr>
               <a:t>Before we learn how to beautify a space, we must learn how to understand it.</a:t>
             </a:r>
@@ -27937,6 +29011,9 @@
                 <a:solidFill>
                   <a:srgbClr val="D9A441"/>
                 </a:solidFill>
+                <a:latin typeface="Times New Roman" pitchFamily="34" charset="0"/>
+                <a:ea typeface="Times New Roman" pitchFamily="34" charset="-122"/>
+                <a:cs typeface="Times New Roman" pitchFamily="34" charset="-120"/>
               </a:rPr>
               <a:t>المحاضرات القادمة</a:t>
             </a:r>
@@ -27973,6 +29050,9 @@
                 <a:solidFill>
                   <a:srgbClr val="FFFFFF"/>
                 </a:solidFill>
+                <a:latin typeface="Times New Roman" pitchFamily="34" charset="0"/>
+                <a:ea typeface="Times New Roman" pitchFamily="34" charset="-122"/>
+                <a:cs typeface="Times New Roman" pitchFamily="34" charset="-120"/>
               </a:rPr>
               <a:t>نبدأ بتفكيك الفراغ إلى عناصره الأساسية، ونرى كيف تتحول هذه العناصر البسيطة إلى فراغات معمارية وداخلية حقيقية.</a:t>
             </a:r>
@@ -28009,6 +29089,9 @@
                 <a:solidFill>
                   <a:srgbClr val="C2593A"/>
                 </a:solidFill>
+                <a:latin typeface="Times New Roman" pitchFamily="34" charset="0"/>
+                <a:ea typeface="Times New Roman" pitchFamily="34" charset="-122"/>
+                <a:cs typeface="Times New Roman" pitchFamily="34" charset="-120"/>
               </a:rPr>
               <a:t>POINT  ·  LINE  ·  PLANE  ·  VOLUME</a:t>
             </a:r>
@@ -28117,6 +29200,9 @@
                 <a:solidFill>
                   <a:schemeClr val="accent1"/>
                 </a:solidFill>
+                <a:latin typeface="Times New Roman" pitchFamily="34" charset="0"/>
+                <a:ea typeface="Times New Roman" pitchFamily="34" charset="-122"/>
+                <a:cs typeface="Times New Roman" pitchFamily="34" charset="-120"/>
               </a:rPr>
               <a:t>REFERENCES</a:t>
             </a:r>
@@ -28155,6 +29241,9 @@
                 <a:solidFill>
                   <a:schemeClr val="tx1"/>
                 </a:solidFill>
+                <a:latin typeface="Times New Roman" pitchFamily="34" charset="0"/>
+                <a:ea typeface="Times New Roman" pitchFamily="34" charset="-122"/>
+                <a:cs typeface="Times New Roman" pitchFamily="34" charset="-120"/>
               </a:rPr>
               <a:t>المراجع</a:t>
             </a:r>
@@ -28240,6 +29329,9 @@
                 <a:solidFill>
                   <a:srgbClr val="1F2224"/>
                 </a:solidFill>
+                <a:latin typeface="Times New Roman" pitchFamily="34" charset="0"/>
+                <a:ea typeface="Times New Roman" pitchFamily="34" charset="-122"/>
+                <a:cs typeface="Times New Roman" pitchFamily="34" charset="-120"/>
               </a:rPr>
               <a:t>Ching, F. D. K. (2015). Architecture: Form, Space, and Order (4th ed.). Hoboken, NJ: Wiley.  — Course reference: Theory of Architecture</a:t>
             </a:r>
@@ -28259,6 +29351,9 @@
                 <a:solidFill>
                   <a:srgbClr val="1F2224"/>
                 </a:solidFill>
+                <a:latin typeface="Times New Roman" pitchFamily="34" charset="0"/>
+                <a:ea typeface="Times New Roman" pitchFamily="34" charset="-122"/>
+                <a:cs typeface="Times New Roman" pitchFamily="34" charset="-120"/>
               </a:rPr>
               <a:t>Ching, F. D. K., &amp; Binggeli, C. (2018). Interior Design Illustrated (4th ed.). Hoboken, NJ: Wiley.</a:t>
             </a:r>
@@ -28278,6 +29373,9 @@
                 <a:solidFill>
                   <a:srgbClr val="1F2224"/>
                 </a:solidFill>
+                <a:latin typeface="Times New Roman" pitchFamily="34" charset="0"/>
+                <a:ea typeface="Times New Roman" pitchFamily="34" charset="-122"/>
+                <a:cs typeface="Times New Roman" pitchFamily="34" charset="-120"/>
               </a:rPr>
               <a:t>Pile, J. F., &amp; Gura, J. (2014). A History of Interior Design (4th ed.). London: Laurence King.</a:t>
             </a:r>
@@ -28297,6 +29395,9 @@
                 <a:solidFill>
                   <a:srgbClr val="1F2224"/>
                 </a:solidFill>
+                <a:latin typeface="Times New Roman" pitchFamily="34" charset="0"/>
+                <a:ea typeface="Times New Roman" pitchFamily="34" charset="-122"/>
+                <a:cs typeface="Times New Roman" pitchFamily="34" charset="-120"/>
               </a:rPr>
               <a:t>Panero, J., &amp; Zelnik, M. (1979). Human Dimension &amp; Interior Space. New York: Whitney Library of Design.</a:t>
             </a:r>
@@ -28316,6 +29417,9 @@
                 <a:solidFill>
                   <a:srgbClr val="1F2224"/>
                 </a:solidFill>
+                <a:latin typeface="Times New Roman" pitchFamily="34" charset="0"/>
+                <a:ea typeface="Times New Roman" pitchFamily="34" charset="-122"/>
+                <a:cs typeface="Times New Roman" pitchFamily="34" charset="-120"/>
               </a:rPr>
               <a:t>Neufert, E., &amp; Neufert, P. (2019). Architects' Data (5th ed.). Chichester: Wiley-Blackwell.</a:t>
             </a:r>
@@ -28335,6 +29439,9 @@
                 <a:solidFill>
                   <a:srgbClr val="1F2224"/>
                 </a:solidFill>
+                <a:latin typeface="Times New Roman" pitchFamily="34" charset="0"/>
+                <a:ea typeface="Times New Roman" pitchFamily="34" charset="-122"/>
+                <a:cs typeface="Times New Roman" pitchFamily="34" charset="-120"/>
               </a:rPr>
               <a:t>Theory of Architecture — course lecture notes (SRM University). Source of example images.</a:t>
             </a:r>
@@ -28371,6 +29478,9 @@
                 <a:solidFill>
                   <a:srgbClr val="5B6770"/>
                 </a:solidFill>
+                <a:latin typeface="Times New Roman" pitchFamily="34" charset="0"/>
+                <a:ea typeface="Times New Roman" pitchFamily="34" charset="-122"/>
+                <a:cs typeface="Times New Roman" pitchFamily="34" charset="-120"/>
               </a:rPr>
               <a:t>المخططات رُسمت توضيحيًا اعتمادًا على مفاهيم المرجع؛ والصور التوضيحية مأخوذة من ملف المادة.</a:t>
             </a:r>
@@ -28479,6 +29589,9 @@
                 <a:solidFill>
                   <a:schemeClr val="accent1"/>
                 </a:solidFill>
+                <a:latin typeface="Times New Roman" pitchFamily="34" charset="0"/>
+                <a:ea typeface="Times New Roman" pitchFamily="34" charset="-122"/>
+                <a:cs typeface="Times New Roman" pitchFamily="34" charset="-120"/>
               </a:rPr>
               <a:t>LECTURE OUTLINE</a:t>
             </a:r>
@@ -28517,6 +29630,9 @@
                 <a:solidFill>
                   <a:schemeClr val="tx1"/>
                 </a:solidFill>
+                <a:latin typeface="Times New Roman" pitchFamily="34" charset="0"/>
+                <a:ea typeface="Times New Roman" pitchFamily="34" charset="-122"/>
+                <a:cs typeface="Times New Roman" pitchFamily="34" charset="-120"/>
               </a:rPr>
               <a:t>محاور المحاضرة</a:t>
             </a:r>
@@ -28597,6 +29713,9 @@
                 <a:solidFill>
                   <a:srgbClr val="FFFFFF"/>
                 </a:solidFill>
+                <a:latin typeface="Times New Roman" pitchFamily="34" charset="0"/>
+                <a:ea typeface="Times New Roman" pitchFamily="34" charset="-122"/>
+                <a:cs typeface="Times New Roman" pitchFamily="34" charset="-120"/>
               </a:rPr>
               <a:t>01–03</a:t>
             </a:r>
@@ -28633,6 +29752,9 @@
                 <a:solidFill>
                   <a:srgbClr val="1F2224"/>
                 </a:solidFill>
+                <a:latin typeface="Times New Roman" pitchFamily="34" charset="0"/>
+                <a:ea typeface="Times New Roman" pitchFamily="34" charset="-122"/>
+                <a:cs typeface="Times New Roman" pitchFamily="34" charset="-120"/>
               </a:rPr>
               <a:t>التصميم والتصميم الداخلي</a:t>
             </a:r>
@@ -28669,6 +29791,9 @@
                 <a:solidFill>
                   <a:srgbClr val="5B6770"/>
                 </a:solidFill>
+                <a:latin typeface="Times New Roman" pitchFamily="34" charset="0"/>
+                <a:ea typeface="Times New Roman" pitchFamily="34" charset="-122"/>
+                <a:cs typeface="Times New Roman" pitchFamily="34" charset="-120"/>
               </a:rPr>
               <a:t>What is Design? · What is Interior Design? · NOT Decoration</a:t>
             </a:r>
@@ -28749,6 +29874,9 @@
                 <a:solidFill>
                   <a:srgbClr val="FFFFFF"/>
                 </a:solidFill>
+                <a:latin typeface="Times New Roman" pitchFamily="34" charset="0"/>
+                <a:ea typeface="Times New Roman" pitchFamily="34" charset="-122"/>
+                <a:cs typeface="Times New Roman" pitchFamily="34" charset="-120"/>
               </a:rPr>
               <a:t>04–06</a:t>
             </a:r>
@@ -28785,6 +29913,9 @@
                 <a:solidFill>
                   <a:srgbClr val="1F2224"/>
                 </a:solidFill>
+                <a:latin typeface="Times New Roman" pitchFamily="34" charset="0"/>
+                <a:ea typeface="Times New Roman" pitchFamily="34" charset="-122"/>
+                <a:cs typeface="Times New Roman" pitchFamily="34" charset="-120"/>
               </a:rPr>
               <a:t>العمارة والفراغ</a:t>
             </a:r>
@@ -28821,6 +29952,9 @@
                 <a:solidFill>
                   <a:srgbClr val="5B6770"/>
                 </a:solidFill>
+                <a:latin typeface="Times New Roman" pitchFamily="34" charset="0"/>
+                <a:ea typeface="Times New Roman" pitchFamily="34" charset="-122"/>
+                <a:cs typeface="Times New Roman" pitchFamily="34" charset="-120"/>
               </a:rPr>
               <a:t>Architecture &amp; Interior · What are we designing? · What is Space?</a:t>
             </a:r>
@@ -28901,6 +30035,9 @@
                 <a:solidFill>
                   <a:srgbClr val="FFFFFF"/>
                 </a:solidFill>
+                <a:latin typeface="Times New Roman" pitchFamily="34" charset="0"/>
+                <a:ea typeface="Times New Roman" pitchFamily="34" charset="-122"/>
+                <a:cs typeface="Times New Roman" pitchFamily="34" charset="-120"/>
               </a:rPr>
               <a:t>07–12</a:t>
             </a:r>
@@ -28937,6 +30074,9 @@
                 <a:solidFill>
                   <a:srgbClr val="1F2224"/>
                 </a:solidFill>
+                <a:latin typeface="Times New Roman" pitchFamily="34" charset="0"/>
+                <a:ea typeface="Times New Roman" pitchFamily="34" charset="-122"/>
+                <a:cs typeface="Times New Roman" pitchFamily="34" charset="-120"/>
               </a:rPr>
               <a:t>عناصر تشكيل الفراغ</a:t>
             </a:r>
@@ -28973,6 +30113,9 @@
                 <a:solidFill>
                   <a:srgbClr val="5B6770"/>
                 </a:solidFill>
+                <a:latin typeface="Times New Roman" pitchFamily="34" charset="0"/>
+                <a:ea typeface="Times New Roman" pitchFamily="34" charset="-122"/>
+                <a:cs typeface="Times New Roman" pitchFamily="34" charset="-120"/>
               </a:rPr>
               <a:t>Point → Line → Plane → Volume · Base · Wall · Overhead</a:t>
             </a:r>
@@ -29053,6 +30196,9 @@
                 <a:solidFill>
                   <a:srgbClr val="FFFFFF"/>
                 </a:solidFill>
+                <a:latin typeface="Times New Roman" pitchFamily="34" charset="0"/>
+                <a:ea typeface="Times New Roman" pitchFamily="34" charset="-122"/>
+                <a:cs typeface="Times New Roman" pitchFamily="34" charset="-120"/>
               </a:rPr>
               <a:t>13–15</a:t>
             </a:r>
@@ -29089,6 +30235,9 @@
                 <a:solidFill>
                   <a:srgbClr val="1F2224"/>
                 </a:solidFill>
+                <a:latin typeface="Times New Roman" pitchFamily="34" charset="0"/>
+                <a:ea typeface="Times New Roman" pitchFamily="34" charset="-122"/>
+                <a:cs typeface="Times New Roman" pitchFamily="34" charset="-120"/>
               </a:rPr>
               <a:t>الفتحات والإنسان</a:t>
             </a:r>
@@ -29125,6 +30274,9 @@
                 <a:solidFill>
                   <a:srgbClr val="5B6770"/>
                 </a:solidFill>
+                <a:latin typeface="Times New Roman" pitchFamily="34" charset="0"/>
+                <a:ea typeface="Times New Roman" pitchFamily="34" charset="-122"/>
+                <a:cs typeface="Times New Roman" pitchFamily="34" charset="-120"/>
               </a:rPr>
               <a:t>Openings · Human &amp; Space · Living-room example</a:t>
             </a:r>
@@ -29205,6 +30357,9 @@
                 <a:solidFill>
                   <a:srgbClr val="FFFFFF"/>
                 </a:solidFill>
+                <a:latin typeface="Times New Roman" pitchFamily="34" charset="0"/>
+                <a:ea typeface="Times New Roman" pitchFamily="34" charset="-122"/>
+                <a:cs typeface="Times New Roman" pitchFamily="34" charset="-120"/>
               </a:rPr>
               <a:t>16–17</a:t>
             </a:r>
@@ -29241,6 +30396,9 @@
                 <a:solidFill>
                   <a:srgbClr val="1F2224"/>
                 </a:solidFill>
+                <a:latin typeface="Times New Roman" pitchFamily="34" charset="0"/>
+                <a:ea typeface="Times New Roman" pitchFamily="34" charset="-122"/>
+                <a:cs typeface="Times New Roman" pitchFamily="34" charset="-120"/>
               </a:rPr>
               <a:t>الفكرة الأساسية والتمرين</a:t>
             </a:r>
@@ -29277,6 +30435,9 @@
                 <a:solidFill>
                   <a:srgbClr val="5B6770"/>
                 </a:solidFill>
+                <a:latin typeface="Times New Roman" pitchFamily="34" charset="0"/>
+                <a:ea typeface="Times New Roman" pitchFamily="34" charset="-122"/>
+                <a:cs typeface="Times New Roman" pitchFamily="34" charset="-120"/>
               </a:rPr>
               <a:t>Function → Space → Experience → Form · Exercise 01</a:t>
             </a:r>
@@ -29333,6 +30494,9 @@
                 <a:solidFill>
                   <a:srgbClr val="FFFFFF"/>
                 </a:solidFill>
+                <a:latin typeface="Times New Roman" pitchFamily="34" charset="0"/>
+                <a:ea typeface="Times New Roman" pitchFamily="34" charset="-122"/>
+                <a:cs typeface="Times New Roman" pitchFamily="34" charset="-120"/>
               </a:rPr>
               <a:t>90</a:t>
             </a:r>
@@ -29369,6 +30533,9 @@
                 <a:solidFill>
                   <a:srgbClr val="B9C4C4"/>
                 </a:solidFill>
+                <a:latin typeface="Times New Roman" pitchFamily="34" charset="0"/>
+                <a:ea typeface="Times New Roman" pitchFamily="34" charset="-122"/>
+                <a:cs typeface="Times New Roman" pitchFamily="34" charset="-120"/>
               </a:rPr>
               <a:t>دقيقة</a:t>
             </a:r>
@@ -29405,6 +30572,9 @@
                 <a:solidFill>
                   <a:srgbClr val="D9A441"/>
                 </a:solidFill>
+                <a:latin typeface="Times New Roman" pitchFamily="34" charset="0"/>
+                <a:ea typeface="Times New Roman" pitchFamily="34" charset="-122"/>
+                <a:cs typeface="Times New Roman" pitchFamily="34" charset="-120"/>
               </a:rPr>
               <a:t>شرح تفاعلي + تمرين تطبيقي داخل المرسم</a:t>
             </a:r>
@@ -29513,6 +30683,9 @@
                 <a:solidFill>
                   <a:schemeClr val="accent1"/>
                 </a:solidFill>
+                <a:latin typeface="Times New Roman" pitchFamily="34" charset="0"/>
+                <a:ea typeface="Times New Roman" pitchFamily="34" charset="-122"/>
+                <a:cs typeface="Times New Roman" pitchFamily="34" charset="-120"/>
               </a:rPr>
               <a:t>01 — WHAT IS DESIGN?</a:t>
             </a:r>
@@ -29551,6 +30724,9 @@
                 <a:solidFill>
                   <a:schemeClr val="tx1"/>
                 </a:solidFill>
+                <a:latin typeface="Times New Roman" pitchFamily="34" charset="0"/>
+                <a:ea typeface="Times New Roman" pitchFamily="34" charset="-122"/>
+                <a:cs typeface="Times New Roman" pitchFamily="34" charset="-120"/>
               </a:rPr>
               <a:t>ما هو التصميم؟</a:t>
             </a:r>
@@ -29607,6 +30783,9 @@
                 <a:solidFill>
                   <a:srgbClr val="B9C4C4"/>
                 </a:solidFill>
+                <a:latin typeface="Times New Roman" pitchFamily="34" charset="0"/>
+                <a:ea typeface="Times New Roman" pitchFamily="34" charset="-122"/>
+                <a:cs typeface="Times New Roman" pitchFamily="34" charset="-120"/>
               </a:rPr>
               <a:t>التصميم ليس مجرد رسم شكل جميل.</a:t>
             </a:r>
@@ -29643,6 +30822,9 @@
                 <a:solidFill>
                   <a:srgbClr val="FFFFFF"/>
                 </a:solidFill>
+                <a:latin typeface="Times New Roman" pitchFamily="34" charset="0"/>
+                <a:ea typeface="Times New Roman" pitchFamily="34" charset="-122"/>
+                <a:cs typeface="Times New Roman" pitchFamily="34" charset="-120"/>
               </a:rPr>
               <a:t>التصميم هو عملية اتخاذ قرارات منظمة للوصول إلى حل يحقق مجموعة من المتطلبات.</a:t>
             </a:r>
@@ -29679,6 +30861,9 @@
                 <a:solidFill>
                   <a:srgbClr val="D9A441"/>
                 </a:solidFill>
+                <a:latin typeface="Times New Roman" pitchFamily="34" charset="0"/>
+                <a:ea typeface="Times New Roman" pitchFamily="34" charset="-122"/>
+                <a:cs typeface="Times New Roman" pitchFamily="34" charset="-120"/>
               </a:rPr>
               <a:t>Design is an organized decision-making process that leads to a solution meeting a set of requirements.</a:t>
             </a:r>
@@ -29715,6 +30900,9 @@
                 <a:solidFill>
                   <a:srgbClr val="B9C4C4"/>
                 </a:solidFill>
+                <a:latin typeface="Times New Roman" pitchFamily="34" charset="0"/>
+                <a:ea typeface="Times New Roman" pitchFamily="34" charset="-122"/>
+                <a:cs typeface="Times New Roman" pitchFamily="34" charset="-120"/>
               </a:rPr>
               <a:t>في التصميم الداخلي ترتبط هذه المتطلبات بالفراغ والإنسان والوظيفة.</a:t>
             </a:r>
@@ -29751,6 +30939,9 @@
                 <a:solidFill>
                   <a:srgbClr val="C2593A"/>
                 </a:solidFill>
+                <a:latin typeface="Times New Roman" pitchFamily="34" charset="0"/>
+                <a:ea typeface="Times New Roman" pitchFamily="34" charset="-122"/>
+                <a:cs typeface="Times New Roman" pitchFamily="34" charset="-120"/>
               </a:rPr>
               <a:t>عندما نصمم غرفة لا نسأل فقط: كيف ستبدو؟ بل نسأل:</a:t>
             </a:r>
@@ -29831,6 +31022,9 @@
                 <a:solidFill>
                   <a:srgbClr val="1F2224"/>
                 </a:solidFill>
+                <a:latin typeface="Times New Roman" pitchFamily="34" charset="0"/>
+                <a:ea typeface="Times New Roman" pitchFamily="34" charset="-122"/>
+                <a:cs typeface="Times New Roman" pitchFamily="34" charset="-120"/>
               </a:rPr>
               <a:t>من سيستخدمها؟</a:t>
             </a:r>
@@ -29911,6 +31105,9 @@
                 <a:solidFill>
                   <a:srgbClr val="1F2224"/>
                 </a:solidFill>
+                <a:latin typeface="Times New Roman" pitchFamily="34" charset="0"/>
+                <a:ea typeface="Times New Roman" pitchFamily="34" charset="-122"/>
+                <a:cs typeface="Times New Roman" pitchFamily="34" charset="-120"/>
               </a:rPr>
               <a:t>ماذا سيفعل داخلها؟</a:t>
             </a:r>
@@ -29991,6 +31188,9 @@
                 <a:solidFill>
                   <a:srgbClr val="1F2224"/>
                 </a:solidFill>
+                <a:latin typeface="Times New Roman" pitchFamily="34" charset="0"/>
+                <a:ea typeface="Times New Roman" pitchFamily="34" charset="-122"/>
+                <a:cs typeface="Times New Roman" pitchFamily="34" charset="-120"/>
               </a:rPr>
               <a:t>كيف سيتحرك؟</a:t>
             </a:r>
@@ -30071,6 +31271,9 @@
                 <a:solidFill>
                   <a:srgbClr val="1F2224"/>
                 </a:solidFill>
+                <a:latin typeface="Times New Roman" pitchFamily="34" charset="0"/>
+                <a:ea typeface="Times New Roman" pitchFamily="34" charset="-122"/>
+                <a:cs typeface="Times New Roman" pitchFamily="34" charset="-120"/>
               </a:rPr>
               <a:t>ما مقدار المساحة المطلوبة؟</a:t>
             </a:r>
@@ -30151,6 +31354,9 @@
                 <a:solidFill>
                   <a:srgbClr val="1F2224"/>
                 </a:solidFill>
+                <a:latin typeface="Times New Roman" pitchFamily="34" charset="0"/>
+                <a:ea typeface="Times New Roman" pitchFamily="34" charset="-122"/>
+                <a:cs typeface="Times New Roman" pitchFamily="34" charset="-120"/>
               </a:rPr>
               <a:t>كيف يدخل الضوء؟</a:t>
             </a:r>
@@ -30231,6 +31437,9 @@
                 <a:solidFill>
                   <a:srgbClr val="1F2224"/>
                 </a:solidFill>
+                <a:latin typeface="Times New Roman" pitchFamily="34" charset="0"/>
+                <a:ea typeface="Times New Roman" pitchFamily="34" charset="-122"/>
+                <a:cs typeface="Times New Roman" pitchFamily="34" charset="-120"/>
               </a:rPr>
               <a:t>كيف تتصل بالفراغات الأخرى؟</a:t>
             </a:r>
@@ -30311,6 +31520,9 @@
                 <a:solidFill>
                   <a:srgbClr val="1F2224"/>
                 </a:solidFill>
+                <a:latin typeface="Times New Roman" pitchFamily="34" charset="0"/>
+                <a:ea typeface="Times New Roman" pitchFamily="34" charset="-122"/>
+                <a:cs typeface="Times New Roman" pitchFamily="34" charset="-120"/>
               </a:rPr>
               <a:t>كيف يشعر المستخدم داخلها؟</a:t>
             </a:r>
@@ -30419,6 +31631,9 @@
                 <a:solidFill>
                   <a:schemeClr val="accent1"/>
                 </a:solidFill>
+                <a:latin typeface="Times New Roman" pitchFamily="34" charset="0"/>
+                <a:ea typeface="Times New Roman" pitchFamily="34" charset="-122"/>
+                <a:cs typeface="Times New Roman" pitchFamily="34" charset="-120"/>
               </a:rPr>
               <a:t>02 — WHAT IS INTERIOR DESIGN?</a:t>
             </a:r>
@@ -30457,6 +31672,9 @@
                 <a:solidFill>
                   <a:schemeClr val="tx1"/>
                 </a:solidFill>
+                <a:latin typeface="Times New Roman" pitchFamily="34" charset="0"/>
+                <a:ea typeface="Times New Roman" pitchFamily="34" charset="-122"/>
+                <a:cs typeface="Times New Roman" pitchFamily="34" charset="-120"/>
               </a:rPr>
               <a:t>ما هو التصميم الداخلي؟</a:t>
             </a:r>
@@ -30493,6 +31711,9 @@
                 <a:solidFill>
                   <a:srgbClr val="C2593A"/>
                 </a:solidFill>
+                <a:latin typeface="Times New Roman" pitchFamily="34" charset="0"/>
+                <a:ea typeface="Times New Roman" pitchFamily="34" charset="-122"/>
+                <a:cs typeface="Times New Roman" pitchFamily="34" charset="-120"/>
               </a:rPr>
               <a:t>Interior Design </a:t>
             </a:r>
@@ -30504,6 +31725,9 @@
                 <a:solidFill>
                   <a:srgbClr val="1F2224"/>
                 </a:solidFill>
+                <a:latin typeface="Times New Roman" pitchFamily="34" charset="0"/>
+                <a:ea typeface="Times New Roman" pitchFamily="34" charset="-122"/>
+                <a:cs typeface="Times New Roman" pitchFamily="34" charset="-120"/>
               </a:rPr>
               <a:t>هو عملية تصميم وتنظيم وتشكيل الفراغ الداخلي بما يتناسب مع أربعة محاور متكاملة:</a:t>
             </a:r>
@@ -30613,6 +31837,9 @@
                 <a:solidFill>
                   <a:srgbClr val="1F2224"/>
                 </a:solidFill>
+                <a:latin typeface="Times New Roman" pitchFamily="34" charset="0"/>
+                <a:ea typeface="Times New Roman" pitchFamily="34" charset="-122"/>
+                <a:cs typeface="Times New Roman" pitchFamily="34" charset="-120"/>
               </a:rPr>
               <a:t>Human</a:t>
             </a:r>
@@ -30649,6 +31876,9 @@
                 <a:solidFill>
                   <a:srgbClr val="C2593A"/>
                 </a:solidFill>
+                <a:latin typeface="Times New Roman" pitchFamily="34" charset="0"/>
+                <a:ea typeface="Times New Roman" pitchFamily="34" charset="-122"/>
+                <a:cs typeface="Times New Roman" pitchFamily="34" charset="-120"/>
               </a:rPr>
               <a:t>الإنسان</a:t>
             </a:r>
@@ -30685,6 +31915,9 @@
                 <a:solidFill>
                   <a:srgbClr val="3A4146"/>
                 </a:solidFill>
+                <a:latin typeface="Times New Roman" pitchFamily="34" charset="0"/>
+                <a:ea typeface="Times New Roman" pitchFamily="34" charset="-122"/>
+                <a:cs typeface="Times New Roman" pitchFamily="34" charset="-120"/>
               </a:rPr>
               <a:t>من يستخدم المكان؟</a:t>
             </a:r>
@@ -30721,6 +31954,9 @@
                 <a:solidFill>
                   <a:srgbClr val="8A9A9B"/>
                 </a:solidFill>
+                <a:latin typeface="Times New Roman" pitchFamily="34" charset="0"/>
+                <a:ea typeface="Times New Roman" pitchFamily="34" charset="-122"/>
+                <a:cs typeface="Times New Roman" pitchFamily="34" charset="-120"/>
               </a:rPr>
               <a:t>+</a:t>
             </a:r>
@@ -30830,6 +32066,9 @@
                 <a:solidFill>
                   <a:srgbClr val="1F2224"/>
                 </a:solidFill>
+                <a:latin typeface="Times New Roman" pitchFamily="34" charset="0"/>
+                <a:ea typeface="Times New Roman" pitchFamily="34" charset="-122"/>
+                <a:cs typeface="Times New Roman" pitchFamily="34" charset="-120"/>
               </a:rPr>
               <a:t>Function</a:t>
             </a:r>
@@ -30866,6 +32105,9 @@
                 <a:solidFill>
                   <a:srgbClr val="2F6B6A"/>
                 </a:solidFill>
+                <a:latin typeface="Times New Roman" pitchFamily="34" charset="0"/>
+                <a:ea typeface="Times New Roman" pitchFamily="34" charset="-122"/>
+                <a:cs typeface="Times New Roman" pitchFamily="34" charset="-120"/>
               </a:rPr>
               <a:t>الوظيفة</a:t>
             </a:r>
@@ -30902,6 +32144,9 @@
                 <a:solidFill>
                   <a:srgbClr val="3A4146"/>
                 </a:solidFill>
+                <a:latin typeface="Times New Roman" pitchFamily="34" charset="0"/>
+                <a:ea typeface="Times New Roman" pitchFamily="34" charset="-122"/>
+                <a:cs typeface="Times New Roman" pitchFamily="34" charset="-120"/>
               </a:rPr>
               <a:t>ماذا يحدث داخل المكان؟</a:t>
             </a:r>
@@ -30938,6 +32183,9 @@
                 <a:solidFill>
                   <a:srgbClr val="8A9A9B"/>
                 </a:solidFill>
+                <a:latin typeface="Times New Roman" pitchFamily="34" charset="0"/>
+                <a:ea typeface="Times New Roman" pitchFamily="34" charset="-122"/>
+                <a:cs typeface="Times New Roman" pitchFamily="34" charset="-120"/>
               </a:rPr>
               <a:t>+</a:t>
             </a:r>
@@ -31047,6 +32295,9 @@
                 <a:solidFill>
                   <a:srgbClr val="1F2224"/>
                 </a:solidFill>
+                <a:latin typeface="Times New Roman" pitchFamily="34" charset="0"/>
+                <a:ea typeface="Times New Roman" pitchFamily="34" charset="-122"/>
+                <a:cs typeface="Times New Roman" pitchFamily="34" charset="-120"/>
               </a:rPr>
               <a:t>Space</a:t>
             </a:r>
@@ -31083,6 +32334,9 @@
                 <a:solidFill>
                   <a:srgbClr val="3A4146"/>
                 </a:solidFill>
+                <a:latin typeface="Times New Roman" pitchFamily="34" charset="0"/>
+                <a:ea typeface="Times New Roman" pitchFamily="34" charset="-122"/>
+                <a:cs typeface="Times New Roman" pitchFamily="34" charset="-120"/>
               </a:rPr>
               <a:t>الفراغ</a:t>
             </a:r>
@@ -31119,6 +32373,9 @@
                 <a:solidFill>
                   <a:srgbClr val="3A4146"/>
                 </a:solidFill>
+                <a:latin typeface="Times New Roman" pitchFamily="34" charset="0"/>
+                <a:ea typeface="Times New Roman" pitchFamily="34" charset="-122"/>
+                <a:cs typeface="Times New Roman" pitchFamily="34" charset="-120"/>
               </a:rPr>
               <a:t>كيف يتم تنظيم المساحة؟</a:t>
             </a:r>
@@ -31155,6 +32412,9 @@
                 <a:solidFill>
                   <a:srgbClr val="8A9A9B"/>
                 </a:solidFill>
+                <a:latin typeface="Times New Roman" pitchFamily="34" charset="0"/>
+                <a:ea typeface="Times New Roman" pitchFamily="34" charset="-122"/>
+                <a:cs typeface="Times New Roman" pitchFamily="34" charset="-120"/>
               </a:rPr>
               <a:t>+</a:t>
             </a:r>
@@ -31264,6 +32524,9 @@
                 <a:solidFill>
                   <a:srgbClr val="1F2224"/>
                 </a:solidFill>
+                <a:latin typeface="Times New Roman" pitchFamily="34" charset="0"/>
+                <a:ea typeface="Times New Roman" pitchFamily="34" charset="-122"/>
+                <a:cs typeface="Times New Roman" pitchFamily="34" charset="-120"/>
               </a:rPr>
               <a:t>Experience</a:t>
             </a:r>
@@ -31300,6 +32563,9 @@
                 <a:solidFill>
                   <a:srgbClr val="D9A441"/>
                 </a:solidFill>
+                <a:latin typeface="Times New Roman" pitchFamily="34" charset="0"/>
+                <a:ea typeface="Times New Roman" pitchFamily="34" charset="-122"/>
+                <a:cs typeface="Times New Roman" pitchFamily="34" charset="-120"/>
               </a:rPr>
               <a:t>التجربة</a:t>
             </a:r>
@@ -31336,6 +32602,9 @@
                 <a:solidFill>
                   <a:srgbClr val="3A4146"/>
                 </a:solidFill>
+                <a:latin typeface="Times New Roman" pitchFamily="34" charset="0"/>
+                <a:ea typeface="Times New Roman" pitchFamily="34" charset="-122"/>
+                <a:cs typeface="Times New Roman" pitchFamily="34" charset="-120"/>
               </a:rPr>
               <a:t>كيف يشعر الإنسان ويتصرف داخل المكان؟</a:t>
             </a:r>
@@ -31372,6 +32641,9 @@
                 <a:solidFill>
                   <a:srgbClr val="2F6B6A"/>
                 </a:solidFill>
+                <a:latin typeface="Times New Roman" pitchFamily="34" charset="0"/>
+                <a:ea typeface="Times New Roman" pitchFamily="34" charset="-122"/>
+                <a:cs typeface="Times New Roman" pitchFamily="34" charset="-120"/>
               </a:rPr>
               <a:t>Human  +  Function  +  Space  +  Experience</a:t>
             </a:r>
@@ -31480,6 +32752,9 @@
                 <a:solidFill>
                   <a:schemeClr val="accent1"/>
                 </a:solidFill>
+                <a:latin typeface="Times New Roman" pitchFamily="34" charset="0"/>
+                <a:ea typeface="Times New Roman" pitchFamily="34" charset="-122"/>
+                <a:cs typeface="Times New Roman" pitchFamily="34" charset="-120"/>
               </a:rPr>
               <a:t>03 — INTERIOR DESIGN IS NOT DECORATION</a:t>
             </a:r>
@@ -31518,6 +32793,9 @@
                 <a:solidFill>
                   <a:schemeClr val="tx1"/>
                 </a:solidFill>
+                <a:latin typeface="Times New Roman" pitchFamily="34" charset="0"/>
+                <a:ea typeface="Times New Roman" pitchFamily="34" charset="-122"/>
+                <a:cs typeface="Times New Roman" pitchFamily="34" charset="-120"/>
               </a:rPr>
               <a:t>التصميم الداخلي ليس ديكورًا</a:t>
             </a:r>
@@ -31583,6 +32861,9 @@
                 <a:solidFill>
                   <a:srgbClr val="5B6770"/>
                 </a:solidFill>
+                <a:latin typeface="Times New Roman" pitchFamily="34" charset="0"/>
+                <a:ea typeface="Times New Roman" pitchFamily="34" charset="-122"/>
+                <a:cs typeface="Times New Roman" pitchFamily="34" charset="-120"/>
               </a:rPr>
               <a:t>Interior Decoration</a:t>
             </a:r>
@@ -31619,6 +32900,9 @@
                 <a:solidFill>
                   <a:srgbClr val="3A4146"/>
                 </a:solidFill>
+                <a:latin typeface="Times New Roman" pitchFamily="34" charset="0"/>
+                <a:ea typeface="Times New Roman" pitchFamily="34" charset="-122"/>
+                <a:cs typeface="Times New Roman" pitchFamily="34" charset="-120"/>
               </a:rPr>
               <a:t>يركّز بصورة أكبر على المظهر:</a:t>
             </a:r>
@@ -31682,6 +32966,9 @@
                 <a:solidFill>
                   <a:srgbClr val="3A4146"/>
                 </a:solidFill>
+                <a:latin typeface="Times New Roman" pitchFamily="34" charset="0"/>
+                <a:ea typeface="Times New Roman" pitchFamily="34" charset="-122"/>
+                <a:cs typeface="Times New Roman" pitchFamily="34" charset="-120"/>
               </a:rPr>
               <a:t>الألوان</a:t>
             </a:r>
@@ -31745,6 +33032,9 @@
                 <a:solidFill>
                   <a:srgbClr val="3A4146"/>
                 </a:solidFill>
+                <a:latin typeface="Times New Roman" pitchFamily="34" charset="0"/>
+                <a:ea typeface="Times New Roman" pitchFamily="34" charset="-122"/>
+                <a:cs typeface="Times New Roman" pitchFamily="34" charset="-120"/>
               </a:rPr>
               <a:t>الأثاث</a:t>
             </a:r>
@@ -31808,6 +33098,9 @@
                 <a:solidFill>
                   <a:srgbClr val="3A4146"/>
                 </a:solidFill>
+                <a:latin typeface="Times New Roman" pitchFamily="34" charset="0"/>
+                <a:ea typeface="Times New Roman" pitchFamily="34" charset="-122"/>
+                <a:cs typeface="Times New Roman" pitchFamily="34" charset="-120"/>
               </a:rPr>
               <a:t>الستائر</a:t>
             </a:r>
@@ -31871,6 +33164,9 @@
                 <a:solidFill>
                   <a:srgbClr val="3A4146"/>
                 </a:solidFill>
+                <a:latin typeface="Times New Roman" pitchFamily="34" charset="0"/>
+                <a:ea typeface="Times New Roman" pitchFamily="34" charset="-122"/>
+                <a:cs typeface="Times New Roman" pitchFamily="34" charset="-120"/>
               </a:rPr>
               <a:t>الإكسسوارات</a:t>
             </a:r>
@@ -31934,6 +33230,9 @@
                 <a:solidFill>
                   <a:srgbClr val="3A4146"/>
                 </a:solidFill>
+                <a:latin typeface="Times New Roman" pitchFamily="34" charset="0"/>
+                <a:ea typeface="Times New Roman" pitchFamily="34" charset="-122"/>
+                <a:cs typeface="Times New Roman" pitchFamily="34" charset="-120"/>
               </a:rPr>
               <a:t>التشطيبات</a:t>
             </a:r>
@@ -31997,6 +33296,9 @@
                 <a:solidFill>
                   <a:srgbClr val="3A4146"/>
                 </a:solidFill>
+                <a:latin typeface="Times New Roman" pitchFamily="34" charset="0"/>
+                <a:ea typeface="Times New Roman" pitchFamily="34" charset="-122"/>
+                <a:cs typeface="Times New Roman" pitchFamily="34" charset="-120"/>
               </a:rPr>
               <a:t>المظهر</a:t>
             </a:r>
@@ -32062,6 +33364,9 @@
                 <a:solidFill>
                   <a:srgbClr val="FFFFFF"/>
                 </a:solidFill>
+                <a:latin typeface="Times New Roman" pitchFamily="34" charset="0"/>
+                <a:ea typeface="Times New Roman" pitchFamily="34" charset="-122"/>
+                <a:cs typeface="Times New Roman" pitchFamily="34" charset="-120"/>
               </a:rPr>
               <a:t>Interior Design</a:t>
             </a:r>
@@ -32098,6 +33403,9 @@
                 <a:solidFill>
                   <a:srgbClr val="B9C4C4"/>
                 </a:solidFill>
+                <a:latin typeface="Times New Roman" pitchFamily="34" charset="0"/>
+                <a:ea typeface="Times New Roman" pitchFamily="34" charset="-122"/>
+                <a:cs typeface="Times New Roman" pitchFamily="34" charset="-120"/>
               </a:rPr>
               <a:t>يتعامل مع منظومة أكبر:</a:t>
             </a:r>
@@ -32156,6 +33464,9 @@
                 <a:solidFill>
                   <a:srgbClr val="FFFFFF"/>
                 </a:solidFill>
+                <a:latin typeface="Times New Roman" pitchFamily="34" charset="0"/>
+                <a:ea typeface="Times New Roman" pitchFamily="34" charset="-122"/>
+                <a:cs typeface="Times New Roman" pitchFamily="34" charset="-120"/>
               </a:rPr>
               <a:t>Space Planning</a:t>
             </a:r>
@@ -32214,6 +33525,9 @@
                 <a:solidFill>
                   <a:srgbClr val="FFFFFF"/>
                 </a:solidFill>
+                <a:latin typeface="Times New Roman" pitchFamily="34" charset="0"/>
+                <a:ea typeface="Times New Roman" pitchFamily="34" charset="-122"/>
+                <a:cs typeface="Times New Roman" pitchFamily="34" charset="-120"/>
               </a:rPr>
               <a:t>Function</a:t>
             </a:r>
@@ -32272,6 +33586,9 @@
                 <a:solidFill>
                   <a:srgbClr val="FFFFFF"/>
                 </a:solidFill>
+                <a:latin typeface="Times New Roman" pitchFamily="34" charset="0"/>
+                <a:ea typeface="Times New Roman" pitchFamily="34" charset="-122"/>
+                <a:cs typeface="Times New Roman" pitchFamily="34" charset="-120"/>
               </a:rPr>
               <a:t>Circulation</a:t>
             </a:r>
@@ -32330,6 +33647,9 @@
                 <a:solidFill>
                   <a:srgbClr val="FFFFFF"/>
                 </a:solidFill>
+                <a:latin typeface="Times New Roman" pitchFamily="34" charset="0"/>
+                <a:ea typeface="Times New Roman" pitchFamily="34" charset="-122"/>
+                <a:cs typeface="Times New Roman" pitchFamily="34" charset="-120"/>
               </a:rPr>
               <a:t>Human Scale</a:t>
             </a:r>
@@ -32388,6 +33708,9 @@
                 <a:solidFill>
                   <a:srgbClr val="FFFFFF"/>
                 </a:solidFill>
+                <a:latin typeface="Times New Roman" pitchFamily="34" charset="0"/>
+                <a:ea typeface="Times New Roman" pitchFamily="34" charset="-122"/>
+                <a:cs typeface="Times New Roman" pitchFamily="34" charset="-120"/>
               </a:rPr>
               <a:t>Furniture</a:t>
             </a:r>
@@ -32446,6 +33769,9 @@
                 <a:solidFill>
                   <a:srgbClr val="FFFFFF"/>
                 </a:solidFill>
+                <a:latin typeface="Times New Roman" pitchFamily="34" charset="0"/>
+                <a:ea typeface="Times New Roman" pitchFamily="34" charset="-122"/>
+                <a:cs typeface="Times New Roman" pitchFamily="34" charset="-120"/>
               </a:rPr>
               <a:t>Lighting</a:t>
             </a:r>
@@ -32504,6 +33830,9 @@
                 <a:solidFill>
                   <a:srgbClr val="FFFFFF"/>
                 </a:solidFill>
+                <a:latin typeface="Times New Roman" pitchFamily="34" charset="0"/>
+                <a:ea typeface="Times New Roman" pitchFamily="34" charset="-122"/>
+                <a:cs typeface="Times New Roman" pitchFamily="34" charset="-120"/>
               </a:rPr>
               <a:t>Materials</a:t>
             </a:r>
@@ -32562,6 +33891,9 @@
                 <a:solidFill>
                   <a:srgbClr val="FFFFFF"/>
                 </a:solidFill>
+                <a:latin typeface="Times New Roman" pitchFamily="34" charset="0"/>
+                <a:ea typeface="Times New Roman" pitchFamily="34" charset="-122"/>
+                <a:cs typeface="Times New Roman" pitchFamily="34" charset="-120"/>
               </a:rPr>
               <a:t>Color</a:t>
             </a:r>
@@ -32620,6 +33952,9 @@
                 <a:solidFill>
                   <a:srgbClr val="FFFFFF"/>
                 </a:solidFill>
+                <a:latin typeface="Times New Roman" pitchFamily="34" charset="0"/>
+                <a:ea typeface="Times New Roman" pitchFamily="34" charset="-122"/>
+                <a:cs typeface="Times New Roman" pitchFamily="34" charset="-120"/>
               </a:rPr>
               <a:t>Form</a:t>
             </a:r>
@@ -32678,6 +34013,9 @@
                 <a:solidFill>
                   <a:srgbClr val="FFFFFF"/>
                 </a:solidFill>
+                <a:latin typeface="Times New Roman" pitchFamily="34" charset="0"/>
+                <a:ea typeface="Times New Roman" pitchFamily="34" charset="-122"/>
+                <a:cs typeface="Times New Roman" pitchFamily="34" charset="-120"/>
               </a:rPr>
               <a:t>Spatial Experience</a:t>
             </a:r>
@@ -32734,6 +34072,9 @@
                 <a:solidFill>
                   <a:srgbClr val="5B6770"/>
                 </a:solidFill>
+                <a:latin typeface="Times New Roman" pitchFamily="34" charset="0"/>
+                <a:ea typeface="Times New Roman" pitchFamily="34" charset="-122"/>
+                <a:cs typeface="Times New Roman" pitchFamily="34" charset="-120"/>
               </a:rPr>
               <a:t>Decoration changes the appearance of a space. </a:t>
             </a:r>
@@ -32745,6 +34086,9 @@
                 <a:solidFill>
                   <a:srgbClr val="C2593A"/>
                 </a:solidFill>
+                <a:latin typeface="Times New Roman" pitchFamily="34" charset="0"/>
+                <a:ea typeface="Times New Roman" pitchFamily="34" charset="-122"/>
+                <a:cs typeface="Times New Roman" pitchFamily="34" charset="-120"/>
               </a:rPr>
               <a:t>Interior Design shapes the space and the experience within it.</a:t>
             </a:r>
@@ -32781,6 +34125,9 @@
                 <a:solidFill>
                   <a:srgbClr val="1F2224"/>
                 </a:solidFill>
+                <a:latin typeface="Times New Roman" pitchFamily="34" charset="0"/>
+                <a:ea typeface="Times New Roman" pitchFamily="34" charset="-122"/>
+                <a:cs typeface="Times New Roman" pitchFamily="34" charset="-120"/>
               </a:rPr>
               <a:t>الديكور يهتم بمظهر الفراغ، أما التصميم الداخلي فيهتم بتشكيل الفراغ وطريقة استخدامه وتجربته.</a:t>
             </a:r>
@@ -32889,6 +34236,9 @@
                 <a:solidFill>
                   <a:schemeClr val="accent1"/>
                 </a:solidFill>
+                <a:latin typeface="Times New Roman" pitchFamily="34" charset="0"/>
+                <a:ea typeface="Times New Roman" pitchFamily="34" charset="-122"/>
+                <a:cs typeface="Times New Roman" pitchFamily="34" charset="-120"/>
               </a:rPr>
               <a:t>04 — ARCHITECTURE &amp; INTERIOR DESIGN</a:t>
             </a:r>
@@ -32927,6 +34277,9 @@
                 <a:solidFill>
                   <a:schemeClr val="tx1"/>
                 </a:solidFill>
+                <a:latin typeface="Times New Roman" pitchFamily="34" charset="0"/>
+                <a:ea typeface="Times New Roman" pitchFamily="34" charset="-122"/>
+                <a:cs typeface="Times New Roman" pitchFamily="34" charset="-120"/>
               </a:rPr>
               <a:t>العمارة والتصميم الداخلي</a:t>
             </a:r>
@@ -32983,6 +34336,9 @@
                 <a:solidFill>
                   <a:srgbClr val="1F2224"/>
                 </a:solidFill>
+                <a:latin typeface="Times New Roman" pitchFamily="34" charset="0"/>
+                <a:ea typeface="Times New Roman" pitchFamily="34" charset="-122"/>
+                <a:cs typeface="Times New Roman" pitchFamily="34" charset="-120"/>
               </a:rPr>
               <a:t>العمارة فنٌّ وعلمٌ للبناء وإنشاء فراغات وظيفية بصورة مقصودة، تجمع بين الكفاءة التقنية والجودة الجمالية.</a:t>
             </a:r>
@@ -33019,6 +34375,9 @@
                 <a:solidFill>
                   <a:srgbClr val="5B6770"/>
                 </a:solidFill>
+                <a:latin typeface="Times New Roman" pitchFamily="34" charset="0"/>
+                <a:ea typeface="Times New Roman" pitchFamily="34" charset="-122"/>
+                <a:cs typeface="Times New Roman" pitchFamily="34" charset="-120"/>
               </a:rPr>
               <a:t>Theory of Architecture — Ching: Architecture, Form, Space &amp; Order  ·  Vitruvius: Firmitas · Utilitas · Venustas</a:t>
             </a:r>
@@ -33055,6 +34414,9 @@
                 <a:solidFill>
                   <a:srgbClr val="3A4146"/>
                 </a:solidFill>
+                <a:latin typeface="Times New Roman" pitchFamily="34" charset="0"/>
+                <a:ea typeface="Times New Roman" pitchFamily="34" charset="-122"/>
+                <a:cs typeface="Times New Roman" pitchFamily="34" charset="-120"/>
               </a:rPr>
               <a:t>العمارة — المبنى ككل</a:t>
             </a:r>
@@ -33091,6 +34453,9 @@
                 <a:solidFill>
                   <a:srgbClr val="5B6770"/>
                 </a:solidFill>
+                <a:latin typeface="Times New Roman" pitchFamily="34" charset="0"/>
+                <a:ea typeface="Times New Roman" pitchFamily="34" charset="-122"/>
+                <a:cs typeface="Times New Roman" pitchFamily="34" charset="-120"/>
               </a:rPr>
               <a:t>Architecture</a:t>
             </a:r>
@@ -33149,6 +34514,9 @@
                 <a:solidFill>
                   <a:srgbClr val="FFFFFF"/>
                 </a:solidFill>
+                <a:latin typeface="Times New Roman" pitchFamily="34" charset="0"/>
+                <a:ea typeface="Times New Roman" pitchFamily="34" charset="-122"/>
+                <a:cs typeface="Times New Roman" pitchFamily="34" charset="-120"/>
               </a:rPr>
               <a:t>Site</a:t>
             </a:r>
@@ -33231,6 +34599,9 @@
                 <a:solidFill>
                   <a:srgbClr val="FFFFFF"/>
                 </a:solidFill>
+                <a:latin typeface="Times New Roman" pitchFamily="34" charset="0"/>
+                <a:ea typeface="Times New Roman" pitchFamily="34" charset="-122"/>
+                <a:cs typeface="Times New Roman" pitchFamily="34" charset="-120"/>
               </a:rPr>
               <a:t>Building</a:t>
             </a:r>
@@ -33313,6 +34684,9 @@
                 <a:solidFill>
                   <a:srgbClr val="FFFFFF"/>
                 </a:solidFill>
+                <a:latin typeface="Times New Roman" pitchFamily="34" charset="0"/>
+                <a:ea typeface="Times New Roman" pitchFamily="34" charset="-122"/>
+                <a:cs typeface="Times New Roman" pitchFamily="34" charset="-120"/>
               </a:rPr>
               <a:t>Form</a:t>
             </a:r>
@@ -33395,6 +34769,9 @@
                 <a:solidFill>
                   <a:srgbClr val="FFFFFF"/>
                 </a:solidFill>
+                <a:latin typeface="Times New Roman" pitchFamily="34" charset="0"/>
+                <a:ea typeface="Times New Roman" pitchFamily="34" charset="-122"/>
+                <a:cs typeface="Times New Roman" pitchFamily="34" charset="-120"/>
               </a:rPr>
               <a:t>Structure</a:t>
             </a:r>
@@ -33477,6 +34854,9 @@
                 <a:solidFill>
                   <a:srgbClr val="FFFFFF"/>
                 </a:solidFill>
+                <a:latin typeface="Times New Roman" pitchFamily="34" charset="0"/>
+                <a:ea typeface="Times New Roman" pitchFamily="34" charset="-122"/>
+                <a:cs typeface="Times New Roman" pitchFamily="34" charset="-120"/>
               </a:rPr>
               <a:t>Envelope</a:t>
             </a:r>
@@ -33513,6 +34893,9 @@
                 <a:solidFill>
                   <a:srgbClr val="C2593A"/>
                 </a:solidFill>
+                <a:latin typeface="Times New Roman" pitchFamily="34" charset="0"/>
+                <a:ea typeface="Times New Roman" pitchFamily="34" charset="-122"/>
+                <a:cs typeface="Times New Roman" pitchFamily="34" charset="-120"/>
               </a:rPr>
               <a:t>التصميم الداخلي — الداخل</a:t>
             </a:r>
@@ -33549,6 +34932,9 @@
                 <a:solidFill>
                   <a:srgbClr val="5B6770"/>
                 </a:solidFill>
+                <a:latin typeface="Times New Roman" pitchFamily="34" charset="0"/>
+                <a:ea typeface="Times New Roman" pitchFamily="34" charset="-122"/>
+                <a:cs typeface="Times New Roman" pitchFamily="34" charset="-120"/>
               </a:rPr>
               <a:t>Interior Design</a:t>
             </a:r>
@@ -33607,6 +34993,9 @@
                 <a:solidFill>
                   <a:srgbClr val="FFFFFF"/>
                 </a:solidFill>
+                <a:latin typeface="Times New Roman" pitchFamily="34" charset="0"/>
+                <a:ea typeface="Times New Roman" pitchFamily="34" charset="-122"/>
+                <a:cs typeface="Times New Roman" pitchFamily="34" charset="-120"/>
               </a:rPr>
               <a:t>Building</a:t>
             </a:r>
@@ -33689,6 +35078,9 @@
                 <a:solidFill>
                   <a:srgbClr val="FFFFFF"/>
                 </a:solidFill>
+                <a:latin typeface="Times New Roman" pitchFamily="34" charset="0"/>
+                <a:ea typeface="Times New Roman" pitchFamily="34" charset="-122"/>
+                <a:cs typeface="Times New Roman" pitchFamily="34" charset="-120"/>
               </a:rPr>
               <a:t>Space</a:t>
             </a:r>
@@ -33771,6 +35163,9 @@
                 <a:solidFill>
                   <a:srgbClr val="FFFFFF"/>
                 </a:solidFill>
+                <a:latin typeface="Times New Roman" pitchFamily="34" charset="0"/>
+                <a:ea typeface="Times New Roman" pitchFamily="34" charset="-122"/>
+                <a:cs typeface="Times New Roman" pitchFamily="34" charset="-120"/>
               </a:rPr>
               <a:t>Human</a:t>
             </a:r>
@@ -33853,6 +35248,9 @@
                 <a:solidFill>
                   <a:srgbClr val="FFFFFF"/>
                 </a:solidFill>
+                <a:latin typeface="Times New Roman" pitchFamily="34" charset="0"/>
+                <a:ea typeface="Times New Roman" pitchFamily="34" charset="-122"/>
+                <a:cs typeface="Times New Roman" pitchFamily="34" charset="-120"/>
               </a:rPr>
               <a:t>Function</a:t>
             </a:r>
@@ -33935,6 +35333,9 @@
                 <a:solidFill>
                   <a:srgbClr val="FFFFFF"/>
                 </a:solidFill>
+                <a:latin typeface="Times New Roman" pitchFamily="34" charset="0"/>
+                <a:ea typeface="Times New Roman" pitchFamily="34" charset="-122"/>
+                <a:cs typeface="Times New Roman" pitchFamily="34" charset="-120"/>
               </a:rPr>
               <a:t>Experience</a:t>
             </a:r>
@@ -34037,6 +35438,9 @@
                 <a:solidFill>
                   <a:srgbClr val="FFFFFF"/>
                 </a:solidFill>
+                <a:latin typeface="Times New Roman" pitchFamily="34" charset="0"/>
+                <a:ea typeface="Times New Roman" pitchFamily="34" charset="-122"/>
+                <a:cs typeface="Times New Roman" pitchFamily="34" charset="-120"/>
               </a:rPr>
               <a:t>لا يوجد جدار حقيقي بين التخصصين: المبنى يؤثر على الداخل، والداخل يؤثر على إدراك المبنى واستخدامه.</a:t>
             </a:r>
@@ -34143,6 +35547,9 @@
                 <a:solidFill>
                   <a:srgbClr val="C2593A"/>
                 </a:solidFill>
+                <a:latin typeface="Times New Roman" pitchFamily="34" charset="0"/>
+                <a:ea typeface="Times New Roman" pitchFamily="34" charset="-122"/>
+                <a:cs typeface="Times New Roman" pitchFamily="34" charset="-120"/>
               </a:rPr>
               <a:t>05 — WHAT ARE WE DESIGNING?</a:t>
             </a:r>
@@ -34179,6 +35586,9 @@
                 <a:solidFill>
                   <a:srgbClr val="FFFFFF"/>
                 </a:solidFill>
+                <a:latin typeface="Times New Roman" pitchFamily="34" charset="0"/>
+                <a:ea typeface="Times New Roman" pitchFamily="34" charset="-122"/>
+                <a:cs typeface="Times New Roman" pitchFamily="34" charset="-120"/>
               </a:rPr>
               <a:t>ماذا نصمم في التصميم الداخلي؟</a:t>
             </a:r>
@@ -34281,6 +35691,9 @@
                 <a:solidFill>
                   <a:srgbClr val="FFFFFF"/>
                 </a:solidFill>
+                <a:latin typeface="Times New Roman" pitchFamily="34" charset="0"/>
+                <a:ea typeface="Times New Roman" pitchFamily="34" charset="-122"/>
+                <a:cs typeface="Times New Roman" pitchFamily="34" charset="-120"/>
               </a:rPr>
               <a:t>هل نصمم الأثاث؟</a:t>
             </a:r>
@@ -34317,6 +35730,9 @@
                 <a:solidFill>
                   <a:srgbClr val="C2593A"/>
                 </a:solidFill>
+                <a:latin typeface="Times New Roman" pitchFamily="34" charset="0"/>
+                <a:ea typeface="Times New Roman" pitchFamily="34" charset="-122"/>
+                <a:cs typeface="Times New Roman" pitchFamily="34" charset="-120"/>
               </a:rPr>
               <a:t>لا</a:t>
             </a:r>
@@ -34419,6 +35835,9 @@
                 <a:solidFill>
                   <a:srgbClr val="FFFFFF"/>
                 </a:solidFill>
+                <a:latin typeface="Times New Roman" pitchFamily="34" charset="0"/>
+                <a:ea typeface="Times New Roman" pitchFamily="34" charset="-122"/>
+                <a:cs typeface="Times New Roman" pitchFamily="34" charset="-120"/>
               </a:rPr>
               <a:t>هل نصمم الجدران فقط؟</a:t>
             </a:r>
@@ -34455,6 +35874,9 @@
                 <a:solidFill>
                   <a:srgbClr val="C2593A"/>
                 </a:solidFill>
+                <a:latin typeface="Times New Roman" pitchFamily="34" charset="0"/>
+                <a:ea typeface="Times New Roman" pitchFamily="34" charset="-122"/>
+                <a:cs typeface="Times New Roman" pitchFamily="34" charset="-120"/>
               </a:rPr>
               <a:t>لا</a:t>
             </a:r>
@@ -34491,6 +35913,9 @@
                 <a:solidFill>
                   <a:srgbClr val="B9C4C4"/>
                 </a:solidFill>
+                <a:latin typeface="Times New Roman" pitchFamily="34" charset="0"/>
+                <a:ea typeface="Times New Roman" pitchFamily="34" charset="-122"/>
+                <a:cs typeface="Times New Roman" pitchFamily="34" charset="-120"/>
               </a:rPr>
               <a:t>إذن ماذا نصمم؟</a:t>
             </a:r>
@@ -34527,6 +35952,9 @@
                 <a:solidFill>
                   <a:srgbClr val="FFFFFF"/>
                 </a:solidFill>
+                <a:latin typeface="Times New Roman" pitchFamily="34" charset="0"/>
+                <a:ea typeface="Times New Roman" pitchFamily="34" charset="-122"/>
+                <a:cs typeface="Times New Roman" pitchFamily="34" charset="-120"/>
               </a:rPr>
               <a:t>نحن نصمم الفراغ</a:t>
             </a:r>
@@ -34563,6 +35991,9 @@
                 <a:solidFill>
                   <a:srgbClr val="D9A441"/>
                 </a:solidFill>
+                <a:latin typeface="Times New Roman" pitchFamily="34" charset="0"/>
+                <a:ea typeface="Times New Roman" pitchFamily="34" charset="-122"/>
+                <a:cs typeface="Times New Roman" pitchFamily="34" charset="-120"/>
               </a:rPr>
               <a:t>WE DESIGN SPACE</a:t>
             </a:r>
@@ -34671,6 +36102,9 @@
                 <a:solidFill>
                   <a:schemeClr val="accent1"/>
                 </a:solidFill>
+                <a:latin typeface="Times New Roman" pitchFamily="34" charset="0"/>
+                <a:ea typeface="Times New Roman" pitchFamily="34" charset="-122"/>
+                <a:cs typeface="Times New Roman" pitchFamily="34" charset="-120"/>
               </a:rPr>
               <a:t>06 — WHAT IS SPACE?</a:t>
             </a:r>
@@ -34709,6 +36143,9 @@
                 <a:solidFill>
                   <a:schemeClr val="tx1"/>
                 </a:solidFill>
+                <a:latin typeface="Times New Roman" pitchFamily="34" charset="0"/>
+                <a:ea typeface="Times New Roman" pitchFamily="34" charset="-122"/>
+                <a:cs typeface="Times New Roman" pitchFamily="34" charset="-120"/>
               </a:rPr>
               <a:t>ما هو الفراغ؟</a:t>
             </a:r>
@@ -34767,6 +36204,9 @@
                 <a:solidFill>
                   <a:srgbClr val="B9C4C4"/>
                 </a:solidFill>
+                <a:latin typeface="Times New Roman" pitchFamily="34" charset="0"/>
+                <a:ea typeface="Times New Roman" pitchFamily="34" charset="-122"/>
+                <a:cs typeface="Times New Roman" pitchFamily="34" charset="-120"/>
               </a:rPr>
               <a:t>الفراغ ليس مجرد مساحة فارغة؛</a:t>
             </a:r>
@@ -34803,6 +36243,9 @@
                 <a:solidFill>
                   <a:srgbClr val="FFFFFF"/>
                 </a:solidFill>
+                <a:latin typeface="Times New Roman" pitchFamily="34" charset="0"/>
+                <a:ea typeface="Times New Roman" pitchFamily="34" charset="-122"/>
+                <a:cs typeface="Times New Roman" pitchFamily="34" charset="-120"/>
               </a:rPr>
               <a:t>هو الحيّز الذي يحدث داخله النشاط الإنساني.</a:t>
             </a:r>
@@ -34883,6 +36326,9 @@
                 <a:solidFill>
                   <a:srgbClr val="1F2224"/>
                 </a:solidFill>
+                <a:latin typeface="Times New Roman" pitchFamily="34" charset="0"/>
+                <a:ea typeface="Times New Roman" pitchFamily="34" charset="-122"/>
+                <a:cs typeface="Times New Roman" pitchFamily="34" charset="-120"/>
               </a:rPr>
               <a:t>غرفة النوم</a:t>
             </a:r>
@@ -34919,6 +36365,9 @@
                 <a:solidFill>
                   <a:srgbClr val="5B6770"/>
                 </a:solidFill>
+                <a:latin typeface="Times New Roman" pitchFamily="34" charset="0"/>
+                <a:ea typeface="Times New Roman" pitchFamily="34" charset="-122"/>
+                <a:cs typeface="Times New Roman" pitchFamily="34" charset="-120"/>
               </a:rPr>
               <a:t>Bedroom</a:t>
             </a:r>
@@ -34977,6 +36426,9 @@
                 <a:solidFill>
                   <a:srgbClr val="FFFFFF"/>
                 </a:solidFill>
+                <a:latin typeface="Times New Roman" pitchFamily="34" charset="0"/>
+                <a:ea typeface="Times New Roman" pitchFamily="34" charset="-122"/>
+                <a:cs typeface="Times New Roman" pitchFamily="34" charset="-120"/>
               </a:rPr>
               <a:t>Space</a:t>
             </a:r>
@@ -35013,6 +36465,9 @@
                 <a:solidFill>
                   <a:srgbClr val="8A9A9B"/>
                 </a:solidFill>
+                <a:latin typeface="Times New Roman" pitchFamily="34" charset="0"/>
+                <a:ea typeface="Times New Roman" pitchFamily="34" charset="-122"/>
+                <a:cs typeface="Times New Roman" pitchFamily="34" charset="-120"/>
               </a:rPr>
               <a:t>+</a:t>
             </a:r>
@@ -35071,6 +36526,9 @@
                 <a:solidFill>
                   <a:srgbClr val="1F2224"/>
                 </a:solidFill>
+                <a:latin typeface="Times New Roman" pitchFamily="34" charset="0"/>
+                <a:ea typeface="Times New Roman" pitchFamily="34" charset="-122"/>
+                <a:cs typeface="Times New Roman" pitchFamily="34" charset="-120"/>
               </a:rPr>
               <a:t>Sleeping</a:t>
             </a:r>
@@ -35107,6 +36565,9 @@
                 <a:solidFill>
                   <a:srgbClr val="8A9A9B"/>
                 </a:solidFill>
+                <a:latin typeface="Times New Roman" pitchFamily="34" charset="0"/>
+                <a:ea typeface="Times New Roman" pitchFamily="34" charset="-122"/>
+                <a:cs typeface="Times New Roman" pitchFamily="34" charset="-120"/>
               </a:rPr>
               <a:t>+</a:t>
             </a:r>
@@ -35165,6 +36626,9 @@
                 <a:solidFill>
                   <a:srgbClr val="1F2224"/>
                 </a:solidFill>
+                <a:latin typeface="Times New Roman" pitchFamily="34" charset="0"/>
+                <a:ea typeface="Times New Roman" pitchFamily="34" charset="-122"/>
+                <a:cs typeface="Times New Roman" pitchFamily="34" charset="-120"/>
               </a:rPr>
               <a:t>Movement</a:t>
             </a:r>
@@ -35201,6 +36665,9 @@
                 <a:solidFill>
                   <a:srgbClr val="8A9A9B"/>
                 </a:solidFill>
+                <a:latin typeface="Times New Roman" pitchFamily="34" charset="0"/>
+                <a:ea typeface="Times New Roman" pitchFamily="34" charset="-122"/>
+                <a:cs typeface="Times New Roman" pitchFamily="34" charset="-120"/>
               </a:rPr>
               <a:t>+</a:t>
             </a:r>
@@ -35259,6 +36726,9 @@
                 <a:solidFill>
                   <a:srgbClr val="1F2224"/>
                 </a:solidFill>
+                <a:latin typeface="Times New Roman" pitchFamily="34" charset="0"/>
+                <a:ea typeface="Times New Roman" pitchFamily="34" charset="-122"/>
+                <a:cs typeface="Times New Roman" pitchFamily="34" charset="-120"/>
               </a:rPr>
               <a:t>Storage</a:t>
             </a:r>
@@ -35295,6 +36765,9 @@
                 <a:solidFill>
                   <a:srgbClr val="8A9A9B"/>
                 </a:solidFill>
+                <a:latin typeface="Times New Roman" pitchFamily="34" charset="0"/>
+                <a:ea typeface="Times New Roman" pitchFamily="34" charset="-122"/>
+                <a:cs typeface="Times New Roman" pitchFamily="34" charset="-120"/>
               </a:rPr>
               <a:t>+</a:t>
             </a:r>
@@ -35353,6 +36826,9 @@
                 <a:solidFill>
                   <a:srgbClr val="1F2224"/>
                 </a:solidFill>
+                <a:latin typeface="Times New Roman" pitchFamily="34" charset="0"/>
+                <a:ea typeface="Times New Roman" pitchFamily="34" charset="-122"/>
+                <a:cs typeface="Times New Roman" pitchFamily="34" charset="-120"/>
               </a:rPr>
               <a:t>Privacy</a:t>
             </a:r>
@@ -35389,6 +36865,9 @@
                 <a:solidFill>
                   <a:srgbClr val="8A9A9B"/>
                 </a:solidFill>
+                <a:latin typeface="Times New Roman" pitchFamily="34" charset="0"/>
+                <a:ea typeface="Times New Roman" pitchFamily="34" charset="-122"/>
+                <a:cs typeface="Times New Roman" pitchFamily="34" charset="-120"/>
               </a:rPr>
               <a:t>+</a:t>
             </a:r>
@@ -35447,6 +36926,9 @@
                 <a:solidFill>
                   <a:srgbClr val="1F2224"/>
                 </a:solidFill>
+                <a:latin typeface="Times New Roman" pitchFamily="34" charset="0"/>
+                <a:ea typeface="Times New Roman" pitchFamily="34" charset="-122"/>
+                <a:cs typeface="Times New Roman" pitchFamily="34" charset="-120"/>
               </a:rPr>
               <a:t>Light</a:t>
             </a:r>
@@ -35527,6 +37009,9 @@
                 <a:solidFill>
                   <a:srgbClr val="1F2224"/>
                 </a:solidFill>
+                <a:latin typeface="Times New Roman" pitchFamily="34" charset="0"/>
+                <a:ea typeface="Times New Roman" pitchFamily="34" charset="-122"/>
+                <a:cs typeface="Times New Roman" pitchFamily="34" charset="-120"/>
               </a:rPr>
               <a:t>غرفة المعيشة</a:t>
             </a:r>
@@ -35563,6 +37048,9 @@
                 <a:solidFill>
                   <a:srgbClr val="5B6770"/>
                 </a:solidFill>
+                <a:latin typeface="Times New Roman" pitchFamily="34" charset="0"/>
+                <a:ea typeface="Times New Roman" pitchFamily="34" charset="-122"/>
+                <a:cs typeface="Times New Roman" pitchFamily="34" charset="-120"/>
               </a:rPr>
               <a:t>Living Room</a:t>
             </a:r>
@@ -35621,6 +37109,9 @@
                 <a:solidFill>
                   <a:srgbClr val="FFFFFF"/>
                 </a:solidFill>
+                <a:latin typeface="Times New Roman" pitchFamily="34" charset="0"/>
+                <a:ea typeface="Times New Roman" pitchFamily="34" charset="-122"/>
+                <a:cs typeface="Times New Roman" pitchFamily="34" charset="-120"/>
               </a:rPr>
               <a:t>Space</a:t>
             </a:r>
@@ -35657,6 +37148,9 @@
                 <a:solidFill>
                   <a:srgbClr val="8A9A9B"/>
                 </a:solidFill>
+                <a:latin typeface="Times New Roman" pitchFamily="34" charset="0"/>
+                <a:ea typeface="Times New Roman" pitchFamily="34" charset="-122"/>
+                <a:cs typeface="Times New Roman" pitchFamily="34" charset="-120"/>
               </a:rPr>
               <a:t>+</a:t>
             </a:r>
@@ -35715,6 +37209,9 @@
                 <a:solidFill>
                   <a:srgbClr val="1F2224"/>
                 </a:solidFill>
+                <a:latin typeface="Times New Roman" pitchFamily="34" charset="0"/>
+                <a:ea typeface="Times New Roman" pitchFamily="34" charset="-122"/>
+                <a:cs typeface="Times New Roman" pitchFamily="34" charset="-120"/>
               </a:rPr>
               <a:t>Sitting</a:t>
             </a:r>
@@ -35751,6 +37248,9 @@
                 <a:solidFill>
                   <a:srgbClr val="8A9A9B"/>
                 </a:solidFill>
+                <a:latin typeface="Times New Roman" pitchFamily="34" charset="0"/>
+                <a:ea typeface="Times New Roman" pitchFamily="34" charset="-122"/>
+                <a:cs typeface="Times New Roman" pitchFamily="34" charset="-120"/>
               </a:rPr>
               <a:t>+</a:t>
             </a:r>
@@ -35809,6 +37309,9 @@
                 <a:solidFill>
                   <a:srgbClr val="1F2224"/>
                 </a:solidFill>
+                <a:latin typeface="Times New Roman" pitchFamily="34" charset="0"/>
+                <a:ea typeface="Times New Roman" pitchFamily="34" charset="-122"/>
+                <a:cs typeface="Times New Roman" pitchFamily="34" charset="-120"/>
               </a:rPr>
               <a:t>Communication</a:t>
             </a:r>
@@ -35845,6 +37348,9 @@
                 <a:solidFill>
                   <a:srgbClr val="8A9A9B"/>
                 </a:solidFill>
+                <a:latin typeface="Times New Roman" pitchFamily="34" charset="0"/>
+                <a:ea typeface="Times New Roman" pitchFamily="34" charset="-122"/>
+                <a:cs typeface="Times New Roman" pitchFamily="34" charset="-120"/>
               </a:rPr>
               <a:t>+</a:t>
             </a:r>
@@ -35903,6 +37409,9 @@
                 <a:solidFill>
                   <a:srgbClr val="1F2224"/>
                 </a:solidFill>
+                <a:latin typeface="Times New Roman" pitchFamily="34" charset="0"/>
+                <a:ea typeface="Times New Roman" pitchFamily="34" charset="-122"/>
+                <a:cs typeface="Times New Roman" pitchFamily="34" charset="-120"/>
               </a:rPr>
               <a:t>Movement</a:t>
             </a:r>
@@ -35939,6 +37448,9 @@
                 <a:solidFill>
                   <a:srgbClr val="8A9A9B"/>
                 </a:solidFill>
+                <a:latin typeface="Times New Roman" pitchFamily="34" charset="0"/>
+                <a:ea typeface="Times New Roman" pitchFamily="34" charset="-122"/>
+                <a:cs typeface="Times New Roman" pitchFamily="34" charset="-120"/>
               </a:rPr>
               <a:t>+</a:t>
             </a:r>
@@ -35997,6 +37509,9 @@
                 <a:solidFill>
                   <a:srgbClr val="1F2224"/>
                 </a:solidFill>
+                <a:latin typeface="Times New Roman" pitchFamily="34" charset="0"/>
+                <a:ea typeface="Times New Roman" pitchFamily="34" charset="-122"/>
+                <a:cs typeface="Times New Roman" pitchFamily="34" charset="-120"/>
               </a:rPr>
               <a:t>Social Interaction</a:t>
             </a:r>
@@ -36267,6 +37782,9 @@
                 <a:solidFill>
                   <a:srgbClr val="5B6770"/>
                 </a:solidFill>
+                <a:latin typeface="Times New Roman" pitchFamily="34" charset="0"/>
+                <a:ea typeface="Times New Roman" pitchFamily="34" charset="-122"/>
+                <a:cs typeface="Times New Roman" pitchFamily="34" charset="-120"/>
               </a:rPr>
               <a:t>4 Walls + Floor + Ceiling</a:t>
             </a:r>
@@ -36398,6 +37916,9 @@
                 <a:solidFill>
                   <a:srgbClr val="2F6B6A"/>
                 </a:solidFill>
+                <a:latin typeface="Times New Roman" pitchFamily="34" charset="0"/>
+                <a:ea typeface="Times New Roman" pitchFamily="34" charset="-122"/>
+                <a:cs typeface="Times New Roman" pitchFamily="34" charset="-120"/>
               </a:rPr>
               <a:t>إذن: الفراغ يتحدد من خلال ما يحدث داخله، وليس من خلال أبعاده فقط.</a:t>
             </a:r>
@@ -36501,9 +38022,9 @@
     </a:clrScheme>
     <a:fontScheme name="Interior Studio">
       <a:majorFont>
-        <a:latin typeface="Arial"/>
+        <a:latin typeface="Times New Roman"/>
         <a:ea typeface=""/>
-        <a:cs typeface=""/>
+        <a:cs typeface="Times New Roman"/>
         <a:font script="Jpan" typeface="游ゴシック Light"/>
         <a:font script="Hang" typeface="맑은 고딕"/>
         <a:font script="Hans" typeface="等线 Light"/>
@@ -36553,14 +38074,14 @@
         <a:font script="Tfng" typeface="Ebrima"/>
       </a:majorFont>
       <a:minorFont>
-        <a:latin typeface="Arial"/>
+        <a:latin typeface="Times New Roman"/>
         <a:ea typeface=""/>
-        <a:cs typeface=""/>
+        <a:cs typeface="Times New Roman"/>
         <a:font script="Jpan" typeface="游ゴシック"/>
         <a:font script="Hang" typeface="맑은 고딕"/>
         <a:font script="Hans" typeface="等线"/>
         <a:font script="Hant" typeface="新細明體"/>
-        <a:font script="Arab" typeface="Arial"/>
+        <a:font script="Arab" typeface="Times New Roman"/>
         <a:font script="Hebr" typeface="Arial"/>
         <a:font script="Thai" typeface="Cordia New"/>
         <a:font script="Ethi" typeface="Nyala"/>
